--- a/Python/Lesson 11 - Testing/Lesson 11 - Testing.pptx
+++ b/Python/Lesson 11 - Testing/Lesson 11 - Testing.pptx
@@ -5,12 +5,29 @@
     <p:sldMasterId id="2147483673" r:id="rId1"/>
   </p:sldMasterIdLst>
   <p:notesMasterIdLst>
-    <p:notesMasterId r:id="rId5"/>
+    <p:notesMasterId r:id="rId22"/>
   </p:notesMasterIdLst>
   <p:sldIdLst>
     <p:sldId id="321" r:id="rId2"/>
     <p:sldId id="322" r:id="rId3"/>
-    <p:sldId id="313" r:id="rId4"/>
+    <p:sldId id="323" r:id="rId4"/>
+    <p:sldId id="324" r:id="rId5"/>
+    <p:sldId id="325" r:id="rId6"/>
+    <p:sldId id="326" r:id="rId7"/>
+    <p:sldId id="328" r:id="rId8"/>
+    <p:sldId id="335" r:id="rId9"/>
+    <p:sldId id="336" r:id="rId10"/>
+    <p:sldId id="327" r:id="rId11"/>
+    <p:sldId id="337" r:id="rId12"/>
+    <p:sldId id="338" r:id="rId13"/>
+    <p:sldId id="339" r:id="rId14"/>
+    <p:sldId id="331" r:id="rId15"/>
+    <p:sldId id="333" r:id="rId16"/>
+    <p:sldId id="329" r:id="rId17"/>
+    <p:sldId id="330" r:id="rId18"/>
+    <p:sldId id="332" r:id="rId19"/>
+    <p:sldId id="334" r:id="rId20"/>
+    <p:sldId id="313" r:id="rId21"/>
   </p:sldIdLst>
   <p:sldSz cx="9144000" cy="5143500" type="screen16x9"/>
   <p:notesSz cx="6858000" cy="9144000"/>
@@ -703,6 +720,75 @@
 </p:notesMaster>
 </file>
 
+<file path=ppt/notesSlides/notesSlide1.xml><?xml version="1.0" encoding="utf-8"?>
+<p:notes xmlns:a="http://schemas.openxmlformats.org/drawingml/2006/main" xmlns:r="http://schemas.openxmlformats.org/officeDocument/2006/relationships" xmlns:p="http://schemas.openxmlformats.org/presentationml/2006/main">
+  <p:cSld>
+    <p:spTree>
+      <p:nvGrpSpPr>
+        <p:cNvPr id="1" name=""/>
+        <p:cNvGrpSpPr/>
+        <p:nvPr/>
+      </p:nvGrpSpPr>
+      <p:grpSpPr>
+        <a:xfrm>
+          <a:off x="0" y="0"/>
+          <a:ext cx="0" cy="0"/>
+          <a:chOff x="0" y="0"/>
+          <a:chExt cx="0" cy="0"/>
+        </a:xfrm>
+      </p:grpSpPr>
+      <p:sp>
+        <p:nvSpPr>
+          <p:cNvPr id="2" name="Slide Image Placeholder 1"/>
+          <p:cNvSpPr>
+            <a:spLocks noGrp="1" noRot="1" noChangeAspect="1"/>
+          </p:cNvSpPr>
+          <p:nvPr>
+            <p:ph type="sldImg"/>
+          </p:nvPr>
+        </p:nvSpPr>
+        <p:spPr>
+          <a:xfrm>
+            <a:off x="381000" y="685800"/>
+            <a:ext cx="6096000" cy="3429000"/>
+          </a:xfrm>
+        </p:spPr>
+      </p:sp>
+      <p:sp>
+        <p:nvSpPr>
+          <p:cNvPr id="3" name="Notes Placeholder 2"/>
+          <p:cNvSpPr>
+            <a:spLocks noGrp="1"/>
+          </p:cNvSpPr>
+          <p:nvPr>
+            <p:ph type="body" idx="1"/>
+          </p:nvPr>
+        </p:nvSpPr>
+        <p:spPr/>
+        <p:txBody>
+          <a:bodyPr/>
+          <a:lstStyle/>
+          <a:p>
+            <a:r>
+              <a:rPr lang="en-US" dirty="0"/>
+              <a:t>How would you write “given, when, then” for the code on the right?</a:t>
+            </a:r>
+          </a:p>
+        </p:txBody>
+      </p:sp>
+    </p:spTree>
+    <p:extLst>
+      <p:ext uri="{BB962C8B-B14F-4D97-AF65-F5344CB8AC3E}">
+        <p14:creationId xmlns:p14="http://schemas.microsoft.com/office/powerpoint/2010/main" val="2591244821"/>
+      </p:ext>
+    </p:extLst>
+  </p:cSld>
+  <p:clrMapOvr>
+    <a:masterClrMapping/>
+  </p:clrMapOvr>
+</p:notes>
+</file>
+
 <file path=ppt/slideLayouts/slideLayout1.xml><?xml version="1.0" encoding="utf-8"?>
 <p:sldLayout xmlns:a="http://schemas.openxmlformats.org/drawingml/2006/main" xmlns:r="http://schemas.openxmlformats.org/officeDocument/2006/relationships" xmlns:p="http://schemas.openxmlformats.org/presentationml/2006/main" showMasterSp="0" preserve="1" userDrawn="1">
   <p:cSld name="Title Slide">
@@ -751,7 +837,7 @@
           <a:p>
             <a:fld id="{7A3E0868-4E26-4CDC-8A56-D70E2D8B12FE}" type="datetime3">
               <a:rPr lang="en-US" smtClean="0"/>
-              <a:t>10 June 2026</a:t>
+              <a:t>15 June 2026</a:t>
             </a:fld>
             <a:endParaRPr lang="en-US"/>
           </a:p>
@@ -2088,6 +2174,9 @@
             <a:off x="685801" y="2838549"/>
             <a:ext cx="2674143" cy="342900"/>
           </a:xfrm>
+          <a:prstGeom prst="rect">
+            <a:avLst/>
+          </a:prstGeom>
         </p:spPr>
         <p:txBody>
           <a:bodyPr anchor="ctr" anchorCtr="0"/>
@@ -2221,6 +2310,9 @@
             <a:off x="3909060" y="2838549"/>
             <a:ext cx="1598771" cy="342900"/>
           </a:xfrm>
+          <a:prstGeom prst="rect">
+            <a:avLst/>
+          </a:prstGeom>
         </p:spPr>
         <p:txBody>
           <a:bodyPr anchor="ctr" anchorCtr="0"/>
@@ -2640,6 +2732,9 @@
             <a:off x="411481" y="1714500"/>
             <a:ext cx="1874519" cy="2914650"/>
           </a:xfrm>
+          <a:prstGeom prst="rect">
+            <a:avLst/>
+          </a:prstGeom>
         </p:spPr>
         <p:txBody>
           <a:bodyPr/>
@@ -2827,6 +2922,9 @@
             <a:off x="2560321" y="1714500"/>
             <a:ext cx="1874519" cy="2914650"/>
           </a:xfrm>
+          <a:prstGeom prst="rect">
+            <a:avLst/>
+          </a:prstGeom>
         </p:spPr>
         <p:txBody>
           <a:bodyPr/>
@@ -3019,6 +3117,9 @@
             <a:off x="4709161" y="1714500"/>
             <a:ext cx="1874519" cy="2914650"/>
           </a:xfrm>
+          <a:prstGeom prst="rect">
+            <a:avLst/>
+          </a:prstGeom>
         </p:spPr>
         <p:txBody>
           <a:bodyPr/>
@@ -3211,6 +3312,9 @@
             <a:off x="6858001" y="1714500"/>
             <a:ext cx="1874519" cy="2914650"/>
           </a:xfrm>
+          <a:prstGeom prst="rect">
+            <a:avLst/>
+          </a:prstGeom>
         </p:spPr>
         <p:txBody>
           <a:bodyPr/>
@@ -3312,7 +3416,7 @@
           <a:p>
             <a:fld id="{A7B8021B-6105-4216-96FC-94348F216D0E}" type="datetime3">
               <a:rPr lang="en-US" smtClean="0"/>
-              <a:t>10 June 2026</a:t>
+              <a:t>15 June 2026</a:t>
             </a:fld>
             <a:endParaRPr lang="en-US"/>
           </a:p>
@@ -3542,6 +3646,9 @@
             <a:off x="411481" y="1714500"/>
             <a:ext cx="1874519" cy="994410"/>
           </a:xfrm>
+          <a:prstGeom prst="rect">
+            <a:avLst/>
+          </a:prstGeom>
         </p:spPr>
         <p:txBody>
           <a:bodyPr/>
@@ -3732,6 +3839,9 @@
             <a:off x="2560321" y="1714500"/>
             <a:ext cx="1874519" cy="994410"/>
           </a:xfrm>
+          <a:prstGeom prst="rect">
+            <a:avLst/>
+          </a:prstGeom>
         </p:spPr>
         <p:txBody>
           <a:bodyPr/>
@@ -3928,6 +4038,9 @@
             <a:off x="4709161" y="1714500"/>
             <a:ext cx="1874519" cy="994410"/>
           </a:xfrm>
+          <a:prstGeom prst="rect">
+            <a:avLst/>
+          </a:prstGeom>
         </p:spPr>
         <p:txBody>
           <a:bodyPr/>
@@ -4124,6 +4237,9 @@
             <a:off x="6858001" y="1714500"/>
             <a:ext cx="1874519" cy="994410"/>
           </a:xfrm>
+          <a:prstGeom prst="rect">
+            <a:avLst/>
+          </a:prstGeom>
         </p:spPr>
         <p:txBody>
           <a:bodyPr/>
@@ -4320,6 +4436,9 @@
             <a:off x="411481" y="3429000"/>
             <a:ext cx="1874519" cy="994410"/>
           </a:xfrm>
+          <a:prstGeom prst="rect">
+            <a:avLst/>
+          </a:prstGeom>
         </p:spPr>
         <p:txBody>
           <a:bodyPr/>
@@ -4516,6 +4635,9 @@
             <a:off x="2560321" y="3429000"/>
             <a:ext cx="1874519" cy="994410"/>
           </a:xfrm>
+          <a:prstGeom prst="rect">
+            <a:avLst/>
+          </a:prstGeom>
         </p:spPr>
         <p:txBody>
           <a:bodyPr/>
@@ -4712,6 +4834,9 @@
             <a:off x="4709161" y="3429000"/>
             <a:ext cx="1874519" cy="994410"/>
           </a:xfrm>
+          <a:prstGeom prst="rect">
+            <a:avLst/>
+          </a:prstGeom>
         </p:spPr>
         <p:txBody>
           <a:bodyPr/>
@@ -4908,6 +5033,9 @@
             <a:off x="6858001" y="3429000"/>
             <a:ext cx="1874519" cy="994410"/>
           </a:xfrm>
+          <a:prstGeom prst="rect">
+            <a:avLst/>
+          </a:prstGeom>
         </p:spPr>
         <p:txBody>
           <a:bodyPr/>
@@ -5009,7 +5137,7 @@
           <a:p>
             <a:fld id="{5D27CFAB-73E6-44A8-B862-B3306344E3F2}" type="datetime3">
               <a:rPr lang="en-US" smtClean="0"/>
-              <a:t>10 June 2026</a:t>
+              <a:t>15 June 2026</a:t>
             </a:fld>
             <a:endParaRPr lang="en-US"/>
           </a:p>
@@ -5360,6 +5488,9 @@
             <a:off x="411481" y="1714500"/>
             <a:ext cx="1874519" cy="994410"/>
           </a:xfrm>
+          <a:prstGeom prst="rect">
+            <a:avLst/>
+          </a:prstGeom>
         </p:spPr>
         <p:txBody>
           <a:bodyPr/>
@@ -5546,6 +5677,9 @@
             <a:off x="2560321" y="1714500"/>
             <a:ext cx="1874519" cy="994410"/>
           </a:xfrm>
+          <a:prstGeom prst="rect">
+            <a:avLst/>
+          </a:prstGeom>
         </p:spPr>
         <p:txBody>
           <a:bodyPr/>
@@ -5738,6 +5872,9 @@
             <a:off x="4709161" y="1714500"/>
             <a:ext cx="1874519" cy="994410"/>
           </a:xfrm>
+          <a:prstGeom prst="rect">
+            <a:avLst/>
+          </a:prstGeom>
         </p:spPr>
         <p:txBody>
           <a:bodyPr/>
@@ -5930,6 +6067,9 @@
             <a:off x="6858001" y="1714500"/>
             <a:ext cx="1874519" cy="994410"/>
           </a:xfrm>
+          <a:prstGeom prst="rect">
+            <a:avLst/>
+          </a:prstGeom>
         </p:spPr>
         <p:txBody>
           <a:bodyPr/>
@@ -6122,6 +6262,9 @@
             <a:off x="411481" y="3429000"/>
             <a:ext cx="1874519" cy="994410"/>
           </a:xfrm>
+          <a:prstGeom prst="rect">
+            <a:avLst/>
+          </a:prstGeom>
         </p:spPr>
         <p:txBody>
           <a:bodyPr/>
@@ -6314,6 +6457,9 @@
             <a:off x="2560321" y="3429000"/>
             <a:ext cx="1874519" cy="994410"/>
           </a:xfrm>
+          <a:prstGeom prst="rect">
+            <a:avLst/>
+          </a:prstGeom>
         </p:spPr>
         <p:txBody>
           <a:bodyPr/>
@@ -6506,6 +6652,9 @@
             <a:off x="4709161" y="3429000"/>
             <a:ext cx="1874519" cy="994410"/>
           </a:xfrm>
+          <a:prstGeom prst="rect">
+            <a:avLst/>
+          </a:prstGeom>
         </p:spPr>
         <p:txBody>
           <a:bodyPr/>
@@ -6698,6 +6847,9 @@
             <a:off x="6858001" y="3429000"/>
             <a:ext cx="1874519" cy="994410"/>
           </a:xfrm>
+          <a:prstGeom prst="rect">
+            <a:avLst/>
+          </a:prstGeom>
         </p:spPr>
         <p:txBody>
           <a:bodyPr/>
@@ -6799,7 +6951,7 @@
           <a:p>
             <a:fld id="{A9B2E784-A5F5-4301-881B-94AC8DBF9DED}" type="datetime3">
               <a:rPr lang="en-US" smtClean="0"/>
-              <a:t>10 June 2026</a:t>
+              <a:t>15 June 2026</a:t>
             </a:fld>
             <a:endParaRPr lang="en-US"/>
           </a:p>
@@ -6902,6 +7054,9 @@
             <a:off x="0" y="171450"/>
             <a:ext cx="9144000" cy="4800600"/>
           </a:xfrm>
+          <a:prstGeom prst="rect">
+            <a:avLst/>
+          </a:prstGeom>
           <a:solidFill>
             <a:srgbClr val="D5D5D7"/>
           </a:solidFill>
@@ -6978,7 +7133,7 @@
           <a:p>
             <a:fld id="{18EAB3A5-9E92-4BB9-8F22-9632B4FBEDBA}" type="datetime3">
               <a:rPr lang="en-US" smtClean="0"/>
-              <a:t>10 June 2026</a:t>
+              <a:t>15 June 2026</a:t>
             </a:fld>
             <a:endParaRPr lang="en-US"/>
           </a:p>
@@ -7141,6 +7296,9 @@
             <a:off x="411479" y="1200150"/>
             <a:ext cx="4023360" cy="3429000"/>
           </a:xfrm>
+          <a:prstGeom prst="rect">
+            <a:avLst/>
+          </a:prstGeom>
         </p:spPr>
         <p:txBody>
           <a:bodyPr/>
@@ -7205,7 +7363,7 @@
           <a:p>
             <a:fld id="{40923810-5FB2-48C9-96CA-1DE2C4773142}" type="datetime3">
               <a:rPr lang="en-US" smtClean="0"/>
-              <a:t>10 June 2026</a:t>
+              <a:t>15 June 2026</a:t>
             </a:fld>
             <a:endParaRPr lang="en-US"/>
           </a:p>
@@ -7262,6 +7420,9 @@
             <a:off x="4708528" y="807244"/>
             <a:ext cx="4024311" cy="3821906"/>
           </a:xfrm>
+          <a:prstGeom prst="rect">
+            <a:avLst/>
+          </a:prstGeom>
           <a:solidFill>
             <a:srgbClr val="D5D5D7"/>
           </a:solidFill>
@@ -7354,6 +7515,9 @@
             <a:off x="411479" y="308610"/>
             <a:ext cx="8321040" cy="2331720"/>
           </a:xfrm>
+          <a:prstGeom prst="rect">
+            <a:avLst/>
+          </a:prstGeom>
           <a:solidFill>
             <a:srgbClr val="D5D5D7"/>
           </a:solidFill>
@@ -7431,6 +7595,9 @@
             <a:off x="4709159" y="2846070"/>
             <a:ext cx="4023360" cy="1783080"/>
           </a:xfrm>
+          <a:prstGeom prst="rect">
+            <a:avLst/>
+          </a:prstGeom>
         </p:spPr>
         <p:txBody>
           <a:bodyPr/>
@@ -7495,7 +7662,7 @@
           <a:p>
             <a:fld id="{E50EFF4B-86EB-42FB-93EA-7D8F9CB2466F}" type="datetime3">
               <a:rPr lang="en-US" smtClean="0"/>
-              <a:t>10 June 2026</a:t>
+              <a:t>15 June 2026</a:t>
             </a:fld>
             <a:endParaRPr lang="en-US"/>
           </a:p>
@@ -7631,6 +7798,9 @@
             <a:off x="411479" y="1200150"/>
             <a:ext cx="4023360" cy="1714500"/>
           </a:xfrm>
+          <a:prstGeom prst="rect">
+            <a:avLst/>
+          </a:prstGeom>
           <a:solidFill>
             <a:srgbClr val="D5D5D7"/>
           </a:solidFill>
@@ -7677,6 +7847,9 @@
             <a:off x="411478" y="3086100"/>
             <a:ext cx="4023360" cy="274320"/>
           </a:xfrm>
+          <a:prstGeom prst="rect">
+            <a:avLst/>
+          </a:prstGeom>
         </p:spPr>
         <p:txBody>
           <a:bodyPr/>
@@ -7778,6 +7951,9 @@
             <a:off x="411479" y="3394710"/>
             <a:ext cx="4023360" cy="1234440"/>
           </a:xfrm>
+          <a:prstGeom prst="rect">
+            <a:avLst/>
+          </a:prstGeom>
         </p:spPr>
         <p:txBody>
           <a:bodyPr/>
@@ -7868,6 +8044,9 @@
             <a:off x="4709159" y="1200150"/>
             <a:ext cx="4023360" cy="1714500"/>
           </a:xfrm>
+          <a:prstGeom prst="rect">
+            <a:avLst/>
+          </a:prstGeom>
           <a:solidFill>
             <a:srgbClr val="D5D5D7"/>
           </a:solidFill>
@@ -7914,6 +8093,9 @@
             <a:off x="4709159" y="3086100"/>
             <a:ext cx="4023360" cy="274320"/>
           </a:xfrm>
+          <a:prstGeom prst="rect">
+            <a:avLst/>
+          </a:prstGeom>
         </p:spPr>
         <p:txBody>
           <a:bodyPr/>
@@ -8015,6 +8197,9 @@
             <a:off x="4709159" y="3394710"/>
             <a:ext cx="4023360" cy="1234440"/>
           </a:xfrm>
+          <a:prstGeom prst="rect">
+            <a:avLst/>
+          </a:prstGeom>
         </p:spPr>
         <p:txBody>
           <a:bodyPr/>
@@ -8107,7 +8292,7 @@
           <a:p>
             <a:fld id="{FB14FC24-E041-45E9-9A72-E5755A86890F}" type="datetime3">
               <a:rPr lang="en-US" smtClean="0"/>
-              <a:t>10 June 2026</a:t>
+              <a:t>15 June 2026</a:t>
             </a:fld>
             <a:endParaRPr lang="en-US"/>
           </a:p>
@@ -8248,6 +8433,9 @@
             <a:off x="411479" y="1200150"/>
             <a:ext cx="2587752" cy="1268730"/>
           </a:xfrm>
+          <a:prstGeom prst="rect">
+            <a:avLst/>
+          </a:prstGeom>
           <a:solidFill>
             <a:srgbClr val="D5D5D7"/>
           </a:solidFill>
@@ -8294,6 +8482,9 @@
             <a:off x="411478" y="2640330"/>
             <a:ext cx="2587752" cy="274320"/>
           </a:xfrm>
+          <a:prstGeom prst="rect">
+            <a:avLst/>
+          </a:prstGeom>
         </p:spPr>
         <p:txBody>
           <a:bodyPr/>
@@ -8395,6 +8586,9 @@
             <a:off x="411479" y="2948940"/>
             <a:ext cx="2587752" cy="1680210"/>
           </a:xfrm>
+          <a:prstGeom prst="rect">
+            <a:avLst/>
+          </a:prstGeom>
         </p:spPr>
         <p:txBody>
           <a:bodyPr/>
@@ -8485,6 +8679,9 @@
             <a:off x="3278123" y="1200150"/>
             <a:ext cx="2587752" cy="1268730"/>
           </a:xfrm>
+          <a:prstGeom prst="rect">
+            <a:avLst/>
+          </a:prstGeom>
           <a:solidFill>
             <a:srgbClr val="D5D5D7"/>
           </a:solidFill>
@@ -8531,6 +8728,9 @@
             <a:off x="3278123" y="2640330"/>
             <a:ext cx="2587752" cy="274320"/>
           </a:xfrm>
+          <a:prstGeom prst="rect">
+            <a:avLst/>
+          </a:prstGeom>
         </p:spPr>
         <p:txBody>
           <a:bodyPr/>
@@ -8632,6 +8832,9 @@
             <a:off x="3278123" y="2948940"/>
             <a:ext cx="2587752" cy="1680210"/>
           </a:xfrm>
+          <a:prstGeom prst="rect">
+            <a:avLst/>
+          </a:prstGeom>
         </p:spPr>
         <p:txBody>
           <a:bodyPr/>
@@ -8722,6 +8925,9 @@
             <a:off x="6144767" y="1200150"/>
             <a:ext cx="2587752" cy="1268730"/>
           </a:xfrm>
+          <a:prstGeom prst="rect">
+            <a:avLst/>
+          </a:prstGeom>
           <a:solidFill>
             <a:srgbClr val="D5D5D7"/>
           </a:solidFill>
@@ -8768,6 +8974,9 @@
             <a:off x="6144767" y="2640330"/>
             <a:ext cx="2587752" cy="274320"/>
           </a:xfrm>
+          <a:prstGeom prst="rect">
+            <a:avLst/>
+          </a:prstGeom>
         </p:spPr>
         <p:txBody>
           <a:bodyPr/>
@@ -8875,6 +9084,9 @@
             <a:off x="6144767" y="2948940"/>
             <a:ext cx="2587752" cy="1680210"/>
           </a:xfrm>
+          <a:prstGeom prst="rect">
+            <a:avLst/>
+          </a:prstGeom>
         </p:spPr>
         <p:txBody>
           <a:bodyPr/>
@@ -8967,7 +9179,7 @@
           <a:p>
             <a:fld id="{98A19125-94A7-4474-858C-FD9C4ABE9DDA}" type="datetime3">
               <a:rPr lang="en-US" smtClean="0"/>
-              <a:t>10 June 2026</a:t>
+              <a:t>15 June 2026</a:t>
             </a:fld>
             <a:endParaRPr lang="en-US"/>
           </a:p>
@@ -9108,6 +9320,9 @@
             <a:off x="411481" y="1200150"/>
             <a:ext cx="1874519" cy="925830"/>
           </a:xfrm>
+          <a:prstGeom prst="rect">
+            <a:avLst/>
+          </a:prstGeom>
           <a:solidFill>
             <a:srgbClr val="D5D5D7"/>
           </a:solidFill>
@@ -9154,6 +9369,9 @@
             <a:off x="411480" y="2297430"/>
             <a:ext cx="1874519" cy="274320"/>
           </a:xfrm>
+          <a:prstGeom prst="rect">
+            <a:avLst/>
+          </a:prstGeom>
         </p:spPr>
         <p:txBody>
           <a:bodyPr/>
@@ -9255,6 +9473,9 @@
             <a:off x="411481" y="2606040"/>
             <a:ext cx="1874519" cy="2023110"/>
           </a:xfrm>
+          <a:prstGeom prst="rect">
+            <a:avLst/>
+          </a:prstGeom>
         </p:spPr>
         <p:txBody>
           <a:bodyPr/>
@@ -9345,6 +9566,9 @@
             <a:off x="2571604" y="1200150"/>
             <a:ext cx="1874519" cy="925830"/>
           </a:xfrm>
+          <a:prstGeom prst="rect">
+            <a:avLst/>
+          </a:prstGeom>
           <a:solidFill>
             <a:srgbClr val="D5D5D7"/>
           </a:solidFill>
@@ -9391,6 +9615,9 @@
             <a:off x="2571604" y="2297430"/>
             <a:ext cx="1874519" cy="274320"/>
           </a:xfrm>
+          <a:prstGeom prst="rect">
+            <a:avLst/>
+          </a:prstGeom>
         </p:spPr>
         <p:txBody>
           <a:bodyPr/>
@@ -9492,6 +9719,9 @@
             <a:off x="2571604" y="2606040"/>
             <a:ext cx="1874519" cy="2023110"/>
           </a:xfrm>
+          <a:prstGeom prst="rect">
+            <a:avLst/>
+          </a:prstGeom>
         </p:spPr>
         <p:txBody>
           <a:bodyPr/>
@@ -9582,6 +9812,9 @@
             <a:off x="4697881" y="1200150"/>
             <a:ext cx="1874519" cy="925830"/>
           </a:xfrm>
+          <a:prstGeom prst="rect">
+            <a:avLst/>
+          </a:prstGeom>
           <a:solidFill>
             <a:srgbClr val="D5D5D7"/>
           </a:solidFill>
@@ -9628,6 +9861,9 @@
             <a:off x="4697881" y="2297430"/>
             <a:ext cx="1874519" cy="274320"/>
           </a:xfrm>
+          <a:prstGeom prst="rect">
+            <a:avLst/>
+          </a:prstGeom>
         </p:spPr>
         <p:txBody>
           <a:bodyPr/>
@@ -9735,6 +9971,9 @@
             <a:off x="4697881" y="2606040"/>
             <a:ext cx="1874519" cy="2023110"/>
           </a:xfrm>
+          <a:prstGeom prst="rect">
+            <a:avLst/>
+          </a:prstGeom>
         </p:spPr>
         <p:txBody>
           <a:bodyPr/>
@@ -9825,6 +10064,9 @@
             <a:off x="6858001" y="1200150"/>
             <a:ext cx="1874519" cy="925830"/>
           </a:xfrm>
+          <a:prstGeom prst="rect">
+            <a:avLst/>
+          </a:prstGeom>
           <a:solidFill>
             <a:srgbClr val="D5D5D7"/>
           </a:solidFill>
@@ -9871,6 +10113,9 @@
             <a:off x="6858001" y="2297430"/>
             <a:ext cx="1874519" cy="274320"/>
           </a:xfrm>
+          <a:prstGeom prst="rect">
+            <a:avLst/>
+          </a:prstGeom>
         </p:spPr>
         <p:txBody>
           <a:bodyPr/>
@@ -9978,6 +10223,9 @@
             <a:off x="6858001" y="2606040"/>
             <a:ext cx="1874519" cy="2023110"/>
           </a:xfrm>
+          <a:prstGeom prst="rect">
+            <a:avLst/>
+          </a:prstGeom>
         </p:spPr>
         <p:txBody>
           <a:bodyPr/>
@@ -10070,7 +10318,7 @@
           <a:p>
             <a:fld id="{3BA0343D-C8D8-43CE-BB79-50DEA219DB07}" type="datetime3">
               <a:rPr lang="en-US" smtClean="0"/>
-              <a:t>10 June 2026</a:t>
+              <a:t>15 June 2026</a:t>
             </a:fld>
             <a:endParaRPr lang="en-US"/>
           </a:p>
@@ -10229,6 +10477,9 @@
             <a:off x="411480" y="1611630"/>
             <a:ext cx="5096351" cy="3017520"/>
           </a:xfrm>
+          <a:prstGeom prst="rect">
+            <a:avLst/>
+          </a:prstGeom>
         </p:spPr>
         <p:txBody>
           <a:bodyPr/>
@@ -10359,7 +10610,7 @@
           <a:p>
             <a:fld id="{453BD212-0B9F-4987-965F-AC83B2FC354F}" type="datetime3">
               <a:rPr lang="en-US" smtClean="0"/>
-              <a:t>10 June 2026</a:t>
+              <a:t>15 June 2026</a:t>
             </a:fld>
             <a:endParaRPr lang="en-US"/>
           </a:p>
@@ -10604,7 +10855,7 @@
           <a:p>
             <a:fld id="{6DDC931E-8CBE-4A3F-A034-9B6122C6DCDB}" type="datetime3">
               <a:rPr lang="en-US" smtClean="0"/>
-              <a:t>10 June 2026</a:t>
+              <a:t>15 June 2026</a:t>
             </a:fld>
             <a:endParaRPr lang="en-US"/>
           </a:p>
@@ -11807,6 +12058,9 @@
             <a:off x="685800" y="2838549"/>
             <a:ext cx="2674144" cy="342900"/>
           </a:xfrm>
+          <a:prstGeom prst="rect">
+            <a:avLst/>
+          </a:prstGeom>
         </p:spPr>
         <p:txBody>
           <a:bodyPr anchor="ctr" anchorCtr="0"/>
@@ -11940,6 +12194,9 @@
             <a:off x="3909060" y="2838549"/>
             <a:ext cx="1598771" cy="342900"/>
           </a:xfrm>
+          <a:prstGeom prst="rect">
+            <a:avLst/>
+          </a:prstGeom>
         </p:spPr>
         <p:txBody>
           <a:bodyPr anchor="ctr" anchorCtr="0"/>
@@ -12148,6 +12405,9 @@
             <a:off x="0" y="171450"/>
             <a:ext cx="9144000" cy="4800600"/>
           </a:xfrm>
+          <a:prstGeom prst="rect">
+            <a:avLst/>
+          </a:prstGeom>
           <a:solidFill>
             <a:srgbClr val="565557"/>
           </a:solidFill>
@@ -12232,6 +12492,9 @@
             <a:off x="411480" y="1611630"/>
             <a:ext cx="5096351" cy="685800"/>
           </a:xfrm>
+          <a:prstGeom prst="rect">
+            <a:avLst/>
+          </a:prstGeom>
         </p:spPr>
         <p:txBody>
           <a:bodyPr/>
@@ -12370,7 +12633,7 @@
           <a:p>
             <a:fld id="{220AF9C2-5E8A-4308-AE6B-CA9B65007D0E}" type="datetime3">
               <a:rPr lang="en-US" smtClean="0"/>
-              <a:t>10 June 2026</a:t>
+              <a:t>15 June 2026</a:t>
             </a:fld>
             <a:endParaRPr lang="en-US"/>
           </a:p>
@@ -12553,6 +12816,9 @@
             <a:off x="411480" y="1611630"/>
             <a:ext cx="5096351" cy="3017520"/>
           </a:xfrm>
+          <a:prstGeom prst="rect">
+            <a:avLst/>
+          </a:prstGeom>
         </p:spPr>
         <p:txBody>
           <a:bodyPr/>
@@ -12683,7 +12949,7 @@
           <a:p>
             <a:fld id="{FF31E861-D2AF-431D-860B-DCF67C218052}" type="datetime3">
               <a:rPr lang="en-US" smtClean="0"/>
-              <a:t>10 June 2026</a:t>
+              <a:t>15 June 2026</a:t>
             </a:fld>
             <a:endParaRPr lang="en-US"/>
           </a:p>
@@ -12829,6 +13095,9 @@
             <a:off x="411480" y="1200150"/>
             <a:ext cx="5096351" cy="3429000"/>
           </a:xfrm>
+          <a:prstGeom prst="rect">
+            <a:avLst/>
+          </a:prstGeom>
         </p:spPr>
         <p:txBody>
           <a:bodyPr/>
@@ -12962,7 +13231,7 @@
           <a:p>
             <a:fld id="{D1DA25B2-AAF1-4C1F-AA38-12D5BFA7D4C8}" type="datetime3">
               <a:rPr lang="en-US" smtClean="0"/>
-              <a:t>10 June 2026</a:t>
+              <a:t>15 June 2026</a:t>
             </a:fld>
             <a:endParaRPr lang="en-US"/>
           </a:p>
@@ -13111,6 +13380,9 @@
             <a:off x="411480" y="1611630"/>
             <a:ext cx="4023994" cy="3017520"/>
           </a:xfrm>
+          <a:prstGeom prst="rect">
+            <a:avLst/>
+          </a:prstGeom>
         </p:spPr>
         <p:txBody>
           <a:bodyPr/>
@@ -13241,7 +13513,7 @@
           <a:p>
             <a:fld id="{A25C0F39-45D0-48E9-90B3-7FE8FCE561C8}" type="datetime3">
               <a:rPr lang="en-US" smtClean="0"/>
-              <a:t>10 June 2026</a:t>
+              <a:t>15 June 2026</a:t>
             </a:fld>
             <a:endParaRPr lang="en-US"/>
           </a:p>
@@ -13298,6 +13570,9 @@
             <a:off x="4708528" y="807244"/>
             <a:ext cx="4024311" cy="3821906"/>
           </a:xfrm>
+          <a:prstGeom prst="rect">
+            <a:avLst/>
+          </a:prstGeom>
           <a:solidFill>
             <a:srgbClr val="D5D5D7"/>
           </a:solidFill>
@@ -13566,6 +13841,9 @@
             <a:off x="411480" y="1611630"/>
             <a:ext cx="4023994" cy="3017520"/>
           </a:xfrm>
+          <a:prstGeom prst="rect">
+            <a:avLst/>
+          </a:prstGeom>
         </p:spPr>
         <p:txBody>
           <a:bodyPr/>
@@ -13694,6 +13972,9 @@
             <a:off x="4708528" y="807244"/>
             <a:ext cx="4024311" cy="3821906"/>
           </a:xfrm>
+          <a:prstGeom prst="rect">
+            <a:avLst/>
+          </a:prstGeom>
           <a:solidFill>
             <a:srgbClr val="D5D5D7"/>
           </a:solidFill>
@@ -13742,7 +14023,7 @@
           <a:p>
             <a:fld id="{9BAF1A3D-92FA-4F24-9781-74AFA516A230}" type="datetime3">
               <a:rPr lang="en-US" smtClean="0"/>
-              <a:t>10 June 2026</a:t>
+              <a:t>15 June 2026</a:t>
             </a:fld>
             <a:endParaRPr lang="en-US"/>
           </a:p>
@@ -13869,7 +14150,7 @@
           <a:p>
             <a:fld id="{5719C672-856D-4617-A693-8FE15749A9B7}" type="datetime3">
               <a:rPr lang="en-US" smtClean="0"/>
-              <a:t>10 June 2026</a:t>
+              <a:t>15 June 2026</a:t>
             </a:fld>
             <a:endParaRPr lang="en-US"/>
           </a:p>
@@ -14004,7 +14285,7 @@
           <a:p>
             <a:fld id="{5F6C764D-A39E-4C03-B161-E0BC66E8883B}" type="datetime3">
               <a:rPr lang="en-US" smtClean="0"/>
-              <a:t>10 June 2026</a:t>
+              <a:t>15 June 2026</a:t>
             </a:fld>
             <a:endParaRPr lang="en-US"/>
           </a:p>
@@ -14246,7 +14527,7 @@
           <a:p>
             <a:fld id="{6E3E33F9-20B7-4995-BE7D-165DBB597850}" type="datetime3">
               <a:rPr lang="en-US" smtClean="0"/>
-              <a:t>10 June 2026</a:t>
+              <a:t>15 June 2026</a:t>
             </a:fld>
             <a:endParaRPr lang="en-US"/>
           </a:p>
@@ -14359,7 +14640,7 @@
           <a:p>
             <a:fld id="{CD41C263-3501-4369-A962-62B6BF915CDE}" type="datetime3">
               <a:rPr lang="en-US" smtClean="0"/>
-              <a:t>10 June 2026</a:t>
+              <a:t>15 June 2026</a:t>
             </a:fld>
             <a:endParaRPr lang="en-US"/>
           </a:p>
@@ -14653,6 +14934,9 @@
             <a:off x="411164" y="3614561"/>
             <a:ext cx="4024312" cy="1028699"/>
           </a:xfrm>
+          <a:prstGeom prst="rect">
+            <a:avLst/>
+          </a:prstGeom>
         </p:spPr>
         <p:txBody>
           <a:bodyPr anchor="b" anchorCtr="0"/>
@@ -14762,7 +15046,7 @@
           <a:p>
             <a:fld id="{B06F3EBE-B2E8-4992-9F00-9E4B44F057C0}" type="datetime3">
               <a:rPr lang="en-US" smtClean="0"/>
-              <a:t>10 June 2026</a:t>
+              <a:t>15 June 2026</a:t>
             </a:fld>
             <a:endParaRPr lang="en-US"/>
           </a:p>
@@ -14894,7 +15178,7 @@
           <a:p>
             <a:fld id="{D41656AB-D2E1-472E-8B95-0DF5C6E1D623}" type="datetime3">
               <a:rPr lang="en-US" smtClean="0"/>
-              <a:t>10 June 2026</a:t>
+              <a:t>15 June 2026</a:t>
             </a:fld>
             <a:endParaRPr lang="en-US"/>
           </a:p>
@@ -16136,6 +16420,9 @@
             <a:off x="685801" y="2838549"/>
             <a:ext cx="2674143" cy="342900"/>
           </a:xfrm>
+          <a:prstGeom prst="rect">
+            <a:avLst/>
+          </a:prstGeom>
         </p:spPr>
         <p:txBody>
           <a:bodyPr anchor="ctr" anchorCtr="0"/>
@@ -16269,6 +16556,9 @@
             <a:off x="3909060" y="2838549"/>
             <a:ext cx="1598771" cy="342900"/>
           </a:xfrm>
+          <a:prstGeom prst="rect">
+            <a:avLst/>
+          </a:prstGeom>
         </p:spPr>
         <p:txBody>
           <a:bodyPr anchor="ctr" anchorCtr="0"/>
@@ -18966,6 +19256,9 @@
             <a:off x="411480" y="1200149"/>
             <a:ext cx="8268694" cy="3429000"/>
           </a:xfrm>
+          <a:prstGeom prst="rect">
+            <a:avLst/>
+          </a:prstGeom>
         </p:spPr>
         <p:txBody>
           <a:bodyPr/>
@@ -19035,7 +19328,7 @@
           <a:p>
             <a:fld id="{AD622D1A-DF83-41A8-85FF-04D90BF831D3}" type="datetime3">
               <a:rPr lang="en-US" smtClean="0"/>
-              <a:t>10 June 2026</a:t>
+              <a:t>15 June 2026</a:t>
             </a:fld>
             <a:endParaRPr lang="en-US"/>
           </a:p>
@@ -19165,6 +19458,9 @@
             <a:off x="411479" y="1200150"/>
             <a:ext cx="4023360" cy="3429000"/>
           </a:xfrm>
+          <a:prstGeom prst="rect">
+            <a:avLst/>
+          </a:prstGeom>
         </p:spPr>
         <p:txBody>
           <a:bodyPr/>
@@ -19221,6 +19517,9 @@
             <a:off x="4709159" y="1200150"/>
             <a:ext cx="4023360" cy="3429000"/>
           </a:xfrm>
+          <a:prstGeom prst="rect">
+            <a:avLst/>
+          </a:prstGeom>
         </p:spPr>
         <p:txBody>
           <a:bodyPr/>
@@ -19285,7 +19584,7 @@
           <a:p>
             <a:fld id="{334F72C3-CDF3-44A8-B602-1649B1728485}" type="datetime3">
               <a:rPr lang="en-US" smtClean="0"/>
-              <a:t>10 June 2026</a:t>
+              <a:t>15 June 2026</a:t>
             </a:fld>
             <a:endParaRPr lang="en-US"/>
           </a:p>
@@ -19410,6 +19709,9 @@
             <a:off x="411479" y="1200150"/>
             <a:ext cx="2587752" cy="3429000"/>
           </a:xfrm>
+          <a:prstGeom prst="rect">
+            <a:avLst/>
+          </a:prstGeom>
         </p:spPr>
         <p:txBody>
           <a:bodyPr/>
@@ -19466,6 +19768,9 @@
             <a:off x="3278124" y="1200150"/>
             <a:ext cx="2587752" cy="3429000"/>
           </a:xfrm>
+          <a:prstGeom prst="rect">
+            <a:avLst/>
+          </a:prstGeom>
         </p:spPr>
         <p:txBody>
           <a:bodyPr/>
@@ -19528,6 +19833,9 @@
             <a:off x="6144767" y="1200150"/>
             <a:ext cx="2587752" cy="3429000"/>
           </a:xfrm>
+          <a:prstGeom prst="rect">
+            <a:avLst/>
+          </a:prstGeom>
         </p:spPr>
         <p:txBody>
           <a:bodyPr/>
@@ -19592,7 +19900,7 @@
           <a:p>
             <a:fld id="{1E0132BA-B5E7-4FFD-AF6C-169169D47D4A}" type="datetime3">
               <a:rPr lang="en-US" smtClean="0"/>
-              <a:t>10 June 2026</a:t>
+              <a:t>15 June 2026</a:t>
             </a:fld>
             <a:endParaRPr lang="en-US"/>
           </a:p>
@@ -19717,6 +20025,9 @@
             <a:off x="411481" y="1200150"/>
             <a:ext cx="1874519" cy="3429000"/>
           </a:xfrm>
+          <a:prstGeom prst="rect">
+            <a:avLst/>
+          </a:prstGeom>
         </p:spPr>
         <p:txBody>
           <a:bodyPr/>
@@ -19801,6 +20112,9 @@
             <a:off x="2560321" y="1200150"/>
             <a:ext cx="1874519" cy="3429000"/>
           </a:xfrm>
+          <a:prstGeom prst="rect">
+            <a:avLst/>
+          </a:prstGeom>
         </p:spPr>
         <p:txBody>
           <a:bodyPr/>
@@ -19891,6 +20205,9 @@
             <a:off x="4709161" y="1200150"/>
             <a:ext cx="1874519" cy="3429000"/>
           </a:xfrm>
+          <a:prstGeom prst="rect">
+            <a:avLst/>
+          </a:prstGeom>
         </p:spPr>
         <p:txBody>
           <a:bodyPr/>
@@ -19981,6 +20298,9 @@
             <a:off x="6858001" y="1200150"/>
             <a:ext cx="1874519" cy="3429000"/>
           </a:xfrm>
+          <a:prstGeom prst="rect">
+            <a:avLst/>
+          </a:prstGeom>
         </p:spPr>
         <p:txBody>
           <a:bodyPr/>
@@ -20073,7 +20393,7 @@
           <a:p>
             <a:fld id="{81A30091-1C2A-4151-8D3C-D1E47A72615F}" type="datetime3">
               <a:rPr lang="en-US" smtClean="0"/>
-              <a:t>10 June 2026</a:t>
+              <a:t>15 June 2026</a:t>
             </a:fld>
             <a:endParaRPr lang="en-US"/>
           </a:p>
@@ -20204,6 +20524,9 @@
             <a:off x="411480" y="1200150"/>
             <a:ext cx="418338" cy="416624"/>
           </a:xfrm>
+          <a:prstGeom prst="rect">
+            <a:avLst/>
+          </a:prstGeom>
         </p:spPr>
         <p:txBody>
           <a:bodyPr anchor="ctr" anchorCtr="0"/>
@@ -20237,6 +20560,9 @@
             <a:off x="411481" y="1714498"/>
             <a:ext cx="1874519" cy="2914652"/>
           </a:xfrm>
+          <a:prstGeom prst="rect">
+            <a:avLst/>
+          </a:prstGeom>
         </p:spPr>
         <p:txBody>
           <a:bodyPr/>
@@ -20327,6 +20653,9 @@
             <a:off x="2560320" y="1200150"/>
             <a:ext cx="418338" cy="418338"/>
           </a:xfrm>
+          <a:prstGeom prst="rect">
+            <a:avLst/>
+          </a:prstGeom>
         </p:spPr>
         <p:txBody>
           <a:bodyPr anchor="ctr" anchorCtr="0"/>
@@ -20360,6 +20689,9 @@
             <a:off x="2560321" y="1714498"/>
             <a:ext cx="1874519" cy="2914652"/>
           </a:xfrm>
+          <a:prstGeom prst="rect">
+            <a:avLst/>
+          </a:prstGeom>
         </p:spPr>
         <p:txBody>
           <a:bodyPr/>
@@ -20450,6 +20782,9 @@
             <a:off x="4709160" y="1200150"/>
             <a:ext cx="418338" cy="418338"/>
           </a:xfrm>
+          <a:prstGeom prst="rect">
+            <a:avLst/>
+          </a:prstGeom>
         </p:spPr>
         <p:txBody>
           <a:bodyPr anchor="ctr" anchorCtr="0"/>
@@ -20489,6 +20824,9 @@
             <a:off x="4709161" y="1714498"/>
             <a:ext cx="1874519" cy="2914652"/>
           </a:xfrm>
+          <a:prstGeom prst="rect">
+            <a:avLst/>
+          </a:prstGeom>
         </p:spPr>
         <p:txBody>
           <a:bodyPr/>
@@ -20579,6 +20917,9 @@
             <a:off x="6858000" y="1200150"/>
             <a:ext cx="418338" cy="418338"/>
           </a:xfrm>
+          <a:prstGeom prst="rect">
+            <a:avLst/>
+          </a:prstGeom>
         </p:spPr>
         <p:txBody>
           <a:bodyPr anchor="ctr" anchorCtr="0"/>
@@ -20618,6 +20959,9 @@
             <a:off x="6858001" y="1714498"/>
             <a:ext cx="1874519" cy="2914652"/>
           </a:xfrm>
+          <a:prstGeom prst="rect">
+            <a:avLst/>
+          </a:prstGeom>
         </p:spPr>
         <p:txBody>
           <a:bodyPr/>
@@ -20710,7 +21054,7 @@
           <a:p>
             <a:fld id="{35D703CE-07B4-4C05-A488-B4566700621F}" type="datetime3">
               <a:rPr lang="en-US" smtClean="0"/>
-              <a:t>10 June 2026</a:t>
+              <a:t>15 June 2026</a:t>
             </a:fld>
             <a:endParaRPr lang="en-US"/>
           </a:p>
@@ -20940,6 +21284,9 @@
             <a:off x="411481" y="1714500"/>
             <a:ext cx="1874519" cy="2914650"/>
           </a:xfrm>
+          <a:prstGeom prst="rect">
+            <a:avLst/>
+          </a:prstGeom>
         </p:spPr>
         <p:txBody>
           <a:bodyPr/>
@@ -21167,6 +21514,9 @@
             <a:off x="2560321" y="1714500"/>
             <a:ext cx="1874519" cy="2914650"/>
           </a:xfrm>
+          <a:prstGeom prst="rect">
+            <a:avLst/>
+          </a:prstGeom>
         </p:spPr>
         <p:txBody>
           <a:bodyPr/>
@@ -21399,6 +21749,9 @@
             <a:off x="4709161" y="1714500"/>
             <a:ext cx="1874519" cy="2914650"/>
           </a:xfrm>
+          <a:prstGeom prst="rect">
+            <a:avLst/>
+          </a:prstGeom>
         </p:spPr>
         <p:txBody>
           <a:bodyPr/>
@@ -21631,6 +21984,9 @@
             <a:off x="6858001" y="1714500"/>
             <a:ext cx="1874519" cy="2914650"/>
           </a:xfrm>
+          <a:prstGeom prst="rect">
+            <a:avLst/>
+          </a:prstGeom>
         </p:spPr>
         <p:txBody>
           <a:bodyPr/>
@@ -21768,7 +22124,7 @@
           <a:p>
             <a:fld id="{694BD61C-20BA-43AF-A21F-1DAFB3200099}" type="datetime3">
               <a:rPr lang="en-US" smtClean="0"/>
-              <a:t>10 June 2026</a:t>
+              <a:t>15 June 2026</a:t>
             </a:fld>
             <a:endParaRPr lang="en-US"/>
           </a:p>
@@ -22255,7 +22611,7 @@
           <a:p>
             <a:fld id="{CABCB1B0-B6E5-4DD1-BB55-95C076D6C0C8}" type="datetime3">
               <a:rPr lang="en-US" smtClean="0"/>
-              <a:t>10 June 2026</a:t>
+              <a:t>15 June 2026</a:t>
             </a:fld>
             <a:endParaRPr lang="en-US"/>
           </a:p>
@@ -22411,7 +22767,7 @@
         </a:spcBef>
         <a:buFont typeface="Arial" panose="020B0604020202020204" pitchFamily="34" charset="0"/>
         <a:buChar char="▪"/>
-        <a:defRPr sz="1275" kern="1200">
+        <a:defRPr sz="1800" kern="1200">
           <a:solidFill>
             <a:schemeClr val="tx1"/>
           </a:solidFill>
@@ -22429,7 +22785,7 @@
         </a:spcBef>
         <a:buFont typeface="Arial" panose="020B0604020202020204" pitchFamily="34" charset="0"/>
         <a:buChar char="–"/>
-        <a:defRPr sz="1275" kern="1200">
+        <a:defRPr sz="1600" kern="1200">
           <a:solidFill>
             <a:schemeClr val="tx1"/>
           </a:solidFill>
@@ -22447,7 +22803,7 @@
         </a:spcBef>
         <a:buFont typeface="Arial" panose="020B0604020202020204" pitchFamily="34" charset="0"/>
         <a:buChar char="–"/>
-        <a:defRPr sz="1275" kern="1200">
+        <a:defRPr sz="1400" kern="1200">
           <a:solidFill>
             <a:schemeClr val="tx1"/>
           </a:solidFill>
@@ -23195,6 +23551,3604 @@
 </p:sld>
 </file>
 
+<file path=ppt/slides/slide10.xml><?xml version="1.0" encoding="utf-8"?>
+<p:sld xmlns:a="http://schemas.openxmlformats.org/drawingml/2006/main" xmlns:r="http://schemas.openxmlformats.org/officeDocument/2006/relationships" xmlns:p="http://schemas.openxmlformats.org/presentationml/2006/main">
+  <p:cSld>
+    <p:spTree>
+      <p:nvGrpSpPr>
+        <p:cNvPr id="1" name=""/>
+        <p:cNvGrpSpPr/>
+        <p:nvPr/>
+      </p:nvGrpSpPr>
+      <p:grpSpPr>
+        <a:xfrm>
+          <a:off x="0" y="0"/>
+          <a:ext cx="0" cy="0"/>
+          <a:chOff x="0" y="0"/>
+          <a:chExt cx="0" cy="0"/>
+        </a:xfrm>
+      </p:grpSpPr>
+      <p:sp>
+        <p:nvSpPr>
+          <p:cNvPr id="7" name="Title 6">
+            <a:extLst>
+              <a:ext uri="{FF2B5EF4-FFF2-40B4-BE49-F238E27FC236}">
+                <a16:creationId xmlns:a16="http://schemas.microsoft.com/office/drawing/2014/main" id="{C3C4A051-5CF9-F03C-F6A8-EEDF3A0866EB}"/>
+              </a:ext>
+            </a:extLst>
+          </p:cNvPr>
+          <p:cNvSpPr>
+            <a:spLocks noGrp="1"/>
+          </p:cNvSpPr>
+          <p:nvPr>
+            <p:ph type="title"/>
+          </p:nvPr>
+        </p:nvSpPr>
+        <p:spPr/>
+        <p:txBody>
+          <a:bodyPr/>
+          <a:lstStyle/>
+          <a:p>
+            <a:r>
+              <a:rPr lang="en-US" dirty="0"/>
+              <a:t>Testing in Python</a:t>
+            </a:r>
+          </a:p>
+        </p:txBody>
+      </p:sp>
+      <p:sp>
+        <p:nvSpPr>
+          <p:cNvPr id="8" name="Content Placeholder 7">
+            <a:extLst>
+              <a:ext uri="{FF2B5EF4-FFF2-40B4-BE49-F238E27FC236}">
+                <a16:creationId xmlns:a16="http://schemas.microsoft.com/office/drawing/2014/main" id="{EFE6471E-885A-C4EC-98B7-2EEF5A6263B8}"/>
+              </a:ext>
+            </a:extLst>
+          </p:cNvPr>
+          <p:cNvSpPr>
+            <a:spLocks noGrp="1"/>
+          </p:cNvSpPr>
+          <p:nvPr>
+            <p:ph sz="half" idx="1"/>
+          </p:nvPr>
+        </p:nvSpPr>
+        <p:spPr/>
+        <p:txBody>
+          <a:bodyPr/>
+          <a:lstStyle/>
+          <a:p>
+            <a:r>
+              <a:rPr lang="en-US" dirty="0" err="1"/>
+              <a:t>Pytest</a:t>
+            </a:r>
+            <a:r>
+              <a:rPr lang="en-US" dirty="0"/>
+              <a:t> / </a:t>
+            </a:r>
+            <a:r>
+              <a:rPr lang="en-US" dirty="0" err="1"/>
+              <a:t>unittest</a:t>
+            </a:r>
+            <a:r>
+              <a:rPr lang="en-US" dirty="0"/>
+              <a:t> / </a:t>
+            </a:r>
+            <a:r>
+              <a:rPr lang="en-US" dirty="0" err="1"/>
+              <a:t>doctest</a:t>
+            </a:r>
+            <a:endParaRPr lang="en-US" dirty="0"/>
+          </a:p>
+          <a:p>
+            <a:r>
+              <a:rPr lang="en-US" dirty="0"/>
+              <a:t>Each has their own pros/cons</a:t>
+            </a:r>
+          </a:p>
+          <a:p>
+            <a:r>
+              <a:rPr lang="en-US" dirty="0"/>
+              <a:t>Assert statement</a:t>
+            </a:r>
+          </a:p>
+          <a:p>
+            <a:pPr marL="0" indent="0">
+              <a:buNone/>
+            </a:pPr>
+            <a:endParaRPr lang="en-US" dirty="0"/>
+          </a:p>
+        </p:txBody>
+      </p:sp>
+      <p:sp>
+        <p:nvSpPr>
+          <p:cNvPr id="4" name="Date Placeholder 3">
+            <a:extLst>
+              <a:ext uri="{FF2B5EF4-FFF2-40B4-BE49-F238E27FC236}">
+                <a16:creationId xmlns:a16="http://schemas.microsoft.com/office/drawing/2014/main" id="{097D1876-1A94-405C-2DB3-D9A7BF857A16}"/>
+              </a:ext>
+            </a:extLst>
+          </p:cNvPr>
+          <p:cNvSpPr>
+            <a:spLocks noGrp="1"/>
+          </p:cNvSpPr>
+          <p:nvPr>
+            <p:ph type="dt" sz="half" idx="10"/>
+          </p:nvPr>
+        </p:nvSpPr>
+        <p:spPr/>
+        <p:txBody>
+          <a:bodyPr/>
+          <a:lstStyle/>
+          <a:p>
+            <a:endParaRPr lang="en-US"/>
+          </a:p>
+        </p:txBody>
+      </p:sp>
+      <p:sp>
+        <p:nvSpPr>
+          <p:cNvPr id="6" name="Slide Number Placeholder 5">
+            <a:extLst>
+              <a:ext uri="{FF2B5EF4-FFF2-40B4-BE49-F238E27FC236}">
+                <a16:creationId xmlns:a16="http://schemas.microsoft.com/office/drawing/2014/main" id="{CC2283A2-D3FE-3766-A6CD-A4F0CC2B4BAF}"/>
+              </a:ext>
+            </a:extLst>
+          </p:cNvPr>
+          <p:cNvSpPr>
+            <a:spLocks noGrp="1"/>
+          </p:cNvSpPr>
+          <p:nvPr>
+            <p:ph type="sldNum" sz="quarter" idx="11"/>
+          </p:nvPr>
+        </p:nvSpPr>
+        <p:spPr/>
+        <p:txBody>
+          <a:bodyPr/>
+          <a:lstStyle/>
+          <a:p>
+            <a:pPr marL="0" lvl="0" indent="0" algn="r" rtl="0">
+              <a:spcBef>
+                <a:spcPts val="0"/>
+              </a:spcBef>
+              <a:spcAft>
+                <a:spcPts val="0"/>
+              </a:spcAft>
+              <a:buNone/>
+            </a:pPr>
+            <a:fld id="{00000000-1234-1234-1234-123412341234}" type="slidenum">
+              <a:rPr lang="en" smtClean="0"/>
+              <a:t>10</a:t>
+            </a:fld>
+            <a:endParaRPr lang="en"/>
+          </a:p>
+        </p:txBody>
+      </p:sp>
+      <p:sp>
+        <p:nvSpPr>
+          <p:cNvPr id="12" name="TextBox 11">
+            <a:extLst>
+              <a:ext uri="{FF2B5EF4-FFF2-40B4-BE49-F238E27FC236}">
+                <a16:creationId xmlns:a16="http://schemas.microsoft.com/office/drawing/2014/main" id="{83C16F60-E62F-E722-A549-EB4588C17CB8}"/>
+              </a:ext>
+            </a:extLst>
+          </p:cNvPr>
+          <p:cNvSpPr txBox="1"/>
+          <p:nvPr/>
+        </p:nvSpPr>
+        <p:spPr>
+          <a:xfrm>
+            <a:off x="4298950" y="827854"/>
+            <a:ext cx="4572000" cy="2966197"/>
+          </a:xfrm>
+          <a:prstGeom prst="rect">
+            <a:avLst/>
+          </a:prstGeom>
+          <a:noFill/>
+        </p:spPr>
+        <p:txBody>
+          <a:bodyPr wrap="square">
+            <a:spAutoFit/>
+          </a:bodyPr>
+          <a:lstStyle/>
+          <a:p>
+            <a:pPr>
+              <a:lnSpc>
+                <a:spcPts val="1425"/>
+              </a:lnSpc>
+              <a:buNone/>
+            </a:pPr>
+            <a:r>
+              <a:rPr lang="en-US" b="0" dirty="0">
+                <a:solidFill>
+                  <a:srgbClr val="0000FF"/>
+                </a:solidFill>
+                <a:effectLst/>
+                <a:latin typeface="Consolas" panose="020B0609020204030204" pitchFamily="49" charset="0"/>
+              </a:rPr>
+              <a:t>def</a:t>
+            </a:r>
+            <a:r>
+              <a:rPr lang="en-US" b="0" dirty="0">
+                <a:solidFill>
+                  <a:srgbClr val="000000"/>
+                </a:solidFill>
+                <a:effectLst/>
+                <a:latin typeface="Consolas" panose="020B0609020204030204" pitchFamily="49" charset="0"/>
+              </a:rPr>
+              <a:t> </a:t>
+            </a:r>
+            <a:r>
+              <a:rPr lang="en-US" b="0" dirty="0">
+                <a:solidFill>
+                  <a:srgbClr val="795E26"/>
+                </a:solidFill>
+                <a:effectLst/>
+                <a:latin typeface="Consolas" panose="020B0609020204030204" pitchFamily="49" charset="0"/>
+              </a:rPr>
+              <a:t>add</a:t>
+            </a:r>
+            <a:r>
+              <a:rPr lang="en-US" b="0" dirty="0">
+                <a:solidFill>
+                  <a:srgbClr val="000000"/>
+                </a:solidFill>
+                <a:effectLst/>
+                <a:latin typeface="Consolas" panose="020B0609020204030204" pitchFamily="49" charset="0"/>
+              </a:rPr>
+              <a:t>(</a:t>
+            </a:r>
+            <a:r>
+              <a:rPr lang="en-US" b="0" dirty="0">
+                <a:solidFill>
+                  <a:srgbClr val="001080"/>
+                </a:solidFill>
+                <a:effectLst/>
+                <a:latin typeface="Consolas" panose="020B0609020204030204" pitchFamily="49" charset="0"/>
+              </a:rPr>
+              <a:t>a</a:t>
+            </a:r>
+            <a:r>
+              <a:rPr lang="en-US" b="0" dirty="0">
+                <a:solidFill>
+                  <a:srgbClr val="000000"/>
+                </a:solidFill>
+                <a:effectLst/>
+                <a:latin typeface="Consolas" panose="020B0609020204030204" pitchFamily="49" charset="0"/>
+              </a:rPr>
+              <a:t>, </a:t>
+            </a:r>
+            <a:r>
+              <a:rPr lang="en-US" b="0" dirty="0">
+                <a:solidFill>
+                  <a:srgbClr val="001080"/>
+                </a:solidFill>
+                <a:effectLst/>
+                <a:latin typeface="Consolas" panose="020B0609020204030204" pitchFamily="49" charset="0"/>
+              </a:rPr>
+              <a:t>b</a:t>
+            </a:r>
+            <a:r>
+              <a:rPr lang="en-US" b="0" dirty="0">
+                <a:solidFill>
+                  <a:srgbClr val="000000"/>
+                </a:solidFill>
+                <a:effectLst/>
+                <a:latin typeface="Consolas" panose="020B0609020204030204" pitchFamily="49" charset="0"/>
+              </a:rPr>
+              <a:t>):</a:t>
+            </a:r>
+          </a:p>
+          <a:p>
+            <a:pPr>
+              <a:lnSpc>
+                <a:spcPts val="1425"/>
+              </a:lnSpc>
+              <a:buNone/>
+            </a:pPr>
+            <a:r>
+              <a:rPr lang="en-US" b="0" dirty="0">
+                <a:solidFill>
+                  <a:srgbClr val="000000"/>
+                </a:solidFill>
+                <a:effectLst/>
+                <a:latin typeface="Consolas" panose="020B0609020204030204" pitchFamily="49" charset="0"/>
+              </a:rPr>
+              <a:t>    </a:t>
+            </a:r>
+            <a:r>
+              <a:rPr lang="en-US" b="0" dirty="0">
+                <a:solidFill>
+                  <a:srgbClr val="AF00DB"/>
+                </a:solidFill>
+                <a:effectLst/>
+                <a:latin typeface="Consolas" panose="020B0609020204030204" pitchFamily="49" charset="0"/>
+              </a:rPr>
+              <a:t>return</a:t>
+            </a:r>
+            <a:r>
+              <a:rPr lang="en-US" b="0" dirty="0">
+                <a:solidFill>
+                  <a:srgbClr val="000000"/>
+                </a:solidFill>
+                <a:effectLst/>
+                <a:latin typeface="Consolas" panose="020B0609020204030204" pitchFamily="49" charset="0"/>
+              </a:rPr>
+              <a:t> </a:t>
+            </a:r>
+            <a:r>
+              <a:rPr lang="en-US" b="0" dirty="0">
+                <a:solidFill>
+                  <a:srgbClr val="001080"/>
+                </a:solidFill>
+                <a:effectLst/>
+                <a:latin typeface="Consolas" panose="020B0609020204030204" pitchFamily="49" charset="0"/>
+              </a:rPr>
+              <a:t>a</a:t>
+            </a:r>
+            <a:r>
+              <a:rPr lang="en-US" b="0" dirty="0">
+                <a:solidFill>
+                  <a:srgbClr val="000000"/>
+                </a:solidFill>
+                <a:effectLst/>
+                <a:latin typeface="Consolas" panose="020B0609020204030204" pitchFamily="49" charset="0"/>
+              </a:rPr>
+              <a:t> + </a:t>
+            </a:r>
+            <a:r>
+              <a:rPr lang="en-US" b="0" dirty="0">
+                <a:solidFill>
+                  <a:srgbClr val="001080"/>
+                </a:solidFill>
+                <a:effectLst/>
+                <a:latin typeface="Consolas" panose="020B0609020204030204" pitchFamily="49" charset="0"/>
+              </a:rPr>
+              <a:t>b</a:t>
+            </a:r>
+            <a:endParaRPr lang="en-US" b="0" dirty="0">
+              <a:solidFill>
+                <a:srgbClr val="000000"/>
+              </a:solidFill>
+              <a:effectLst/>
+              <a:latin typeface="Consolas" panose="020B0609020204030204" pitchFamily="49" charset="0"/>
+            </a:endParaRPr>
+          </a:p>
+          <a:p>
+            <a:pPr>
+              <a:lnSpc>
+                <a:spcPts val="1425"/>
+              </a:lnSpc>
+              <a:buNone/>
+            </a:pPr>
+            <a:br>
+              <a:rPr lang="en-US" b="0" dirty="0">
+                <a:solidFill>
+                  <a:srgbClr val="000000"/>
+                </a:solidFill>
+                <a:effectLst/>
+                <a:latin typeface="Consolas" panose="020B0609020204030204" pitchFamily="49" charset="0"/>
+              </a:rPr>
+            </a:br>
+            <a:br>
+              <a:rPr lang="en-US" b="0" dirty="0">
+                <a:solidFill>
+                  <a:srgbClr val="000000"/>
+                </a:solidFill>
+                <a:effectLst/>
+                <a:latin typeface="Consolas" panose="020B0609020204030204" pitchFamily="49" charset="0"/>
+              </a:rPr>
+            </a:br>
+            <a:endParaRPr lang="en-US" b="0" dirty="0">
+              <a:solidFill>
+                <a:srgbClr val="000000"/>
+              </a:solidFill>
+              <a:effectLst/>
+              <a:latin typeface="Consolas" panose="020B0609020204030204" pitchFamily="49" charset="0"/>
+            </a:endParaRPr>
+          </a:p>
+          <a:p>
+            <a:pPr>
+              <a:lnSpc>
+                <a:spcPts val="1425"/>
+              </a:lnSpc>
+              <a:buNone/>
+            </a:pPr>
+            <a:r>
+              <a:rPr lang="en-US" b="0" dirty="0">
+                <a:solidFill>
+                  <a:srgbClr val="0000FF"/>
+                </a:solidFill>
+                <a:effectLst/>
+                <a:latin typeface="Consolas" panose="020B0609020204030204" pitchFamily="49" charset="0"/>
+              </a:rPr>
+              <a:t>def</a:t>
+            </a:r>
+            <a:r>
+              <a:rPr lang="en-US" b="0" dirty="0">
+                <a:solidFill>
+                  <a:srgbClr val="000000"/>
+                </a:solidFill>
+                <a:effectLst/>
+                <a:latin typeface="Consolas" panose="020B0609020204030204" pitchFamily="49" charset="0"/>
+              </a:rPr>
+              <a:t> </a:t>
+            </a:r>
+            <a:r>
+              <a:rPr lang="en-US" b="0" dirty="0" err="1">
+                <a:solidFill>
+                  <a:srgbClr val="795E26"/>
+                </a:solidFill>
+                <a:effectLst/>
+                <a:latin typeface="Consolas" panose="020B0609020204030204" pitchFamily="49" charset="0"/>
+              </a:rPr>
+              <a:t>test_add</a:t>
+            </a:r>
+            <a:r>
+              <a:rPr lang="en-US" b="0" dirty="0">
+                <a:solidFill>
+                  <a:srgbClr val="000000"/>
+                </a:solidFill>
+                <a:effectLst/>
+                <a:latin typeface="Consolas" panose="020B0609020204030204" pitchFamily="49" charset="0"/>
+              </a:rPr>
+              <a:t>():</a:t>
+            </a:r>
+          </a:p>
+          <a:p>
+            <a:pPr>
+              <a:lnSpc>
+                <a:spcPts val="1425"/>
+              </a:lnSpc>
+              <a:buNone/>
+            </a:pPr>
+            <a:r>
+              <a:rPr lang="en-US" b="0" dirty="0">
+                <a:solidFill>
+                  <a:srgbClr val="000000"/>
+                </a:solidFill>
+                <a:effectLst/>
+                <a:latin typeface="Consolas" panose="020B0609020204030204" pitchFamily="49" charset="0"/>
+              </a:rPr>
+              <a:t>    </a:t>
+            </a:r>
+            <a:r>
+              <a:rPr lang="en-US" b="0" dirty="0">
+                <a:solidFill>
+                  <a:srgbClr val="AF00DB"/>
+                </a:solidFill>
+                <a:effectLst/>
+                <a:latin typeface="Consolas" panose="020B0609020204030204" pitchFamily="49" charset="0"/>
+              </a:rPr>
+              <a:t>assert</a:t>
+            </a:r>
+            <a:r>
+              <a:rPr lang="en-US" b="0" dirty="0">
+                <a:solidFill>
+                  <a:srgbClr val="000000"/>
+                </a:solidFill>
+                <a:effectLst/>
+                <a:latin typeface="Consolas" panose="020B0609020204030204" pitchFamily="49" charset="0"/>
+              </a:rPr>
+              <a:t> </a:t>
+            </a:r>
+            <a:r>
+              <a:rPr lang="en-US" b="0" dirty="0">
+                <a:solidFill>
+                  <a:srgbClr val="795E26"/>
+                </a:solidFill>
+                <a:effectLst/>
+                <a:latin typeface="Consolas" panose="020B0609020204030204" pitchFamily="49" charset="0"/>
+              </a:rPr>
+              <a:t>add</a:t>
+            </a:r>
+            <a:r>
+              <a:rPr lang="en-US" b="0" dirty="0">
+                <a:solidFill>
+                  <a:srgbClr val="000000"/>
+                </a:solidFill>
+                <a:effectLst/>
+                <a:latin typeface="Consolas" panose="020B0609020204030204" pitchFamily="49" charset="0"/>
+              </a:rPr>
+              <a:t>(</a:t>
+            </a:r>
+            <a:r>
+              <a:rPr lang="en-US" b="0" dirty="0">
+                <a:solidFill>
+                  <a:srgbClr val="098658"/>
+                </a:solidFill>
+                <a:effectLst/>
+                <a:latin typeface="Consolas" panose="020B0609020204030204" pitchFamily="49" charset="0"/>
+              </a:rPr>
+              <a:t>1</a:t>
+            </a:r>
+            <a:r>
+              <a:rPr lang="en-US" b="0" dirty="0">
+                <a:solidFill>
+                  <a:srgbClr val="000000"/>
+                </a:solidFill>
+                <a:effectLst/>
+                <a:latin typeface="Consolas" panose="020B0609020204030204" pitchFamily="49" charset="0"/>
+              </a:rPr>
+              <a:t>, </a:t>
+            </a:r>
+            <a:r>
+              <a:rPr lang="en-US" b="0" dirty="0">
+                <a:solidFill>
+                  <a:srgbClr val="098658"/>
+                </a:solidFill>
+                <a:effectLst/>
+                <a:latin typeface="Consolas" panose="020B0609020204030204" pitchFamily="49" charset="0"/>
+              </a:rPr>
+              <a:t>2</a:t>
+            </a:r>
+            <a:r>
+              <a:rPr lang="en-US" b="0" dirty="0">
+                <a:solidFill>
+                  <a:srgbClr val="000000"/>
+                </a:solidFill>
+                <a:effectLst/>
+                <a:latin typeface="Consolas" panose="020B0609020204030204" pitchFamily="49" charset="0"/>
+              </a:rPr>
+              <a:t>) == </a:t>
+            </a:r>
+            <a:r>
+              <a:rPr lang="en-US" b="0" dirty="0">
+                <a:solidFill>
+                  <a:srgbClr val="098658"/>
+                </a:solidFill>
+                <a:effectLst/>
+                <a:latin typeface="Consolas" panose="020B0609020204030204" pitchFamily="49" charset="0"/>
+              </a:rPr>
+              <a:t>3</a:t>
+            </a:r>
+            <a:endParaRPr lang="en-US" b="0" dirty="0">
+              <a:solidFill>
+                <a:srgbClr val="000000"/>
+              </a:solidFill>
+              <a:effectLst/>
+              <a:latin typeface="Consolas" panose="020B0609020204030204" pitchFamily="49" charset="0"/>
+            </a:endParaRPr>
+          </a:p>
+          <a:p>
+            <a:pPr>
+              <a:lnSpc>
+                <a:spcPts val="1425"/>
+              </a:lnSpc>
+              <a:buNone/>
+            </a:pPr>
+            <a:r>
+              <a:rPr lang="en-US" b="0" dirty="0">
+                <a:solidFill>
+                  <a:srgbClr val="000000"/>
+                </a:solidFill>
+                <a:effectLst/>
+                <a:latin typeface="Consolas" panose="020B0609020204030204" pitchFamily="49" charset="0"/>
+              </a:rPr>
+              <a:t>    </a:t>
+            </a:r>
+            <a:r>
+              <a:rPr lang="en-US" b="0" dirty="0">
+                <a:solidFill>
+                  <a:srgbClr val="AF00DB"/>
+                </a:solidFill>
+                <a:effectLst/>
+                <a:latin typeface="Consolas" panose="020B0609020204030204" pitchFamily="49" charset="0"/>
+              </a:rPr>
+              <a:t>assert</a:t>
+            </a:r>
+            <a:r>
+              <a:rPr lang="en-US" b="0" dirty="0">
+                <a:solidFill>
+                  <a:srgbClr val="000000"/>
+                </a:solidFill>
+                <a:effectLst/>
+                <a:latin typeface="Consolas" panose="020B0609020204030204" pitchFamily="49" charset="0"/>
+              </a:rPr>
+              <a:t> </a:t>
+            </a:r>
+            <a:r>
+              <a:rPr lang="en-US" b="0" dirty="0">
+                <a:solidFill>
+                  <a:srgbClr val="795E26"/>
+                </a:solidFill>
+                <a:effectLst/>
+                <a:latin typeface="Consolas" panose="020B0609020204030204" pitchFamily="49" charset="0"/>
+              </a:rPr>
+              <a:t>add</a:t>
+            </a:r>
+            <a:r>
+              <a:rPr lang="en-US" b="0" dirty="0">
+                <a:solidFill>
+                  <a:srgbClr val="000000"/>
+                </a:solidFill>
+                <a:effectLst/>
+                <a:latin typeface="Consolas" panose="020B0609020204030204" pitchFamily="49" charset="0"/>
+              </a:rPr>
+              <a:t>(</a:t>
+            </a:r>
+            <a:r>
+              <a:rPr lang="en-US" b="0" dirty="0">
+                <a:solidFill>
+                  <a:srgbClr val="098658"/>
+                </a:solidFill>
+                <a:effectLst/>
+                <a:latin typeface="Consolas" panose="020B0609020204030204" pitchFamily="49" charset="0"/>
+              </a:rPr>
+              <a:t>0</a:t>
+            </a:r>
+            <a:r>
+              <a:rPr lang="en-US" b="0" dirty="0">
+                <a:solidFill>
+                  <a:srgbClr val="000000"/>
+                </a:solidFill>
+                <a:effectLst/>
+                <a:latin typeface="Consolas" panose="020B0609020204030204" pitchFamily="49" charset="0"/>
+              </a:rPr>
+              <a:t>, </a:t>
+            </a:r>
+            <a:r>
+              <a:rPr lang="en-US" b="0" dirty="0">
+                <a:solidFill>
+                  <a:srgbClr val="098658"/>
+                </a:solidFill>
+                <a:effectLst/>
+                <a:latin typeface="Consolas" panose="020B0609020204030204" pitchFamily="49" charset="0"/>
+              </a:rPr>
+              <a:t>5</a:t>
+            </a:r>
+            <a:r>
+              <a:rPr lang="en-US" b="0" dirty="0">
+                <a:solidFill>
+                  <a:srgbClr val="000000"/>
+                </a:solidFill>
+                <a:effectLst/>
+                <a:latin typeface="Consolas" panose="020B0609020204030204" pitchFamily="49" charset="0"/>
+              </a:rPr>
+              <a:t>) == </a:t>
+            </a:r>
+            <a:r>
+              <a:rPr lang="en-US" b="0" dirty="0">
+                <a:solidFill>
+                  <a:srgbClr val="098658"/>
+                </a:solidFill>
+                <a:effectLst/>
+                <a:latin typeface="Consolas" panose="020B0609020204030204" pitchFamily="49" charset="0"/>
+              </a:rPr>
+              <a:t>5</a:t>
+            </a:r>
+            <a:endParaRPr lang="en-US" b="0" dirty="0">
+              <a:solidFill>
+                <a:srgbClr val="000000"/>
+              </a:solidFill>
+              <a:effectLst/>
+              <a:latin typeface="Consolas" panose="020B0609020204030204" pitchFamily="49" charset="0"/>
+            </a:endParaRPr>
+          </a:p>
+          <a:p>
+            <a:pPr>
+              <a:lnSpc>
+                <a:spcPts val="1425"/>
+              </a:lnSpc>
+              <a:buNone/>
+            </a:pPr>
+            <a:br>
+              <a:rPr lang="en-US" b="0" dirty="0">
+                <a:solidFill>
+                  <a:srgbClr val="000000"/>
+                </a:solidFill>
+                <a:effectLst/>
+                <a:latin typeface="Consolas" panose="020B0609020204030204" pitchFamily="49" charset="0"/>
+              </a:rPr>
+            </a:br>
+            <a:br>
+              <a:rPr lang="en-US" b="0" dirty="0">
+                <a:solidFill>
+                  <a:srgbClr val="000000"/>
+                </a:solidFill>
+                <a:effectLst/>
+                <a:latin typeface="Consolas" panose="020B0609020204030204" pitchFamily="49" charset="0"/>
+              </a:rPr>
+            </a:br>
+            <a:endParaRPr lang="en-US" b="0" dirty="0">
+              <a:solidFill>
+                <a:srgbClr val="000000"/>
+              </a:solidFill>
+              <a:effectLst/>
+              <a:latin typeface="Consolas" panose="020B0609020204030204" pitchFamily="49" charset="0"/>
+            </a:endParaRPr>
+          </a:p>
+          <a:p>
+            <a:pPr>
+              <a:lnSpc>
+                <a:spcPts val="1425"/>
+              </a:lnSpc>
+              <a:buNone/>
+            </a:pPr>
+            <a:r>
+              <a:rPr lang="en-US" b="0" dirty="0">
+                <a:solidFill>
+                  <a:srgbClr val="0000FF"/>
+                </a:solidFill>
+                <a:effectLst/>
+                <a:latin typeface="Consolas" panose="020B0609020204030204" pitchFamily="49" charset="0"/>
+              </a:rPr>
+              <a:t>def</a:t>
+            </a:r>
+            <a:r>
+              <a:rPr lang="en-US" b="0" dirty="0">
+                <a:solidFill>
+                  <a:srgbClr val="000000"/>
+                </a:solidFill>
+                <a:effectLst/>
+                <a:latin typeface="Consolas" panose="020B0609020204030204" pitchFamily="49" charset="0"/>
+              </a:rPr>
+              <a:t> </a:t>
+            </a:r>
+            <a:r>
+              <a:rPr lang="en-US" b="0" dirty="0" err="1">
+                <a:solidFill>
+                  <a:srgbClr val="795E26"/>
+                </a:solidFill>
+                <a:effectLst/>
+                <a:latin typeface="Consolas" panose="020B0609020204030204" pitchFamily="49" charset="0"/>
+              </a:rPr>
+              <a:t>test_add_negative</a:t>
+            </a:r>
+            <a:r>
+              <a:rPr lang="en-US" b="0" dirty="0">
+                <a:solidFill>
+                  <a:srgbClr val="000000"/>
+                </a:solidFill>
+                <a:effectLst/>
+                <a:latin typeface="Consolas" panose="020B0609020204030204" pitchFamily="49" charset="0"/>
+              </a:rPr>
+              <a:t>():</a:t>
+            </a:r>
+          </a:p>
+          <a:p>
+            <a:pPr>
+              <a:lnSpc>
+                <a:spcPts val="1425"/>
+              </a:lnSpc>
+              <a:buNone/>
+            </a:pPr>
+            <a:r>
+              <a:rPr lang="en-US" b="0" dirty="0">
+                <a:solidFill>
+                  <a:srgbClr val="000000"/>
+                </a:solidFill>
+                <a:effectLst/>
+                <a:latin typeface="Consolas" panose="020B0609020204030204" pitchFamily="49" charset="0"/>
+              </a:rPr>
+              <a:t>    </a:t>
+            </a:r>
+            <a:r>
+              <a:rPr lang="en-US" b="0" dirty="0">
+                <a:solidFill>
+                  <a:srgbClr val="AF00DB"/>
+                </a:solidFill>
+                <a:effectLst/>
+                <a:latin typeface="Consolas" panose="020B0609020204030204" pitchFamily="49" charset="0"/>
+              </a:rPr>
+              <a:t>assert</a:t>
+            </a:r>
+            <a:r>
+              <a:rPr lang="en-US" b="0" dirty="0">
+                <a:solidFill>
+                  <a:srgbClr val="000000"/>
+                </a:solidFill>
+                <a:effectLst/>
+                <a:latin typeface="Consolas" panose="020B0609020204030204" pitchFamily="49" charset="0"/>
+              </a:rPr>
+              <a:t> </a:t>
+            </a:r>
+            <a:r>
+              <a:rPr lang="en-US" b="0" dirty="0">
+                <a:solidFill>
+                  <a:srgbClr val="795E26"/>
+                </a:solidFill>
+                <a:effectLst/>
+                <a:latin typeface="Consolas" panose="020B0609020204030204" pitchFamily="49" charset="0"/>
+              </a:rPr>
+              <a:t>add</a:t>
+            </a:r>
+            <a:r>
+              <a:rPr lang="en-US" b="0" dirty="0">
+                <a:solidFill>
+                  <a:srgbClr val="000000"/>
+                </a:solidFill>
+                <a:effectLst/>
+                <a:latin typeface="Consolas" panose="020B0609020204030204" pitchFamily="49" charset="0"/>
+              </a:rPr>
+              <a:t>(-</a:t>
+            </a:r>
+            <a:r>
+              <a:rPr lang="en-US" b="0" dirty="0">
+                <a:solidFill>
+                  <a:srgbClr val="098658"/>
+                </a:solidFill>
+                <a:effectLst/>
+                <a:latin typeface="Consolas" panose="020B0609020204030204" pitchFamily="49" charset="0"/>
+              </a:rPr>
+              <a:t>5</a:t>
+            </a:r>
+            <a:r>
+              <a:rPr lang="en-US" b="0" dirty="0">
+                <a:solidFill>
+                  <a:srgbClr val="000000"/>
+                </a:solidFill>
+                <a:effectLst/>
+                <a:latin typeface="Consolas" panose="020B0609020204030204" pitchFamily="49" charset="0"/>
+              </a:rPr>
+              <a:t>, -</a:t>
+            </a:r>
+            <a:r>
+              <a:rPr lang="en-US" b="0" dirty="0">
+                <a:solidFill>
+                  <a:srgbClr val="098658"/>
+                </a:solidFill>
+                <a:effectLst/>
+                <a:latin typeface="Consolas" panose="020B0609020204030204" pitchFamily="49" charset="0"/>
+              </a:rPr>
+              <a:t>7</a:t>
+            </a:r>
+            <a:r>
+              <a:rPr lang="en-US" b="0" dirty="0">
+                <a:solidFill>
+                  <a:srgbClr val="000000"/>
+                </a:solidFill>
+                <a:effectLst/>
+                <a:latin typeface="Consolas" panose="020B0609020204030204" pitchFamily="49" charset="0"/>
+              </a:rPr>
+              <a:t>) == -</a:t>
+            </a:r>
+            <a:r>
+              <a:rPr lang="en-US" b="0" dirty="0">
+                <a:solidFill>
+                  <a:srgbClr val="098658"/>
+                </a:solidFill>
+                <a:effectLst/>
+                <a:latin typeface="Consolas" panose="020B0609020204030204" pitchFamily="49" charset="0"/>
+              </a:rPr>
+              <a:t>12</a:t>
+            </a:r>
+            <a:endParaRPr lang="en-US" b="0" dirty="0">
+              <a:solidFill>
+                <a:srgbClr val="000000"/>
+              </a:solidFill>
+              <a:effectLst/>
+              <a:latin typeface="Consolas" panose="020B0609020204030204" pitchFamily="49" charset="0"/>
+            </a:endParaRPr>
+          </a:p>
+          <a:p>
+            <a:pPr>
+              <a:lnSpc>
+                <a:spcPts val="1425"/>
+              </a:lnSpc>
+              <a:buNone/>
+            </a:pPr>
+            <a:r>
+              <a:rPr lang="en-US" b="0" dirty="0">
+                <a:solidFill>
+                  <a:srgbClr val="000000"/>
+                </a:solidFill>
+                <a:effectLst/>
+                <a:latin typeface="Consolas" panose="020B0609020204030204" pitchFamily="49" charset="0"/>
+              </a:rPr>
+              <a:t>    </a:t>
+            </a:r>
+            <a:r>
+              <a:rPr lang="en-US" b="0" dirty="0">
+                <a:solidFill>
+                  <a:srgbClr val="AF00DB"/>
+                </a:solidFill>
+                <a:effectLst/>
+                <a:latin typeface="Consolas" panose="020B0609020204030204" pitchFamily="49" charset="0"/>
+              </a:rPr>
+              <a:t>assert</a:t>
+            </a:r>
+            <a:r>
+              <a:rPr lang="en-US" b="0" dirty="0">
+                <a:solidFill>
+                  <a:srgbClr val="000000"/>
+                </a:solidFill>
+                <a:effectLst/>
+                <a:latin typeface="Consolas" panose="020B0609020204030204" pitchFamily="49" charset="0"/>
+              </a:rPr>
+              <a:t> </a:t>
+            </a:r>
+            <a:r>
+              <a:rPr lang="en-US" b="0" dirty="0">
+                <a:solidFill>
+                  <a:srgbClr val="795E26"/>
+                </a:solidFill>
+                <a:effectLst/>
+                <a:latin typeface="Consolas" panose="020B0609020204030204" pitchFamily="49" charset="0"/>
+              </a:rPr>
+              <a:t>add</a:t>
+            </a:r>
+            <a:r>
+              <a:rPr lang="en-US" b="0" dirty="0">
+                <a:solidFill>
+                  <a:srgbClr val="000000"/>
+                </a:solidFill>
+                <a:effectLst/>
+                <a:latin typeface="Consolas" panose="020B0609020204030204" pitchFamily="49" charset="0"/>
+              </a:rPr>
+              <a:t>(-</a:t>
+            </a:r>
+            <a:r>
+              <a:rPr lang="en-US" b="0" dirty="0">
+                <a:solidFill>
+                  <a:srgbClr val="098658"/>
+                </a:solidFill>
+                <a:effectLst/>
+                <a:latin typeface="Consolas" panose="020B0609020204030204" pitchFamily="49" charset="0"/>
+              </a:rPr>
+              <a:t>5</a:t>
+            </a:r>
+            <a:r>
+              <a:rPr lang="en-US" b="0" dirty="0">
+                <a:solidFill>
+                  <a:srgbClr val="000000"/>
+                </a:solidFill>
+                <a:effectLst/>
+                <a:latin typeface="Consolas" panose="020B0609020204030204" pitchFamily="49" charset="0"/>
+              </a:rPr>
+              <a:t>, </a:t>
+            </a:r>
+            <a:r>
+              <a:rPr lang="en-US" b="0" dirty="0">
+                <a:solidFill>
+                  <a:srgbClr val="098658"/>
+                </a:solidFill>
+                <a:effectLst/>
+                <a:latin typeface="Consolas" panose="020B0609020204030204" pitchFamily="49" charset="0"/>
+              </a:rPr>
+              <a:t>5</a:t>
+            </a:r>
+            <a:r>
+              <a:rPr lang="en-US" b="0" dirty="0">
+                <a:solidFill>
+                  <a:srgbClr val="000000"/>
+                </a:solidFill>
+                <a:effectLst/>
+                <a:latin typeface="Consolas" panose="020B0609020204030204" pitchFamily="49" charset="0"/>
+              </a:rPr>
+              <a:t>) == </a:t>
+            </a:r>
+            <a:r>
+              <a:rPr lang="en-US" b="0" dirty="0">
+                <a:solidFill>
+                  <a:srgbClr val="098658"/>
+                </a:solidFill>
+                <a:effectLst/>
+                <a:latin typeface="Consolas" panose="020B0609020204030204" pitchFamily="49" charset="0"/>
+              </a:rPr>
+              <a:t>0</a:t>
+            </a:r>
+            <a:endParaRPr lang="en-US" b="0" dirty="0">
+              <a:solidFill>
+                <a:srgbClr val="000000"/>
+              </a:solidFill>
+              <a:effectLst/>
+              <a:latin typeface="Consolas" panose="020B0609020204030204" pitchFamily="49" charset="0"/>
+            </a:endParaRPr>
+          </a:p>
+          <a:p>
+            <a:pPr>
+              <a:lnSpc>
+                <a:spcPts val="1425"/>
+              </a:lnSpc>
+              <a:buNone/>
+            </a:pPr>
+            <a:br>
+              <a:rPr lang="en-US" b="0" dirty="0">
+                <a:solidFill>
+                  <a:srgbClr val="000000"/>
+                </a:solidFill>
+                <a:effectLst/>
+                <a:latin typeface="Consolas" panose="020B0609020204030204" pitchFamily="49" charset="0"/>
+              </a:rPr>
+            </a:br>
+            <a:endParaRPr lang="en-US" b="0" dirty="0">
+              <a:solidFill>
+                <a:srgbClr val="000000"/>
+              </a:solidFill>
+              <a:effectLst/>
+              <a:latin typeface="Consolas" panose="020B0609020204030204" pitchFamily="49" charset="0"/>
+            </a:endParaRPr>
+          </a:p>
+        </p:txBody>
+      </p:sp>
+    </p:spTree>
+    <p:extLst>
+      <p:ext uri="{BB962C8B-B14F-4D97-AF65-F5344CB8AC3E}">
+        <p14:creationId xmlns:p14="http://schemas.microsoft.com/office/powerpoint/2010/main" val="1901383577"/>
+      </p:ext>
+    </p:extLst>
+  </p:cSld>
+  <p:clrMapOvr>
+    <a:masterClrMapping/>
+  </p:clrMapOvr>
+</p:sld>
+</file>
+
+<file path=ppt/slides/slide11.xml><?xml version="1.0" encoding="utf-8"?>
+<p:sld xmlns:a="http://schemas.openxmlformats.org/drawingml/2006/main" xmlns:r="http://schemas.openxmlformats.org/officeDocument/2006/relationships" xmlns:p="http://schemas.openxmlformats.org/presentationml/2006/main">
+  <p:cSld>
+    <p:spTree>
+      <p:nvGrpSpPr>
+        <p:cNvPr id="1" name=""/>
+        <p:cNvGrpSpPr/>
+        <p:nvPr/>
+      </p:nvGrpSpPr>
+      <p:grpSpPr>
+        <a:xfrm>
+          <a:off x="0" y="0"/>
+          <a:ext cx="0" cy="0"/>
+          <a:chOff x="0" y="0"/>
+          <a:chExt cx="0" cy="0"/>
+        </a:xfrm>
+      </p:grpSpPr>
+      <p:sp>
+        <p:nvSpPr>
+          <p:cNvPr id="2" name="Title 1">
+            <a:extLst>
+              <a:ext uri="{FF2B5EF4-FFF2-40B4-BE49-F238E27FC236}">
+                <a16:creationId xmlns:a16="http://schemas.microsoft.com/office/drawing/2014/main" id="{90E93651-07F6-DB6F-A98E-EFB6F1D879B4}"/>
+              </a:ext>
+            </a:extLst>
+          </p:cNvPr>
+          <p:cNvSpPr>
+            <a:spLocks noGrp="1"/>
+          </p:cNvSpPr>
+          <p:nvPr>
+            <p:ph type="title"/>
+          </p:nvPr>
+        </p:nvSpPr>
+        <p:spPr/>
+        <p:txBody>
+          <a:bodyPr/>
+          <a:lstStyle/>
+          <a:p>
+            <a:r>
+              <a:rPr lang="en-US" dirty="0" err="1"/>
+              <a:t>PyTest</a:t>
+            </a:r>
+            <a:endParaRPr lang="en-US" dirty="0"/>
+          </a:p>
+        </p:txBody>
+      </p:sp>
+      <p:sp>
+        <p:nvSpPr>
+          <p:cNvPr id="3" name="Content Placeholder 2">
+            <a:extLst>
+              <a:ext uri="{FF2B5EF4-FFF2-40B4-BE49-F238E27FC236}">
+                <a16:creationId xmlns:a16="http://schemas.microsoft.com/office/drawing/2014/main" id="{53772E27-18DF-F8AB-1548-D158CE0BBDDA}"/>
+              </a:ext>
+            </a:extLst>
+          </p:cNvPr>
+          <p:cNvSpPr>
+            <a:spLocks noGrp="1"/>
+          </p:cNvSpPr>
+          <p:nvPr>
+            <p:ph sz="half" idx="1"/>
+          </p:nvPr>
+        </p:nvSpPr>
+        <p:spPr/>
+        <p:txBody>
+          <a:bodyPr/>
+          <a:lstStyle/>
+          <a:p>
+            <a:r>
+              <a:rPr lang="en-US" dirty="0"/>
+              <a:t>A separate package / command</a:t>
+            </a:r>
+          </a:p>
+          <a:p>
+            <a:r>
+              <a:rPr lang="en-US" dirty="0"/>
+              <a:t>Generally auto-discovers tests</a:t>
+            </a:r>
+          </a:p>
+          <a:p>
+            <a:r>
+              <a:rPr lang="en-US" dirty="0"/>
+              <a:t>Can also give specific files</a:t>
+            </a:r>
+          </a:p>
+          <a:p>
+            <a:endParaRPr lang="en-US" dirty="0"/>
+          </a:p>
+        </p:txBody>
+      </p:sp>
+      <p:sp>
+        <p:nvSpPr>
+          <p:cNvPr id="5" name="Date Placeholder 4">
+            <a:extLst>
+              <a:ext uri="{FF2B5EF4-FFF2-40B4-BE49-F238E27FC236}">
+                <a16:creationId xmlns:a16="http://schemas.microsoft.com/office/drawing/2014/main" id="{B48C1246-14A2-519B-9F55-69EC95F50B89}"/>
+              </a:ext>
+            </a:extLst>
+          </p:cNvPr>
+          <p:cNvSpPr>
+            <a:spLocks noGrp="1"/>
+          </p:cNvSpPr>
+          <p:nvPr>
+            <p:ph type="dt" sz="half" idx="10"/>
+          </p:nvPr>
+        </p:nvSpPr>
+        <p:spPr/>
+        <p:txBody>
+          <a:bodyPr/>
+          <a:lstStyle/>
+          <a:p>
+            <a:fld id="{334F72C3-CDF3-44A8-B602-1649B1728485}" type="datetime3">
+              <a:rPr lang="en-US" smtClean="0"/>
+              <a:t>15 June 2026</a:t>
+            </a:fld>
+            <a:endParaRPr lang="en-US"/>
+          </a:p>
+        </p:txBody>
+      </p:sp>
+      <p:sp>
+        <p:nvSpPr>
+          <p:cNvPr id="6" name="Slide Number Placeholder 5">
+            <a:extLst>
+              <a:ext uri="{FF2B5EF4-FFF2-40B4-BE49-F238E27FC236}">
+                <a16:creationId xmlns:a16="http://schemas.microsoft.com/office/drawing/2014/main" id="{8D638D10-9EA1-24C6-4C63-94CE5D5CBBD8}"/>
+              </a:ext>
+            </a:extLst>
+          </p:cNvPr>
+          <p:cNvSpPr>
+            <a:spLocks noGrp="1"/>
+          </p:cNvSpPr>
+          <p:nvPr>
+            <p:ph type="sldNum" sz="quarter" idx="11"/>
+          </p:nvPr>
+        </p:nvSpPr>
+        <p:spPr/>
+        <p:txBody>
+          <a:bodyPr/>
+          <a:lstStyle/>
+          <a:p>
+            <a:fld id="{64E5BE4B-2FBF-4174-9E62-85FAD1CB43A6}" type="slidenum">
+              <a:rPr lang="en-US" smtClean="0"/>
+              <a:pPr/>
+              <a:t>11</a:t>
+            </a:fld>
+            <a:endParaRPr lang="en-US"/>
+          </a:p>
+        </p:txBody>
+      </p:sp>
+      <p:sp>
+        <p:nvSpPr>
+          <p:cNvPr id="11" name="TextBox 10">
+            <a:extLst>
+              <a:ext uri="{FF2B5EF4-FFF2-40B4-BE49-F238E27FC236}">
+                <a16:creationId xmlns:a16="http://schemas.microsoft.com/office/drawing/2014/main" id="{C1322EB9-9C92-8A02-6C6E-CF471D491576}"/>
+              </a:ext>
+            </a:extLst>
+          </p:cNvPr>
+          <p:cNvSpPr txBox="1"/>
+          <p:nvPr/>
+        </p:nvSpPr>
+        <p:spPr>
+          <a:xfrm>
+            <a:off x="4298950" y="827854"/>
+            <a:ext cx="4572000" cy="2966197"/>
+          </a:xfrm>
+          <a:prstGeom prst="rect">
+            <a:avLst/>
+          </a:prstGeom>
+          <a:noFill/>
+        </p:spPr>
+        <p:txBody>
+          <a:bodyPr wrap="square">
+            <a:spAutoFit/>
+          </a:bodyPr>
+          <a:lstStyle/>
+          <a:p>
+            <a:pPr>
+              <a:lnSpc>
+                <a:spcPts val="1425"/>
+              </a:lnSpc>
+              <a:buNone/>
+            </a:pPr>
+            <a:r>
+              <a:rPr lang="en-US" b="0" dirty="0">
+                <a:solidFill>
+                  <a:srgbClr val="0000FF"/>
+                </a:solidFill>
+                <a:effectLst/>
+                <a:latin typeface="Consolas" panose="020B0609020204030204" pitchFamily="49" charset="0"/>
+              </a:rPr>
+              <a:t>def</a:t>
+            </a:r>
+            <a:r>
+              <a:rPr lang="en-US" b="0" dirty="0">
+                <a:solidFill>
+                  <a:srgbClr val="000000"/>
+                </a:solidFill>
+                <a:effectLst/>
+                <a:latin typeface="Consolas" panose="020B0609020204030204" pitchFamily="49" charset="0"/>
+              </a:rPr>
+              <a:t> </a:t>
+            </a:r>
+            <a:r>
+              <a:rPr lang="en-US" b="0" dirty="0">
+                <a:solidFill>
+                  <a:srgbClr val="795E26"/>
+                </a:solidFill>
+                <a:effectLst/>
+                <a:latin typeface="Consolas" panose="020B0609020204030204" pitchFamily="49" charset="0"/>
+              </a:rPr>
+              <a:t>add</a:t>
+            </a:r>
+            <a:r>
+              <a:rPr lang="en-US" b="0" dirty="0">
+                <a:solidFill>
+                  <a:srgbClr val="000000"/>
+                </a:solidFill>
+                <a:effectLst/>
+                <a:latin typeface="Consolas" panose="020B0609020204030204" pitchFamily="49" charset="0"/>
+              </a:rPr>
+              <a:t>(</a:t>
+            </a:r>
+            <a:r>
+              <a:rPr lang="en-US" b="0" dirty="0">
+                <a:solidFill>
+                  <a:srgbClr val="001080"/>
+                </a:solidFill>
+                <a:effectLst/>
+                <a:latin typeface="Consolas" panose="020B0609020204030204" pitchFamily="49" charset="0"/>
+              </a:rPr>
+              <a:t>a</a:t>
+            </a:r>
+            <a:r>
+              <a:rPr lang="en-US" b="0" dirty="0">
+                <a:solidFill>
+                  <a:srgbClr val="000000"/>
+                </a:solidFill>
+                <a:effectLst/>
+                <a:latin typeface="Consolas" panose="020B0609020204030204" pitchFamily="49" charset="0"/>
+              </a:rPr>
+              <a:t>, </a:t>
+            </a:r>
+            <a:r>
+              <a:rPr lang="en-US" b="0" dirty="0">
+                <a:solidFill>
+                  <a:srgbClr val="001080"/>
+                </a:solidFill>
+                <a:effectLst/>
+                <a:latin typeface="Consolas" panose="020B0609020204030204" pitchFamily="49" charset="0"/>
+              </a:rPr>
+              <a:t>b</a:t>
+            </a:r>
+            <a:r>
+              <a:rPr lang="en-US" b="0" dirty="0">
+                <a:solidFill>
+                  <a:srgbClr val="000000"/>
+                </a:solidFill>
+                <a:effectLst/>
+                <a:latin typeface="Consolas" panose="020B0609020204030204" pitchFamily="49" charset="0"/>
+              </a:rPr>
+              <a:t>):</a:t>
+            </a:r>
+          </a:p>
+          <a:p>
+            <a:pPr>
+              <a:lnSpc>
+                <a:spcPts val="1425"/>
+              </a:lnSpc>
+              <a:buNone/>
+            </a:pPr>
+            <a:r>
+              <a:rPr lang="en-US" b="0" dirty="0">
+                <a:solidFill>
+                  <a:srgbClr val="000000"/>
+                </a:solidFill>
+                <a:effectLst/>
+                <a:latin typeface="Consolas" panose="020B0609020204030204" pitchFamily="49" charset="0"/>
+              </a:rPr>
+              <a:t>    </a:t>
+            </a:r>
+            <a:r>
+              <a:rPr lang="en-US" b="0" dirty="0">
+                <a:solidFill>
+                  <a:srgbClr val="AF00DB"/>
+                </a:solidFill>
+                <a:effectLst/>
+                <a:latin typeface="Consolas" panose="020B0609020204030204" pitchFamily="49" charset="0"/>
+              </a:rPr>
+              <a:t>return</a:t>
+            </a:r>
+            <a:r>
+              <a:rPr lang="en-US" b="0" dirty="0">
+                <a:solidFill>
+                  <a:srgbClr val="000000"/>
+                </a:solidFill>
+                <a:effectLst/>
+                <a:latin typeface="Consolas" panose="020B0609020204030204" pitchFamily="49" charset="0"/>
+              </a:rPr>
+              <a:t> </a:t>
+            </a:r>
+            <a:r>
+              <a:rPr lang="en-US" b="0" dirty="0">
+                <a:solidFill>
+                  <a:srgbClr val="001080"/>
+                </a:solidFill>
+                <a:effectLst/>
+                <a:latin typeface="Consolas" panose="020B0609020204030204" pitchFamily="49" charset="0"/>
+              </a:rPr>
+              <a:t>a</a:t>
+            </a:r>
+            <a:r>
+              <a:rPr lang="en-US" b="0" dirty="0">
+                <a:solidFill>
+                  <a:srgbClr val="000000"/>
+                </a:solidFill>
+                <a:effectLst/>
+                <a:latin typeface="Consolas" panose="020B0609020204030204" pitchFamily="49" charset="0"/>
+              </a:rPr>
+              <a:t> + </a:t>
+            </a:r>
+            <a:r>
+              <a:rPr lang="en-US" b="0" dirty="0">
+                <a:solidFill>
+                  <a:srgbClr val="001080"/>
+                </a:solidFill>
+                <a:effectLst/>
+                <a:latin typeface="Consolas" panose="020B0609020204030204" pitchFamily="49" charset="0"/>
+              </a:rPr>
+              <a:t>b</a:t>
+            </a:r>
+            <a:endParaRPr lang="en-US" b="0" dirty="0">
+              <a:solidFill>
+                <a:srgbClr val="000000"/>
+              </a:solidFill>
+              <a:effectLst/>
+              <a:latin typeface="Consolas" panose="020B0609020204030204" pitchFamily="49" charset="0"/>
+            </a:endParaRPr>
+          </a:p>
+          <a:p>
+            <a:pPr>
+              <a:lnSpc>
+                <a:spcPts val="1425"/>
+              </a:lnSpc>
+              <a:buNone/>
+            </a:pPr>
+            <a:br>
+              <a:rPr lang="en-US" b="0" dirty="0">
+                <a:solidFill>
+                  <a:srgbClr val="000000"/>
+                </a:solidFill>
+                <a:effectLst/>
+                <a:latin typeface="Consolas" panose="020B0609020204030204" pitchFamily="49" charset="0"/>
+              </a:rPr>
+            </a:br>
+            <a:br>
+              <a:rPr lang="en-US" b="0" dirty="0">
+                <a:solidFill>
+                  <a:srgbClr val="000000"/>
+                </a:solidFill>
+                <a:effectLst/>
+                <a:latin typeface="Consolas" panose="020B0609020204030204" pitchFamily="49" charset="0"/>
+              </a:rPr>
+            </a:br>
+            <a:endParaRPr lang="en-US" b="0" dirty="0">
+              <a:solidFill>
+                <a:srgbClr val="000000"/>
+              </a:solidFill>
+              <a:effectLst/>
+              <a:latin typeface="Consolas" panose="020B0609020204030204" pitchFamily="49" charset="0"/>
+            </a:endParaRPr>
+          </a:p>
+          <a:p>
+            <a:pPr>
+              <a:lnSpc>
+                <a:spcPts val="1425"/>
+              </a:lnSpc>
+              <a:buNone/>
+            </a:pPr>
+            <a:r>
+              <a:rPr lang="en-US" b="0" dirty="0">
+                <a:solidFill>
+                  <a:srgbClr val="0000FF"/>
+                </a:solidFill>
+                <a:effectLst/>
+                <a:latin typeface="Consolas" panose="020B0609020204030204" pitchFamily="49" charset="0"/>
+              </a:rPr>
+              <a:t>def</a:t>
+            </a:r>
+            <a:r>
+              <a:rPr lang="en-US" b="0" dirty="0">
+                <a:solidFill>
+                  <a:srgbClr val="000000"/>
+                </a:solidFill>
+                <a:effectLst/>
+                <a:latin typeface="Consolas" panose="020B0609020204030204" pitchFamily="49" charset="0"/>
+              </a:rPr>
+              <a:t> </a:t>
+            </a:r>
+            <a:r>
+              <a:rPr lang="en-US" b="0" dirty="0" err="1">
+                <a:solidFill>
+                  <a:srgbClr val="795E26"/>
+                </a:solidFill>
+                <a:effectLst/>
+                <a:latin typeface="Consolas" panose="020B0609020204030204" pitchFamily="49" charset="0"/>
+              </a:rPr>
+              <a:t>test_add</a:t>
+            </a:r>
+            <a:r>
+              <a:rPr lang="en-US" b="0" dirty="0">
+                <a:solidFill>
+                  <a:srgbClr val="000000"/>
+                </a:solidFill>
+                <a:effectLst/>
+                <a:latin typeface="Consolas" panose="020B0609020204030204" pitchFamily="49" charset="0"/>
+              </a:rPr>
+              <a:t>():</a:t>
+            </a:r>
+          </a:p>
+          <a:p>
+            <a:pPr>
+              <a:lnSpc>
+                <a:spcPts val="1425"/>
+              </a:lnSpc>
+              <a:buNone/>
+            </a:pPr>
+            <a:r>
+              <a:rPr lang="en-US" b="0" dirty="0">
+                <a:solidFill>
+                  <a:srgbClr val="000000"/>
+                </a:solidFill>
+                <a:effectLst/>
+                <a:latin typeface="Consolas" panose="020B0609020204030204" pitchFamily="49" charset="0"/>
+              </a:rPr>
+              <a:t>    </a:t>
+            </a:r>
+            <a:r>
+              <a:rPr lang="en-US" b="0" dirty="0">
+                <a:solidFill>
+                  <a:srgbClr val="AF00DB"/>
+                </a:solidFill>
+                <a:effectLst/>
+                <a:latin typeface="Consolas" panose="020B0609020204030204" pitchFamily="49" charset="0"/>
+              </a:rPr>
+              <a:t>assert</a:t>
+            </a:r>
+            <a:r>
+              <a:rPr lang="en-US" b="0" dirty="0">
+                <a:solidFill>
+                  <a:srgbClr val="000000"/>
+                </a:solidFill>
+                <a:effectLst/>
+                <a:latin typeface="Consolas" panose="020B0609020204030204" pitchFamily="49" charset="0"/>
+              </a:rPr>
+              <a:t> </a:t>
+            </a:r>
+            <a:r>
+              <a:rPr lang="en-US" b="0" dirty="0">
+                <a:solidFill>
+                  <a:srgbClr val="795E26"/>
+                </a:solidFill>
+                <a:effectLst/>
+                <a:latin typeface="Consolas" panose="020B0609020204030204" pitchFamily="49" charset="0"/>
+              </a:rPr>
+              <a:t>add</a:t>
+            </a:r>
+            <a:r>
+              <a:rPr lang="en-US" b="0" dirty="0">
+                <a:solidFill>
+                  <a:srgbClr val="000000"/>
+                </a:solidFill>
+                <a:effectLst/>
+                <a:latin typeface="Consolas" panose="020B0609020204030204" pitchFamily="49" charset="0"/>
+              </a:rPr>
+              <a:t>(</a:t>
+            </a:r>
+            <a:r>
+              <a:rPr lang="en-US" b="0" dirty="0">
+                <a:solidFill>
+                  <a:srgbClr val="098658"/>
+                </a:solidFill>
+                <a:effectLst/>
+                <a:latin typeface="Consolas" panose="020B0609020204030204" pitchFamily="49" charset="0"/>
+              </a:rPr>
+              <a:t>1</a:t>
+            </a:r>
+            <a:r>
+              <a:rPr lang="en-US" b="0" dirty="0">
+                <a:solidFill>
+                  <a:srgbClr val="000000"/>
+                </a:solidFill>
+                <a:effectLst/>
+                <a:latin typeface="Consolas" panose="020B0609020204030204" pitchFamily="49" charset="0"/>
+              </a:rPr>
+              <a:t>, </a:t>
+            </a:r>
+            <a:r>
+              <a:rPr lang="en-US" b="0" dirty="0">
+                <a:solidFill>
+                  <a:srgbClr val="098658"/>
+                </a:solidFill>
+                <a:effectLst/>
+                <a:latin typeface="Consolas" panose="020B0609020204030204" pitchFamily="49" charset="0"/>
+              </a:rPr>
+              <a:t>2</a:t>
+            </a:r>
+            <a:r>
+              <a:rPr lang="en-US" b="0" dirty="0">
+                <a:solidFill>
+                  <a:srgbClr val="000000"/>
+                </a:solidFill>
+                <a:effectLst/>
+                <a:latin typeface="Consolas" panose="020B0609020204030204" pitchFamily="49" charset="0"/>
+              </a:rPr>
+              <a:t>) == </a:t>
+            </a:r>
+            <a:r>
+              <a:rPr lang="en-US" b="0" dirty="0">
+                <a:solidFill>
+                  <a:srgbClr val="098658"/>
+                </a:solidFill>
+                <a:effectLst/>
+                <a:latin typeface="Consolas" panose="020B0609020204030204" pitchFamily="49" charset="0"/>
+              </a:rPr>
+              <a:t>3</a:t>
+            </a:r>
+            <a:endParaRPr lang="en-US" b="0" dirty="0">
+              <a:solidFill>
+                <a:srgbClr val="000000"/>
+              </a:solidFill>
+              <a:effectLst/>
+              <a:latin typeface="Consolas" panose="020B0609020204030204" pitchFamily="49" charset="0"/>
+            </a:endParaRPr>
+          </a:p>
+          <a:p>
+            <a:pPr>
+              <a:lnSpc>
+                <a:spcPts val="1425"/>
+              </a:lnSpc>
+              <a:buNone/>
+            </a:pPr>
+            <a:r>
+              <a:rPr lang="en-US" b="0" dirty="0">
+                <a:solidFill>
+                  <a:srgbClr val="000000"/>
+                </a:solidFill>
+                <a:effectLst/>
+                <a:latin typeface="Consolas" panose="020B0609020204030204" pitchFamily="49" charset="0"/>
+              </a:rPr>
+              <a:t>    </a:t>
+            </a:r>
+            <a:r>
+              <a:rPr lang="en-US" b="0" dirty="0">
+                <a:solidFill>
+                  <a:srgbClr val="AF00DB"/>
+                </a:solidFill>
+                <a:effectLst/>
+                <a:latin typeface="Consolas" panose="020B0609020204030204" pitchFamily="49" charset="0"/>
+              </a:rPr>
+              <a:t>assert</a:t>
+            </a:r>
+            <a:r>
+              <a:rPr lang="en-US" b="0" dirty="0">
+                <a:solidFill>
+                  <a:srgbClr val="000000"/>
+                </a:solidFill>
+                <a:effectLst/>
+                <a:latin typeface="Consolas" panose="020B0609020204030204" pitchFamily="49" charset="0"/>
+              </a:rPr>
+              <a:t> </a:t>
+            </a:r>
+            <a:r>
+              <a:rPr lang="en-US" b="0" dirty="0">
+                <a:solidFill>
+                  <a:srgbClr val="795E26"/>
+                </a:solidFill>
+                <a:effectLst/>
+                <a:latin typeface="Consolas" panose="020B0609020204030204" pitchFamily="49" charset="0"/>
+              </a:rPr>
+              <a:t>add</a:t>
+            </a:r>
+            <a:r>
+              <a:rPr lang="en-US" b="0" dirty="0">
+                <a:solidFill>
+                  <a:srgbClr val="000000"/>
+                </a:solidFill>
+                <a:effectLst/>
+                <a:latin typeface="Consolas" panose="020B0609020204030204" pitchFamily="49" charset="0"/>
+              </a:rPr>
+              <a:t>(</a:t>
+            </a:r>
+            <a:r>
+              <a:rPr lang="en-US" b="0" dirty="0">
+                <a:solidFill>
+                  <a:srgbClr val="098658"/>
+                </a:solidFill>
+                <a:effectLst/>
+                <a:latin typeface="Consolas" panose="020B0609020204030204" pitchFamily="49" charset="0"/>
+              </a:rPr>
+              <a:t>0</a:t>
+            </a:r>
+            <a:r>
+              <a:rPr lang="en-US" b="0" dirty="0">
+                <a:solidFill>
+                  <a:srgbClr val="000000"/>
+                </a:solidFill>
+                <a:effectLst/>
+                <a:latin typeface="Consolas" panose="020B0609020204030204" pitchFamily="49" charset="0"/>
+              </a:rPr>
+              <a:t>, </a:t>
+            </a:r>
+            <a:r>
+              <a:rPr lang="en-US" b="0" dirty="0">
+                <a:solidFill>
+                  <a:srgbClr val="098658"/>
+                </a:solidFill>
+                <a:effectLst/>
+                <a:latin typeface="Consolas" panose="020B0609020204030204" pitchFamily="49" charset="0"/>
+              </a:rPr>
+              <a:t>5</a:t>
+            </a:r>
+            <a:r>
+              <a:rPr lang="en-US" b="0" dirty="0">
+                <a:solidFill>
+                  <a:srgbClr val="000000"/>
+                </a:solidFill>
+                <a:effectLst/>
+                <a:latin typeface="Consolas" panose="020B0609020204030204" pitchFamily="49" charset="0"/>
+              </a:rPr>
+              <a:t>) == </a:t>
+            </a:r>
+            <a:r>
+              <a:rPr lang="en-US" b="0" dirty="0">
+                <a:solidFill>
+                  <a:srgbClr val="098658"/>
+                </a:solidFill>
+                <a:effectLst/>
+                <a:latin typeface="Consolas" panose="020B0609020204030204" pitchFamily="49" charset="0"/>
+              </a:rPr>
+              <a:t>5</a:t>
+            </a:r>
+            <a:endParaRPr lang="en-US" b="0" dirty="0">
+              <a:solidFill>
+                <a:srgbClr val="000000"/>
+              </a:solidFill>
+              <a:effectLst/>
+              <a:latin typeface="Consolas" panose="020B0609020204030204" pitchFamily="49" charset="0"/>
+            </a:endParaRPr>
+          </a:p>
+          <a:p>
+            <a:pPr>
+              <a:lnSpc>
+                <a:spcPts val="1425"/>
+              </a:lnSpc>
+              <a:buNone/>
+            </a:pPr>
+            <a:br>
+              <a:rPr lang="en-US" b="0" dirty="0">
+                <a:solidFill>
+                  <a:srgbClr val="000000"/>
+                </a:solidFill>
+                <a:effectLst/>
+                <a:latin typeface="Consolas" panose="020B0609020204030204" pitchFamily="49" charset="0"/>
+              </a:rPr>
+            </a:br>
+            <a:br>
+              <a:rPr lang="en-US" b="0" dirty="0">
+                <a:solidFill>
+                  <a:srgbClr val="000000"/>
+                </a:solidFill>
+                <a:effectLst/>
+                <a:latin typeface="Consolas" panose="020B0609020204030204" pitchFamily="49" charset="0"/>
+              </a:rPr>
+            </a:br>
+            <a:endParaRPr lang="en-US" b="0" dirty="0">
+              <a:solidFill>
+                <a:srgbClr val="000000"/>
+              </a:solidFill>
+              <a:effectLst/>
+              <a:latin typeface="Consolas" panose="020B0609020204030204" pitchFamily="49" charset="0"/>
+            </a:endParaRPr>
+          </a:p>
+          <a:p>
+            <a:pPr>
+              <a:lnSpc>
+                <a:spcPts val="1425"/>
+              </a:lnSpc>
+              <a:buNone/>
+            </a:pPr>
+            <a:r>
+              <a:rPr lang="en-US" b="0" dirty="0">
+                <a:solidFill>
+                  <a:srgbClr val="0000FF"/>
+                </a:solidFill>
+                <a:effectLst/>
+                <a:latin typeface="Consolas" panose="020B0609020204030204" pitchFamily="49" charset="0"/>
+              </a:rPr>
+              <a:t>def</a:t>
+            </a:r>
+            <a:r>
+              <a:rPr lang="en-US" b="0" dirty="0">
+                <a:solidFill>
+                  <a:srgbClr val="000000"/>
+                </a:solidFill>
+                <a:effectLst/>
+                <a:latin typeface="Consolas" panose="020B0609020204030204" pitchFamily="49" charset="0"/>
+              </a:rPr>
+              <a:t> </a:t>
+            </a:r>
+            <a:r>
+              <a:rPr lang="en-US" b="0" dirty="0" err="1">
+                <a:solidFill>
+                  <a:srgbClr val="795E26"/>
+                </a:solidFill>
+                <a:effectLst/>
+                <a:latin typeface="Consolas" panose="020B0609020204030204" pitchFamily="49" charset="0"/>
+              </a:rPr>
+              <a:t>test_add_negative</a:t>
+            </a:r>
+            <a:r>
+              <a:rPr lang="en-US" b="0" dirty="0">
+                <a:solidFill>
+                  <a:srgbClr val="000000"/>
+                </a:solidFill>
+                <a:effectLst/>
+                <a:latin typeface="Consolas" panose="020B0609020204030204" pitchFamily="49" charset="0"/>
+              </a:rPr>
+              <a:t>():</a:t>
+            </a:r>
+          </a:p>
+          <a:p>
+            <a:pPr>
+              <a:lnSpc>
+                <a:spcPts val="1425"/>
+              </a:lnSpc>
+              <a:buNone/>
+            </a:pPr>
+            <a:r>
+              <a:rPr lang="en-US" b="0" dirty="0">
+                <a:solidFill>
+                  <a:srgbClr val="000000"/>
+                </a:solidFill>
+                <a:effectLst/>
+                <a:latin typeface="Consolas" panose="020B0609020204030204" pitchFamily="49" charset="0"/>
+              </a:rPr>
+              <a:t>    </a:t>
+            </a:r>
+            <a:r>
+              <a:rPr lang="en-US" b="0" dirty="0">
+                <a:solidFill>
+                  <a:srgbClr val="AF00DB"/>
+                </a:solidFill>
+                <a:effectLst/>
+                <a:latin typeface="Consolas" panose="020B0609020204030204" pitchFamily="49" charset="0"/>
+              </a:rPr>
+              <a:t>assert</a:t>
+            </a:r>
+            <a:r>
+              <a:rPr lang="en-US" b="0" dirty="0">
+                <a:solidFill>
+                  <a:srgbClr val="000000"/>
+                </a:solidFill>
+                <a:effectLst/>
+                <a:latin typeface="Consolas" panose="020B0609020204030204" pitchFamily="49" charset="0"/>
+              </a:rPr>
+              <a:t> </a:t>
+            </a:r>
+            <a:r>
+              <a:rPr lang="en-US" b="0" dirty="0">
+                <a:solidFill>
+                  <a:srgbClr val="795E26"/>
+                </a:solidFill>
+                <a:effectLst/>
+                <a:latin typeface="Consolas" panose="020B0609020204030204" pitchFamily="49" charset="0"/>
+              </a:rPr>
+              <a:t>add</a:t>
+            </a:r>
+            <a:r>
+              <a:rPr lang="en-US" b="0" dirty="0">
+                <a:solidFill>
+                  <a:srgbClr val="000000"/>
+                </a:solidFill>
+                <a:effectLst/>
+                <a:latin typeface="Consolas" panose="020B0609020204030204" pitchFamily="49" charset="0"/>
+              </a:rPr>
+              <a:t>(-</a:t>
+            </a:r>
+            <a:r>
+              <a:rPr lang="en-US" b="0" dirty="0">
+                <a:solidFill>
+                  <a:srgbClr val="098658"/>
+                </a:solidFill>
+                <a:effectLst/>
+                <a:latin typeface="Consolas" panose="020B0609020204030204" pitchFamily="49" charset="0"/>
+              </a:rPr>
+              <a:t>5</a:t>
+            </a:r>
+            <a:r>
+              <a:rPr lang="en-US" b="0" dirty="0">
+                <a:solidFill>
+                  <a:srgbClr val="000000"/>
+                </a:solidFill>
+                <a:effectLst/>
+                <a:latin typeface="Consolas" panose="020B0609020204030204" pitchFamily="49" charset="0"/>
+              </a:rPr>
+              <a:t>, -</a:t>
+            </a:r>
+            <a:r>
+              <a:rPr lang="en-US" b="0" dirty="0">
+                <a:solidFill>
+                  <a:srgbClr val="098658"/>
+                </a:solidFill>
+                <a:effectLst/>
+                <a:latin typeface="Consolas" panose="020B0609020204030204" pitchFamily="49" charset="0"/>
+              </a:rPr>
+              <a:t>7</a:t>
+            </a:r>
+            <a:r>
+              <a:rPr lang="en-US" b="0" dirty="0">
+                <a:solidFill>
+                  <a:srgbClr val="000000"/>
+                </a:solidFill>
+                <a:effectLst/>
+                <a:latin typeface="Consolas" panose="020B0609020204030204" pitchFamily="49" charset="0"/>
+              </a:rPr>
+              <a:t>) == -</a:t>
+            </a:r>
+            <a:r>
+              <a:rPr lang="en-US" b="0" dirty="0">
+                <a:solidFill>
+                  <a:srgbClr val="098658"/>
+                </a:solidFill>
+                <a:effectLst/>
+                <a:latin typeface="Consolas" panose="020B0609020204030204" pitchFamily="49" charset="0"/>
+              </a:rPr>
+              <a:t>12</a:t>
+            </a:r>
+            <a:endParaRPr lang="en-US" b="0" dirty="0">
+              <a:solidFill>
+                <a:srgbClr val="000000"/>
+              </a:solidFill>
+              <a:effectLst/>
+              <a:latin typeface="Consolas" panose="020B0609020204030204" pitchFamily="49" charset="0"/>
+            </a:endParaRPr>
+          </a:p>
+          <a:p>
+            <a:pPr>
+              <a:lnSpc>
+                <a:spcPts val="1425"/>
+              </a:lnSpc>
+              <a:buNone/>
+            </a:pPr>
+            <a:r>
+              <a:rPr lang="en-US" b="0" dirty="0">
+                <a:solidFill>
+                  <a:srgbClr val="000000"/>
+                </a:solidFill>
+                <a:effectLst/>
+                <a:latin typeface="Consolas" panose="020B0609020204030204" pitchFamily="49" charset="0"/>
+              </a:rPr>
+              <a:t>    </a:t>
+            </a:r>
+            <a:r>
+              <a:rPr lang="en-US" b="0" dirty="0">
+                <a:solidFill>
+                  <a:srgbClr val="AF00DB"/>
+                </a:solidFill>
+                <a:effectLst/>
+                <a:latin typeface="Consolas" panose="020B0609020204030204" pitchFamily="49" charset="0"/>
+              </a:rPr>
+              <a:t>assert</a:t>
+            </a:r>
+            <a:r>
+              <a:rPr lang="en-US" b="0" dirty="0">
+                <a:solidFill>
+                  <a:srgbClr val="000000"/>
+                </a:solidFill>
+                <a:effectLst/>
+                <a:latin typeface="Consolas" panose="020B0609020204030204" pitchFamily="49" charset="0"/>
+              </a:rPr>
+              <a:t> </a:t>
+            </a:r>
+            <a:r>
+              <a:rPr lang="en-US" b="0" dirty="0">
+                <a:solidFill>
+                  <a:srgbClr val="795E26"/>
+                </a:solidFill>
+                <a:effectLst/>
+                <a:latin typeface="Consolas" panose="020B0609020204030204" pitchFamily="49" charset="0"/>
+              </a:rPr>
+              <a:t>add</a:t>
+            </a:r>
+            <a:r>
+              <a:rPr lang="en-US" b="0" dirty="0">
+                <a:solidFill>
+                  <a:srgbClr val="000000"/>
+                </a:solidFill>
+                <a:effectLst/>
+                <a:latin typeface="Consolas" panose="020B0609020204030204" pitchFamily="49" charset="0"/>
+              </a:rPr>
+              <a:t>(-</a:t>
+            </a:r>
+            <a:r>
+              <a:rPr lang="en-US" b="0" dirty="0">
+                <a:solidFill>
+                  <a:srgbClr val="098658"/>
+                </a:solidFill>
+                <a:effectLst/>
+                <a:latin typeface="Consolas" panose="020B0609020204030204" pitchFamily="49" charset="0"/>
+              </a:rPr>
+              <a:t>5</a:t>
+            </a:r>
+            <a:r>
+              <a:rPr lang="en-US" b="0" dirty="0">
+                <a:solidFill>
+                  <a:srgbClr val="000000"/>
+                </a:solidFill>
+                <a:effectLst/>
+                <a:latin typeface="Consolas" panose="020B0609020204030204" pitchFamily="49" charset="0"/>
+              </a:rPr>
+              <a:t>, </a:t>
+            </a:r>
+            <a:r>
+              <a:rPr lang="en-US" b="0" dirty="0">
+                <a:solidFill>
+                  <a:srgbClr val="098658"/>
+                </a:solidFill>
+                <a:effectLst/>
+                <a:latin typeface="Consolas" panose="020B0609020204030204" pitchFamily="49" charset="0"/>
+              </a:rPr>
+              <a:t>5</a:t>
+            </a:r>
+            <a:r>
+              <a:rPr lang="en-US" b="0" dirty="0">
+                <a:solidFill>
+                  <a:srgbClr val="000000"/>
+                </a:solidFill>
+                <a:effectLst/>
+                <a:latin typeface="Consolas" panose="020B0609020204030204" pitchFamily="49" charset="0"/>
+              </a:rPr>
+              <a:t>) == </a:t>
+            </a:r>
+            <a:r>
+              <a:rPr lang="en-US" b="0" dirty="0">
+                <a:solidFill>
+                  <a:srgbClr val="098658"/>
+                </a:solidFill>
+                <a:effectLst/>
+                <a:latin typeface="Consolas" panose="020B0609020204030204" pitchFamily="49" charset="0"/>
+              </a:rPr>
+              <a:t>0</a:t>
+            </a:r>
+            <a:endParaRPr lang="en-US" b="0" dirty="0">
+              <a:solidFill>
+                <a:srgbClr val="000000"/>
+              </a:solidFill>
+              <a:effectLst/>
+              <a:latin typeface="Consolas" panose="020B0609020204030204" pitchFamily="49" charset="0"/>
+            </a:endParaRPr>
+          </a:p>
+          <a:p>
+            <a:pPr>
+              <a:lnSpc>
+                <a:spcPts val="1425"/>
+              </a:lnSpc>
+              <a:buNone/>
+            </a:pPr>
+            <a:br>
+              <a:rPr lang="en-US" b="0" dirty="0">
+                <a:solidFill>
+                  <a:srgbClr val="000000"/>
+                </a:solidFill>
+                <a:effectLst/>
+                <a:latin typeface="Consolas" panose="020B0609020204030204" pitchFamily="49" charset="0"/>
+              </a:rPr>
+            </a:br>
+            <a:endParaRPr lang="en-US" b="0" dirty="0">
+              <a:solidFill>
+                <a:srgbClr val="000000"/>
+              </a:solidFill>
+              <a:effectLst/>
+              <a:latin typeface="Consolas" panose="020B0609020204030204" pitchFamily="49" charset="0"/>
+            </a:endParaRPr>
+          </a:p>
+        </p:txBody>
+      </p:sp>
+      <p:pic>
+        <p:nvPicPr>
+          <p:cNvPr id="10" name="Picture 9">
+            <a:extLst>
+              <a:ext uri="{FF2B5EF4-FFF2-40B4-BE49-F238E27FC236}">
+                <a16:creationId xmlns:a16="http://schemas.microsoft.com/office/drawing/2014/main" id="{7ACC907C-09AF-C73A-EF05-EE3567B8A1A8}"/>
+              </a:ext>
+            </a:extLst>
+          </p:cNvPr>
+          <p:cNvPicPr>
+            <a:picLocks noChangeAspect="1"/>
+          </p:cNvPicPr>
+          <p:nvPr/>
+        </p:nvPicPr>
+        <p:blipFill>
+          <a:blip r:embed="rId2"/>
+          <a:stretch>
+            <a:fillRect/>
+          </a:stretch>
+        </p:blipFill>
+        <p:spPr>
+          <a:xfrm>
+            <a:off x="137163" y="3627494"/>
+            <a:ext cx="9144000" cy="1492167"/>
+          </a:xfrm>
+          <a:prstGeom prst="rect">
+            <a:avLst/>
+          </a:prstGeom>
+        </p:spPr>
+      </p:pic>
+    </p:spTree>
+    <p:extLst>
+      <p:ext uri="{BB962C8B-B14F-4D97-AF65-F5344CB8AC3E}">
+        <p14:creationId xmlns:p14="http://schemas.microsoft.com/office/powerpoint/2010/main" val="2891227020"/>
+      </p:ext>
+    </p:extLst>
+  </p:cSld>
+  <p:clrMapOvr>
+    <a:masterClrMapping/>
+  </p:clrMapOvr>
+  <p:timing>
+    <p:tnLst>
+      <p:par>
+        <p:cTn id="1" dur="indefinite" restart="never" nodeType="tmRoot">
+          <p:childTnLst>
+            <p:seq concurrent="1" nextAc="seek">
+              <p:cTn id="2" dur="indefinite" nodeType="mainSeq">
+                <p:childTnLst>
+                  <p:par>
+                    <p:cTn id="3" fill="hold">
+                      <p:stCondLst>
+                        <p:cond delay="indefinite"/>
+                      </p:stCondLst>
+                      <p:childTnLst>
+                        <p:par>
+                          <p:cTn id="4" fill="hold">
+                            <p:stCondLst>
+                              <p:cond delay="0"/>
+                            </p:stCondLst>
+                            <p:childTnLst>
+                              <p:par>
+                                <p:cTn id="5" presetID="1" presetClass="entr" presetSubtype="0" fill="hold" nodeType="clickEffect">
+                                  <p:stCondLst>
+                                    <p:cond delay="0"/>
+                                  </p:stCondLst>
+                                  <p:childTnLst>
+                                    <p:set>
+                                      <p:cBhvr>
+                                        <p:cTn id="6" dur="1" fill="hold">
+                                          <p:stCondLst>
+                                            <p:cond delay="0"/>
+                                          </p:stCondLst>
+                                        </p:cTn>
+                                        <p:tgtEl>
+                                          <p:spTgt spid="10"/>
+                                        </p:tgtEl>
+                                        <p:attrNameLst>
+                                          <p:attrName>style.visibility</p:attrName>
+                                        </p:attrNameLst>
+                                      </p:cBhvr>
+                                      <p:to>
+                                        <p:strVal val="visible"/>
+                                      </p:to>
+                                    </p:set>
+                                  </p:childTnLst>
+                                </p:cTn>
+                              </p:par>
+                            </p:childTnLst>
+                          </p:cTn>
+                        </p:par>
+                      </p:childTnLst>
+                    </p:cTn>
+                  </p:par>
+                </p:childTnLst>
+              </p:cTn>
+              <p:prevCondLst>
+                <p:cond evt="onPrev" delay="0">
+                  <p:tgtEl>
+                    <p:sldTgt/>
+                  </p:tgtEl>
+                </p:cond>
+              </p:prevCondLst>
+              <p:nextCondLst>
+                <p:cond evt="onNext" delay="0">
+                  <p:tgtEl>
+                    <p:sldTgt/>
+                  </p:tgtEl>
+                </p:cond>
+              </p:nextCondLst>
+            </p:seq>
+          </p:childTnLst>
+        </p:cTn>
+      </p:par>
+    </p:tnLst>
+  </p:timing>
+</p:sld>
+</file>
+
+<file path=ppt/slides/slide12.xml><?xml version="1.0" encoding="utf-8"?>
+<p:sld xmlns:a="http://schemas.openxmlformats.org/drawingml/2006/main" xmlns:r="http://schemas.openxmlformats.org/officeDocument/2006/relationships" xmlns:p="http://schemas.openxmlformats.org/presentationml/2006/main">
+  <p:cSld>
+    <p:spTree>
+      <p:nvGrpSpPr>
+        <p:cNvPr id="1" name=""/>
+        <p:cNvGrpSpPr/>
+        <p:nvPr/>
+      </p:nvGrpSpPr>
+      <p:grpSpPr>
+        <a:xfrm>
+          <a:off x="0" y="0"/>
+          <a:ext cx="0" cy="0"/>
+          <a:chOff x="0" y="0"/>
+          <a:chExt cx="0" cy="0"/>
+        </a:xfrm>
+      </p:grpSpPr>
+      <p:sp>
+        <p:nvSpPr>
+          <p:cNvPr id="2" name="Title 1">
+            <a:extLst>
+              <a:ext uri="{FF2B5EF4-FFF2-40B4-BE49-F238E27FC236}">
+                <a16:creationId xmlns:a16="http://schemas.microsoft.com/office/drawing/2014/main" id="{57D07264-3561-01DF-CFB2-F05689F724D3}"/>
+              </a:ext>
+            </a:extLst>
+          </p:cNvPr>
+          <p:cNvSpPr>
+            <a:spLocks noGrp="1"/>
+          </p:cNvSpPr>
+          <p:nvPr>
+            <p:ph type="title"/>
+          </p:nvPr>
+        </p:nvSpPr>
+        <p:spPr/>
+        <p:txBody>
+          <a:bodyPr/>
+          <a:lstStyle/>
+          <a:p>
+            <a:r>
+              <a:rPr lang="en-US" dirty="0" err="1"/>
+              <a:t>Pytest</a:t>
+            </a:r>
+            <a:r>
+              <a:rPr lang="en-US" dirty="0"/>
+              <a:t> Example</a:t>
+            </a:r>
+          </a:p>
+        </p:txBody>
+      </p:sp>
+      <p:sp>
+        <p:nvSpPr>
+          <p:cNvPr id="3" name="Content Placeholder 2">
+            <a:extLst>
+              <a:ext uri="{FF2B5EF4-FFF2-40B4-BE49-F238E27FC236}">
+                <a16:creationId xmlns:a16="http://schemas.microsoft.com/office/drawing/2014/main" id="{0AABB724-6DB6-4EF5-D90E-C137CF03711A}"/>
+              </a:ext>
+            </a:extLst>
+          </p:cNvPr>
+          <p:cNvSpPr>
+            <a:spLocks noGrp="1"/>
+          </p:cNvSpPr>
+          <p:nvPr>
+            <p:ph sz="half" idx="1"/>
+          </p:nvPr>
+        </p:nvSpPr>
+        <p:spPr/>
+        <p:txBody>
+          <a:bodyPr/>
+          <a:lstStyle/>
+          <a:p>
+            <a:r>
+              <a:rPr lang="en-US" dirty="0"/>
+              <a:t>Temperature conversion</a:t>
+            </a:r>
+          </a:p>
+          <a:p>
+            <a:r>
+              <a:rPr lang="en-US" dirty="0"/>
+              <a:t>Scenario 1</a:t>
+            </a:r>
+          </a:p>
+          <a:p>
+            <a:pPr lvl="1"/>
+            <a:r>
+              <a:rPr lang="en-US" dirty="0"/>
+              <a:t>Given a temperature of 0C</a:t>
+            </a:r>
+          </a:p>
+          <a:p>
+            <a:pPr lvl="1"/>
+            <a:r>
+              <a:rPr lang="en-US" dirty="0"/>
+              <a:t>When I convert to F</a:t>
+            </a:r>
+          </a:p>
+          <a:p>
+            <a:pPr lvl="1"/>
+            <a:r>
+              <a:rPr lang="en-US" dirty="0"/>
+              <a:t>Then I should get 32F</a:t>
+            </a:r>
+          </a:p>
+          <a:p>
+            <a:r>
+              <a:rPr lang="en-US" dirty="0"/>
+              <a:t>Scenario 2</a:t>
+            </a:r>
+          </a:p>
+          <a:p>
+            <a:pPr lvl="1"/>
+            <a:r>
+              <a:rPr lang="en-US" dirty="0"/>
+              <a:t>Given a temperature of 100C</a:t>
+            </a:r>
+          </a:p>
+          <a:p>
+            <a:pPr lvl="1"/>
+            <a:r>
+              <a:rPr lang="en-US" dirty="0"/>
+              <a:t>When I convert to F</a:t>
+            </a:r>
+          </a:p>
+          <a:p>
+            <a:pPr lvl="1"/>
+            <a:r>
+              <a:rPr lang="en-US" dirty="0"/>
+              <a:t>Then I should get 212F</a:t>
+            </a:r>
+          </a:p>
+          <a:p>
+            <a:endParaRPr lang="en-US" dirty="0"/>
+          </a:p>
+        </p:txBody>
+      </p:sp>
+      <p:sp>
+        <p:nvSpPr>
+          <p:cNvPr id="4" name="Content Placeholder 3">
+            <a:extLst>
+              <a:ext uri="{FF2B5EF4-FFF2-40B4-BE49-F238E27FC236}">
+                <a16:creationId xmlns:a16="http://schemas.microsoft.com/office/drawing/2014/main" id="{8ECC7BCA-AE9D-B545-6AFE-970F098650B1}"/>
+              </a:ext>
+            </a:extLst>
+          </p:cNvPr>
+          <p:cNvSpPr>
+            <a:spLocks noGrp="1"/>
+          </p:cNvSpPr>
+          <p:nvPr>
+            <p:ph sz="half" idx="2"/>
+          </p:nvPr>
+        </p:nvSpPr>
+        <p:spPr/>
+        <p:txBody>
+          <a:bodyPr/>
+          <a:lstStyle/>
+          <a:p>
+            <a:endParaRPr lang="en-US" dirty="0"/>
+          </a:p>
+          <a:p>
+            <a:r>
+              <a:rPr lang="en-US" dirty="0"/>
+              <a:t>Scenario 3</a:t>
+            </a:r>
+          </a:p>
+          <a:p>
+            <a:pPr lvl="1"/>
+            <a:r>
+              <a:rPr lang="en-US" dirty="0"/>
+              <a:t>Given a temperature of -40C</a:t>
+            </a:r>
+          </a:p>
+          <a:p>
+            <a:pPr lvl="1"/>
+            <a:r>
+              <a:rPr lang="en-US" dirty="0"/>
+              <a:t>When I convert to F</a:t>
+            </a:r>
+          </a:p>
+          <a:p>
+            <a:pPr lvl="1"/>
+            <a:r>
+              <a:rPr lang="en-US" dirty="0"/>
+              <a:t>Then I should get -40F</a:t>
+            </a:r>
+          </a:p>
+          <a:p>
+            <a:r>
+              <a:rPr lang="en-US" dirty="0"/>
+              <a:t>Scenario 4</a:t>
+            </a:r>
+          </a:p>
+          <a:p>
+            <a:pPr lvl="1"/>
+            <a:r>
+              <a:rPr lang="en-US" dirty="0"/>
+              <a:t>Given a temperature of -300C</a:t>
+            </a:r>
+          </a:p>
+          <a:p>
+            <a:pPr lvl="1"/>
+            <a:r>
+              <a:rPr lang="en-US" dirty="0"/>
+              <a:t>When I convert to F</a:t>
+            </a:r>
+          </a:p>
+          <a:p>
+            <a:pPr lvl="1"/>
+            <a:r>
+              <a:rPr lang="en-US" dirty="0"/>
+              <a:t>Then I should get an error!</a:t>
+            </a:r>
+          </a:p>
+        </p:txBody>
+      </p:sp>
+      <p:sp>
+        <p:nvSpPr>
+          <p:cNvPr id="5" name="Date Placeholder 4">
+            <a:extLst>
+              <a:ext uri="{FF2B5EF4-FFF2-40B4-BE49-F238E27FC236}">
+                <a16:creationId xmlns:a16="http://schemas.microsoft.com/office/drawing/2014/main" id="{8FD9210C-E383-2C70-69E9-8F3B29E3001A}"/>
+              </a:ext>
+            </a:extLst>
+          </p:cNvPr>
+          <p:cNvSpPr>
+            <a:spLocks noGrp="1"/>
+          </p:cNvSpPr>
+          <p:nvPr>
+            <p:ph type="dt" sz="half" idx="10"/>
+          </p:nvPr>
+        </p:nvSpPr>
+        <p:spPr/>
+        <p:txBody>
+          <a:bodyPr/>
+          <a:lstStyle/>
+          <a:p>
+            <a:fld id="{334F72C3-CDF3-44A8-B602-1649B1728485}" type="datetime3">
+              <a:rPr lang="en-US" smtClean="0"/>
+              <a:t>15 June 2026</a:t>
+            </a:fld>
+            <a:endParaRPr lang="en-US"/>
+          </a:p>
+        </p:txBody>
+      </p:sp>
+      <p:sp>
+        <p:nvSpPr>
+          <p:cNvPr id="6" name="Slide Number Placeholder 5">
+            <a:extLst>
+              <a:ext uri="{FF2B5EF4-FFF2-40B4-BE49-F238E27FC236}">
+                <a16:creationId xmlns:a16="http://schemas.microsoft.com/office/drawing/2014/main" id="{5B1D9A9C-2C9B-C770-ED0C-27DDC13889EF}"/>
+              </a:ext>
+            </a:extLst>
+          </p:cNvPr>
+          <p:cNvSpPr>
+            <a:spLocks noGrp="1"/>
+          </p:cNvSpPr>
+          <p:nvPr>
+            <p:ph type="sldNum" sz="quarter" idx="11"/>
+          </p:nvPr>
+        </p:nvSpPr>
+        <p:spPr/>
+        <p:txBody>
+          <a:bodyPr/>
+          <a:lstStyle/>
+          <a:p>
+            <a:fld id="{64E5BE4B-2FBF-4174-9E62-85FAD1CB43A6}" type="slidenum">
+              <a:rPr lang="en-US" smtClean="0"/>
+              <a:pPr/>
+              <a:t>12</a:t>
+            </a:fld>
+            <a:endParaRPr lang="en-US"/>
+          </a:p>
+        </p:txBody>
+      </p:sp>
+    </p:spTree>
+    <p:extLst>
+      <p:ext uri="{BB962C8B-B14F-4D97-AF65-F5344CB8AC3E}">
+        <p14:creationId xmlns:p14="http://schemas.microsoft.com/office/powerpoint/2010/main" val="3419234905"/>
+      </p:ext>
+    </p:extLst>
+  </p:cSld>
+  <p:clrMapOvr>
+    <a:masterClrMapping/>
+  </p:clrMapOvr>
+  <p:timing>
+    <p:tnLst>
+      <p:par>
+        <p:cTn id="1" dur="indefinite" restart="never" nodeType="tmRoot">
+          <p:childTnLst>
+            <p:seq concurrent="1" nextAc="seek">
+              <p:cTn id="2" dur="indefinite" nodeType="mainSeq">
+                <p:childTnLst>
+                  <p:par>
+                    <p:cTn id="3" fill="hold">
+                      <p:stCondLst>
+                        <p:cond delay="indefinite"/>
+                      </p:stCondLst>
+                      <p:childTnLst>
+                        <p:par>
+                          <p:cTn id="4" fill="hold">
+                            <p:stCondLst>
+                              <p:cond delay="0"/>
+                            </p:stCondLst>
+                            <p:childTnLst>
+                              <p:par>
+                                <p:cTn id="5" presetID="1" presetClass="entr" presetSubtype="0" fill="hold" nodeType="clickEffect">
+                                  <p:stCondLst>
+                                    <p:cond delay="0"/>
+                                  </p:stCondLst>
+                                  <p:childTnLst>
+                                    <p:set>
+                                      <p:cBhvr>
+                                        <p:cTn id="6" dur="1" fill="hold">
+                                          <p:stCondLst>
+                                            <p:cond delay="0"/>
+                                          </p:stCondLst>
+                                        </p:cTn>
+                                        <p:tgtEl>
+                                          <p:spTgt spid="4">
+                                            <p:txEl>
+                                              <p:pRg st="5" end="5"/>
+                                            </p:txEl>
+                                          </p:spTgt>
+                                        </p:tgtEl>
+                                        <p:attrNameLst>
+                                          <p:attrName>style.visibility</p:attrName>
+                                        </p:attrNameLst>
+                                      </p:cBhvr>
+                                      <p:to>
+                                        <p:strVal val="visible"/>
+                                      </p:to>
+                                    </p:set>
+                                  </p:childTnLst>
+                                </p:cTn>
+                              </p:par>
+                              <p:par>
+                                <p:cTn id="7" presetID="1" presetClass="entr" presetSubtype="0" fill="hold" nodeType="withEffect">
+                                  <p:stCondLst>
+                                    <p:cond delay="0"/>
+                                  </p:stCondLst>
+                                  <p:childTnLst>
+                                    <p:set>
+                                      <p:cBhvr>
+                                        <p:cTn id="8" dur="1" fill="hold">
+                                          <p:stCondLst>
+                                            <p:cond delay="0"/>
+                                          </p:stCondLst>
+                                        </p:cTn>
+                                        <p:tgtEl>
+                                          <p:spTgt spid="4">
+                                            <p:txEl>
+                                              <p:pRg st="6" end="6"/>
+                                            </p:txEl>
+                                          </p:spTgt>
+                                        </p:tgtEl>
+                                        <p:attrNameLst>
+                                          <p:attrName>style.visibility</p:attrName>
+                                        </p:attrNameLst>
+                                      </p:cBhvr>
+                                      <p:to>
+                                        <p:strVal val="visible"/>
+                                      </p:to>
+                                    </p:set>
+                                  </p:childTnLst>
+                                </p:cTn>
+                              </p:par>
+                              <p:par>
+                                <p:cTn id="9" presetID="1" presetClass="entr" presetSubtype="0" fill="hold" nodeType="withEffect">
+                                  <p:stCondLst>
+                                    <p:cond delay="0"/>
+                                  </p:stCondLst>
+                                  <p:childTnLst>
+                                    <p:set>
+                                      <p:cBhvr>
+                                        <p:cTn id="10" dur="1" fill="hold">
+                                          <p:stCondLst>
+                                            <p:cond delay="0"/>
+                                          </p:stCondLst>
+                                        </p:cTn>
+                                        <p:tgtEl>
+                                          <p:spTgt spid="4">
+                                            <p:txEl>
+                                              <p:pRg st="7" end="7"/>
+                                            </p:txEl>
+                                          </p:spTgt>
+                                        </p:tgtEl>
+                                        <p:attrNameLst>
+                                          <p:attrName>style.visibility</p:attrName>
+                                        </p:attrNameLst>
+                                      </p:cBhvr>
+                                      <p:to>
+                                        <p:strVal val="visible"/>
+                                      </p:to>
+                                    </p:set>
+                                  </p:childTnLst>
+                                </p:cTn>
+                              </p:par>
+                              <p:par>
+                                <p:cTn id="11" presetID="1" presetClass="entr" presetSubtype="0" fill="hold" nodeType="withEffect">
+                                  <p:stCondLst>
+                                    <p:cond delay="0"/>
+                                  </p:stCondLst>
+                                  <p:childTnLst>
+                                    <p:set>
+                                      <p:cBhvr>
+                                        <p:cTn id="12" dur="1" fill="hold">
+                                          <p:stCondLst>
+                                            <p:cond delay="0"/>
+                                          </p:stCondLst>
+                                        </p:cTn>
+                                        <p:tgtEl>
+                                          <p:spTgt spid="4">
+                                            <p:txEl>
+                                              <p:pRg st="8" end="8"/>
+                                            </p:txEl>
+                                          </p:spTgt>
+                                        </p:tgtEl>
+                                        <p:attrNameLst>
+                                          <p:attrName>style.visibility</p:attrName>
+                                        </p:attrNameLst>
+                                      </p:cBhvr>
+                                      <p:to>
+                                        <p:strVal val="visible"/>
+                                      </p:to>
+                                    </p:set>
+                                  </p:childTnLst>
+                                </p:cTn>
+                              </p:par>
+                            </p:childTnLst>
+                          </p:cTn>
+                        </p:par>
+                      </p:childTnLst>
+                    </p:cTn>
+                  </p:par>
+                </p:childTnLst>
+              </p:cTn>
+              <p:prevCondLst>
+                <p:cond evt="onPrev" delay="0">
+                  <p:tgtEl>
+                    <p:sldTgt/>
+                  </p:tgtEl>
+                </p:cond>
+              </p:prevCondLst>
+              <p:nextCondLst>
+                <p:cond evt="onNext" delay="0">
+                  <p:tgtEl>
+                    <p:sldTgt/>
+                  </p:tgtEl>
+                </p:cond>
+              </p:nextCondLst>
+            </p:seq>
+          </p:childTnLst>
+        </p:cTn>
+      </p:par>
+    </p:tnLst>
+  </p:timing>
+</p:sld>
+</file>
+
+<file path=ppt/slides/slide13.xml><?xml version="1.0" encoding="utf-8"?>
+<p:sld xmlns:a="http://schemas.openxmlformats.org/drawingml/2006/main" xmlns:r="http://schemas.openxmlformats.org/officeDocument/2006/relationships" xmlns:p="http://schemas.openxmlformats.org/presentationml/2006/main">
+  <p:cSld>
+    <p:spTree>
+      <p:nvGrpSpPr>
+        <p:cNvPr id="1" name=""/>
+        <p:cNvGrpSpPr/>
+        <p:nvPr/>
+      </p:nvGrpSpPr>
+      <p:grpSpPr>
+        <a:xfrm>
+          <a:off x="0" y="0"/>
+          <a:ext cx="0" cy="0"/>
+          <a:chOff x="0" y="0"/>
+          <a:chExt cx="0" cy="0"/>
+        </a:xfrm>
+      </p:grpSpPr>
+      <p:sp>
+        <p:nvSpPr>
+          <p:cNvPr id="7" name="Title 6">
+            <a:extLst>
+              <a:ext uri="{FF2B5EF4-FFF2-40B4-BE49-F238E27FC236}">
+                <a16:creationId xmlns:a16="http://schemas.microsoft.com/office/drawing/2014/main" id="{39193DEF-0125-C556-C5DB-76B76434098C}"/>
+              </a:ext>
+            </a:extLst>
+          </p:cNvPr>
+          <p:cNvSpPr>
+            <a:spLocks noGrp="1"/>
+          </p:cNvSpPr>
+          <p:nvPr>
+            <p:ph type="ctrTitle"/>
+          </p:nvPr>
+        </p:nvSpPr>
+        <p:spPr/>
+        <p:txBody>
+          <a:bodyPr/>
+          <a:lstStyle/>
+          <a:p>
+            <a:r>
+              <a:rPr lang="en-US" dirty="0"/>
+              <a:t>Hands-On #1</a:t>
+            </a:r>
+          </a:p>
+        </p:txBody>
+      </p:sp>
+      <p:sp>
+        <p:nvSpPr>
+          <p:cNvPr id="8" name="Subtitle 7">
+            <a:extLst>
+              <a:ext uri="{FF2B5EF4-FFF2-40B4-BE49-F238E27FC236}">
+                <a16:creationId xmlns:a16="http://schemas.microsoft.com/office/drawing/2014/main" id="{75AB1948-77A9-A7D2-7B16-3ED4D8D8174B}"/>
+              </a:ext>
+            </a:extLst>
+          </p:cNvPr>
+          <p:cNvSpPr>
+            <a:spLocks noGrp="1"/>
+          </p:cNvSpPr>
+          <p:nvPr>
+            <p:ph type="subTitle" idx="1"/>
+          </p:nvPr>
+        </p:nvSpPr>
+        <p:spPr/>
+        <p:txBody>
+          <a:bodyPr/>
+          <a:lstStyle/>
+          <a:p>
+            <a:endParaRPr lang="en-US"/>
+          </a:p>
+        </p:txBody>
+      </p:sp>
+      <p:sp>
+        <p:nvSpPr>
+          <p:cNvPr id="5" name="Date Placeholder 4">
+            <a:extLst>
+              <a:ext uri="{FF2B5EF4-FFF2-40B4-BE49-F238E27FC236}">
+                <a16:creationId xmlns:a16="http://schemas.microsoft.com/office/drawing/2014/main" id="{BA4434AD-5E2E-0FAD-91BD-BC1E28DBCFA3}"/>
+              </a:ext>
+            </a:extLst>
+          </p:cNvPr>
+          <p:cNvSpPr>
+            <a:spLocks noGrp="1"/>
+          </p:cNvSpPr>
+          <p:nvPr>
+            <p:ph type="dt" idx="10"/>
+          </p:nvPr>
+        </p:nvSpPr>
+        <p:spPr/>
+        <p:txBody>
+          <a:bodyPr/>
+          <a:lstStyle/>
+          <a:p>
+            <a:fld id="{334F72C3-CDF3-44A8-B602-1649B1728485}" type="datetime3">
+              <a:rPr lang="en-US" smtClean="0"/>
+              <a:t>15 June 2026</a:t>
+            </a:fld>
+            <a:endParaRPr lang="en-US"/>
+          </a:p>
+        </p:txBody>
+      </p:sp>
+      <p:sp>
+        <p:nvSpPr>
+          <p:cNvPr id="6" name="Slide Number Placeholder 5">
+            <a:extLst>
+              <a:ext uri="{FF2B5EF4-FFF2-40B4-BE49-F238E27FC236}">
+                <a16:creationId xmlns:a16="http://schemas.microsoft.com/office/drawing/2014/main" id="{6210D50F-1517-9E8D-2D77-FBE74D19827E}"/>
+              </a:ext>
+            </a:extLst>
+          </p:cNvPr>
+          <p:cNvSpPr>
+            <a:spLocks noGrp="1"/>
+          </p:cNvSpPr>
+          <p:nvPr>
+            <p:ph type="sldNum" idx="12"/>
+          </p:nvPr>
+        </p:nvSpPr>
+        <p:spPr/>
+        <p:txBody>
+          <a:bodyPr/>
+          <a:lstStyle/>
+          <a:p>
+            <a:fld id="{64E5BE4B-2FBF-4174-9E62-85FAD1CB43A6}" type="slidenum">
+              <a:rPr lang="en-US" smtClean="0"/>
+              <a:pPr/>
+              <a:t>13</a:t>
+            </a:fld>
+            <a:endParaRPr lang="en-US"/>
+          </a:p>
+        </p:txBody>
+      </p:sp>
+    </p:spTree>
+    <p:extLst>
+      <p:ext uri="{BB962C8B-B14F-4D97-AF65-F5344CB8AC3E}">
+        <p14:creationId xmlns:p14="http://schemas.microsoft.com/office/powerpoint/2010/main" val="204812217"/>
+      </p:ext>
+    </p:extLst>
+  </p:cSld>
+  <p:clrMapOvr>
+    <a:masterClrMapping/>
+  </p:clrMapOvr>
+</p:sld>
+</file>
+
+<file path=ppt/slides/slide14.xml><?xml version="1.0" encoding="utf-8"?>
+<p:sld xmlns:a="http://schemas.openxmlformats.org/drawingml/2006/main" xmlns:r="http://schemas.openxmlformats.org/officeDocument/2006/relationships" xmlns:p="http://schemas.openxmlformats.org/presentationml/2006/main">
+  <p:cSld>
+    <p:spTree>
+      <p:nvGrpSpPr>
+        <p:cNvPr id="1" name=""/>
+        <p:cNvGrpSpPr/>
+        <p:nvPr/>
+      </p:nvGrpSpPr>
+      <p:grpSpPr>
+        <a:xfrm>
+          <a:off x="0" y="0"/>
+          <a:ext cx="0" cy="0"/>
+          <a:chOff x="0" y="0"/>
+          <a:chExt cx="0" cy="0"/>
+        </a:xfrm>
+      </p:grpSpPr>
+      <p:sp>
+        <p:nvSpPr>
+          <p:cNvPr id="2" name="Title 1">
+            <a:extLst>
+              <a:ext uri="{FF2B5EF4-FFF2-40B4-BE49-F238E27FC236}">
+                <a16:creationId xmlns:a16="http://schemas.microsoft.com/office/drawing/2014/main" id="{FE6EF007-C706-BB88-CA9D-5A0EA65F4E12}"/>
+              </a:ext>
+            </a:extLst>
+          </p:cNvPr>
+          <p:cNvSpPr>
+            <a:spLocks noGrp="1"/>
+          </p:cNvSpPr>
+          <p:nvPr>
+            <p:ph type="title"/>
+          </p:nvPr>
+        </p:nvSpPr>
+        <p:spPr/>
+        <p:txBody>
+          <a:bodyPr/>
+          <a:lstStyle/>
+          <a:p>
+            <a:r>
+              <a:rPr lang="en-US" dirty="0"/>
+              <a:t>Completeness</a:t>
+            </a:r>
+          </a:p>
+        </p:txBody>
+      </p:sp>
+      <p:sp>
+        <p:nvSpPr>
+          <p:cNvPr id="3" name="Content Placeholder 2">
+            <a:extLst>
+              <a:ext uri="{FF2B5EF4-FFF2-40B4-BE49-F238E27FC236}">
+                <a16:creationId xmlns:a16="http://schemas.microsoft.com/office/drawing/2014/main" id="{2CA2369A-5286-95C3-F1B1-37C71A7209E3}"/>
+              </a:ext>
+            </a:extLst>
+          </p:cNvPr>
+          <p:cNvSpPr>
+            <a:spLocks noGrp="1"/>
+          </p:cNvSpPr>
+          <p:nvPr>
+            <p:ph idx="1"/>
+          </p:nvPr>
+        </p:nvSpPr>
+        <p:spPr/>
+        <p:txBody>
+          <a:bodyPr/>
+          <a:lstStyle/>
+          <a:p>
+            <a:r>
+              <a:rPr lang="en-US" dirty="0"/>
+              <a:t>Code coverage</a:t>
+            </a:r>
+          </a:p>
+        </p:txBody>
+      </p:sp>
+      <p:sp>
+        <p:nvSpPr>
+          <p:cNvPr id="4" name="Date Placeholder 3">
+            <a:extLst>
+              <a:ext uri="{FF2B5EF4-FFF2-40B4-BE49-F238E27FC236}">
+                <a16:creationId xmlns:a16="http://schemas.microsoft.com/office/drawing/2014/main" id="{55496368-EE73-EDD4-A570-E1B8AEC19887}"/>
+              </a:ext>
+            </a:extLst>
+          </p:cNvPr>
+          <p:cNvSpPr>
+            <a:spLocks noGrp="1"/>
+          </p:cNvSpPr>
+          <p:nvPr>
+            <p:ph type="dt" sz="half" idx="10"/>
+          </p:nvPr>
+        </p:nvSpPr>
+        <p:spPr/>
+        <p:txBody>
+          <a:bodyPr/>
+          <a:lstStyle/>
+          <a:p>
+            <a:fld id="{AD622D1A-DF83-41A8-85FF-04D90BF831D3}" type="datetime3">
+              <a:rPr lang="en-US" smtClean="0"/>
+              <a:t>15 June 2026</a:t>
+            </a:fld>
+            <a:endParaRPr lang="en-US"/>
+          </a:p>
+        </p:txBody>
+      </p:sp>
+      <p:sp>
+        <p:nvSpPr>
+          <p:cNvPr id="5" name="Slide Number Placeholder 4">
+            <a:extLst>
+              <a:ext uri="{FF2B5EF4-FFF2-40B4-BE49-F238E27FC236}">
+                <a16:creationId xmlns:a16="http://schemas.microsoft.com/office/drawing/2014/main" id="{72FEC8BB-A300-E137-E2BE-5D5200542B7E}"/>
+              </a:ext>
+            </a:extLst>
+          </p:cNvPr>
+          <p:cNvSpPr>
+            <a:spLocks noGrp="1"/>
+          </p:cNvSpPr>
+          <p:nvPr>
+            <p:ph type="sldNum" sz="quarter" idx="11"/>
+          </p:nvPr>
+        </p:nvSpPr>
+        <p:spPr/>
+        <p:txBody>
+          <a:bodyPr/>
+          <a:lstStyle/>
+          <a:p>
+            <a:fld id="{64E5BE4B-2FBF-4174-9E62-85FAD1CB43A6}" type="slidenum">
+              <a:rPr lang="en-US" smtClean="0"/>
+              <a:pPr/>
+              <a:t>14</a:t>
+            </a:fld>
+            <a:endParaRPr lang="en-US"/>
+          </a:p>
+        </p:txBody>
+      </p:sp>
+    </p:spTree>
+    <p:extLst>
+      <p:ext uri="{BB962C8B-B14F-4D97-AF65-F5344CB8AC3E}">
+        <p14:creationId xmlns:p14="http://schemas.microsoft.com/office/powerpoint/2010/main" val="3576461282"/>
+      </p:ext>
+    </p:extLst>
+  </p:cSld>
+  <p:clrMapOvr>
+    <a:masterClrMapping/>
+  </p:clrMapOvr>
+</p:sld>
+</file>
+
+<file path=ppt/slides/slide15.xml><?xml version="1.0" encoding="utf-8"?>
+<p:sld xmlns:a="http://schemas.openxmlformats.org/drawingml/2006/main" xmlns:r="http://schemas.openxmlformats.org/officeDocument/2006/relationships" xmlns:p="http://schemas.openxmlformats.org/presentationml/2006/main">
+  <p:cSld>
+    <p:spTree>
+      <p:nvGrpSpPr>
+        <p:cNvPr id="1" name=""/>
+        <p:cNvGrpSpPr/>
+        <p:nvPr/>
+      </p:nvGrpSpPr>
+      <p:grpSpPr>
+        <a:xfrm>
+          <a:off x="0" y="0"/>
+          <a:ext cx="0" cy="0"/>
+          <a:chOff x="0" y="0"/>
+          <a:chExt cx="0" cy="0"/>
+        </a:xfrm>
+      </p:grpSpPr>
+      <p:sp>
+        <p:nvSpPr>
+          <p:cNvPr id="2" name="Title 1">
+            <a:extLst>
+              <a:ext uri="{FF2B5EF4-FFF2-40B4-BE49-F238E27FC236}">
+                <a16:creationId xmlns:a16="http://schemas.microsoft.com/office/drawing/2014/main" id="{AFBE7449-8A14-8E4E-1773-68687CF077E7}"/>
+              </a:ext>
+            </a:extLst>
+          </p:cNvPr>
+          <p:cNvSpPr>
+            <a:spLocks noGrp="1"/>
+          </p:cNvSpPr>
+          <p:nvPr>
+            <p:ph type="title"/>
+          </p:nvPr>
+        </p:nvSpPr>
+        <p:spPr/>
+        <p:txBody>
+          <a:bodyPr/>
+          <a:lstStyle/>
+          <a:p>
+            <a:r>
+              <a:rPr lang="en-US" dirty="0"/>
+              <a:t>DRY</a:t>
+            </a:r>
+          </a:p>
+        </p:txBody>
+      </p:sp>
+      <p:sp>
+        <p:nvSpPr>
+          <p:cNvPr id="3" name="Content Placeholder 2">
+            <a:extLst>
+              <a:ext uri="{FF2B5EF4-FFF2-40B4-BE49-F238E27FC236}">
+                <a16:creationId xmlns:a16="http://schemas.microsoft.com/office/drawing/2014/main" id="{85EFD7A7-318A-9FEF-28C1-5F14AE540E72}"/>
+              </a:ext>
+            </a:extLst>
+          </p:cNvPr>
+          <p:cNvSpPr>
+            <a:spLocks noGrp="1"/>
+          </p:cNvSpPr>
+          <p:nvPr>
+            <p:ph idx="1"/>
+          </p:nvPr>
+        </p:nvSpPr>
+        <p:spPr/>
+        <p:txBody>
+          <a:bodyPr/>
+          <a:lstStyle/>
+          <a:p>
+            <a:r>
+              <a:rPr lang="en-US" dirty="0"/>
+              <a:t>Fixtures</a:t>
+            </a:r>
+          </a:p>
+        </p:txBody>
+      </p:sp>
+      <p:sp>
+        <p:nvSpPr>
+          <p:cNvPr id="4" name="Date Placeholder 3">
+            <a:extLst>
+              <a:ext uri="{FF2B5EF4-FFF2-40B4-BE49-F238E27FC236}">
+                <a16:creationId xmlns:a16="http://schemas.microsoft.com/office/drawing/2014/main" id="{8B55FC9A-DC16-0D9D-1583-AC865242E328}"/>
+              </a:ext>
+            </a:extLst>
+          </p:cNvPr>
+          <p:cNvSpPr>
+            <a:spLocks noGrp="1"/>
+          </p:cNvSpPr>
+          <p:nvPr>
+            <p:ph type="dt" sz="half" idx="10"/>
+          </p:nvPr>
+        </p:nvSpPr>
+        <p:spPr/>
+        <p:txBody>
+          <a:bodyPr/>
+          <a:lstStyle/>
+          <a:p>
+            <a:fld id="{AD622D1A-DF83-41A8-85FF-04D90BF831D3}" type="datetime3">
+              <a:rPr lang="en-US" smtClean="0"/>
+              <a:t>15 June 2026</a:t>
+            </a:fld>
+            <a:endParaRPr lang="en-US"/>
+          </a:p>
+        </p:txBody>
+      </p:sp>
+      <p:sp>
+        <p:nvSpPr>
+          <p:cNvPr id="5" name="Slide Number Placeholder 4">
+            <a:extLst>
+              <a:ext uri="{FF2B5EF4-FFF2-40B4-BE49-F238E27FC236}">
+                <a16:creationId xmlns:a16="http://schemas.microsoft.com/office/drawing/2014/main" id="{DB08E3C8-C147-89EA-F9F4-7977B79D869D}"/>
+              </a:ext>
+            </a:extLst>
+          </p:cNvPr>
+          <p:cNvSpPr>
+            <a:spLocks noGrp="1"/>
+          </p:cNvSpPr>
+          <p:nvPr>
+            <p:ph type="sldNum" sz="quarter" idx="11"/>
+          </p:nvPr>
+        </p:nvSpPr>
+        <p:spPr/>
+        <p:txBody>
+          <a:bodyPr/>
+          <a:lstStyle/>
+          <a:p>
+            <a:fld id="{64E5BE4B-2FBF-4174-9E62-85FAD1CB43A6}" type="slidenum">
+              <a:rPr lang="en-US" smtClean="0"/>
+              <a:pPr/>
+              <a:t>15</a:t>
+            </a:fld>
+            <a:endParaRPr lang="en-US"/>
+          </a:p>
+        </p:txBody>
+      </p:sp>
+    </p:spTree>
+    <p:extLst>
+      <p:ext uri="{BB962C8B-B14F-4D97-AF65-F5344CB8AC3E}">
+        <p14:creationId xmlns:p14="http://schemas.microsoft.com/office/powerpoint/2010/main" val="1953408799"/>
+      </p:ext>
+    </p:extLst>
+  </p:cSld>
+  <p:clrMapOvr>
+    <a:masterClrMapping/>
+  </p:clrMapOvr>
+</p:sld>
+</file>
+
+<file path=ppt/slides/slide16.xml><?xml version="1.0" encoding="utf-8"?>
+<p:sld xmlns:a="http://schemas.openxmlformats.org/drawingml/2006/main" xmlns:r="http://schemas.openxmlformats.org/officeDocument/2006/relationships" xmlns:p="http://schemas.openxmlformats.org/presentationml/2006/main">
+  <p:cSld>
+    <p:spTree>
+      <p:nvGrpSpPr>
+        <p:cNvPr id="1" name=""/>
+        <p:cNvGrpSpPr/>
+        <p:nvPr/>
+      </p:nvGrpSpPr>
+      <p:grpSpPr>
+        <a:xfrm>
+          <a:off x="0" y="0"/>
+          <a:ext cx="0" cy="0"/>
+          <a:chOff x="0" y="0"/>
+          <a:chExt cx="0" cy="0"/>
+        </a:xfrm>
+      </p:grpSpPr>
+      <p:sp>
+        <p:nvSpPr>
+          <p:cNvPr id="2" name="Title 1">
+            <a:extLst>
+              <a:ext uri="{FF2B5EF4-FFF2-40B4-BE49-F238E27FC236}">
+                <a16:creationId xmlns:a16="http://schemas.microsoft.com/office/drawing/2014/main" id="{1E90BFE8-BEA7-3940-667B-3FF6A7BCDE23}"/>
+              </a:ext>
+            </a:extLst>
+          </p:cNvPr>
+          <p:cNvSpPr>
+            <a:spLocks noGrp="1"/>
+          </p:cNvSpPr>
+          <p:nvPr>
+            <p:ph type="title"/>
+          </p:nvPr>
+        </p:nvSpPr>
+        <p:spPr/>
+        <p:txBody>
+          <a:bodyPr/>
+          <a:lstStyle/>
+          <a:p>
+            <a:r>
+              <a:rPr lang="en-US" dirty="0"/>
+              <a:t>Mocking </a:t>
+            </a:r>
+            <a:r>
+              <a:rPr lang="en-US"/>
+              <a:t>External References</a:t>
+            </a:r>
+            <a:endParaRPr lang="en-US" dirty="0"/>
+          </a:p>
+        </p:txBody>
+      </p:sp>
+      <p:sp>
+        <p:nvSpPr>
+          <p:cNvPr id="3" name="Content Placeholder 2">
+            <a:extLst>
+              <a:ext uri="{FF2B5EF4-FFF2-40B4-BE49-F238E27FC236}">
+                <a16:creationId xmlns:a16="http://schemas.microsoft.com/office/drawing/2014/main" id="{3DFA01B0-9D70-8BBB-8D34-48A2E2EF3701}"/>
+              </a:ext>
+            </a:extLst>
+          </p:cNvPr>
+          <p:cNvSpPr>
+            <a:spLocks noGrp="1"/>
+          </p:cNvSpPr>
+          <p:nvPr>
+            <p:ph idx="1"/>
+          </p:nvPr>
+        </p:nvSpPr>
+        <p:spPr/>
+        <p:txBody>
+          <a:bodyPr/>
+          <a:lstStyle/>
+          <a:p>
+            <a:r>
+              <a:rPr lang="en-US" dirty="0"/>
+              <a:t>Intro to mocks</a:t>
+            </a:r>
+          </a:p>
+        </p:txBody>
+      </p:sp>
+      <p:sp>
+        <p:nvSpPr>
+          <p:cNvPr id="4" name="Date Placeholder 3">
+            <a:extLst>
+              <a:ext uri="{FF2B5EF4-FFF2-40B4-BE49-F238E27FC236}">
+                <a16:creationId xmlns:a16="http://schemas.microsoft.com/office/drawing/2014/main" id="{4FFB9305-2CBA-FCFF-86FC-1A2D6F2DCA86}"/>
+              </a:ext>
+            </a:extLst>
+          </p:cNvPr>
+          <p:cNvSpPr>
+            <a:spLocks noGrp="1"/>
+          </p:cNvSpPr>
+          <p:nvPr>
+            <p:ph type="dt" sz="half" idx="10"/>
+          </p:nvPr>
+        </p:nvSpPr>
+        <p:spPr/>
+        <p:txBody>
+          <a:bodyPr/>
+          <a:lstStyle/>
+          <a:p>
+            <a:fld id="{AD622D1A-DF83-41A8-85FF-04D90BF831D3}" type="datetime3">
+              <a:rPr lang="en-US" smtClean="0"/>
+              <a:t>15 June 2026</a:t>
+            </a:fld>
+            <a:endParaRPr lang="en-US"/>
+          </a:p>
+        </p:txBody>
+      </p:sp>
+      <p:sp>
+        <p:nvSpPr>
+          <p:cNvPr id="5" name="Slide Number Placeholder 4">
+            <a:extLst>
+              <a:ext uri="{FF2B5EF4-FFF2-40B4-BE49-F238E27FC236}">
+                <a16:creationId xmlns:a16="http://schemas.microsoft.com/office/drawing/2014/main" id="{BC24ECD0-6721-C76E-C7B4-37CC4871FADC}"/>
+              </a:ext>
+            </a:extLst>
+          </p:cNvPr>
+          <p:cNvSpPr>
+            <a:spLocks noGrp="1"/>
+          </p:cNvSpPr>
+          <p:nvPr>
+            <p:ph type="sldNum" sz="quarter" idx="11"/>
+          </p:nvPr>
+        </p:nvSpPr>
+        <p:spPr/>
+        <p:txBody>
+          <a:bodyPr/>
+          <a:lstStyle/>
+          <a:p>
+            <a:fld id="{64E5BE4B-2FBF-4174-9E62-85FAD1CB43A6}" type="slidenum">
+              <a:rPr lang="en-US" smtClean="0"/>
+              <a:pPr/>
+              <a:t>16</a:t>
+            </a:fld>
+            <a:endParaRPr lang="en-US"/>
+          </a:p>
+        </p:txBody>
+      </p:sp>
+    </p:spTree>
+    <p:extLst>
+      <p:ext uri="{BB962C8B-B14F-4D97-AF65-F5344CB8AC3E}">
+        <p14:creationId xmlns:p14="http://schemas.microsoft.com/office/powerpoint/2010/main" val="1276382243"/>
+      </p:ext>
+    </p:extLst>
+  </p:cSld>
+  <p:clrMapOvr>
+    <a:masterClrMapping/>
+  </p:clrMapOvr>
+</p:sld>
+</file>
+
+<file path=ppt/slides/slide17.xml><?xml version="1.0" encoding="utf-8"?>
+<p:sld xmlns:a="http://schemas.openxmlformats.org/drawingml/2006/main" xmlns:r="http://schemas.openxmlformats.org/officeDocument/2006/relationships" xmlns:p="http://schemas.openxmlformats.org/presentationml/2006/main">
+  <p:cSld>
+    <p:spTree>
+      <p:nvGrpSpPr>
+        <p:cNvPr id="1" name="">
+          <a:extLst>
+            <a:ext uri="{FF2B5EF4-FFF2-40B4-BE49-F238E27FC236}">
+              <a16:creationId xmlns:a16="http://schemas.microsoft.com/office/drawing/2014/main" id="{324DADAD-76BA-9AB6-04D8-F96359438996}"/>
+            </a:ext>
+          </a:extLst>
+        </p:cNvPr>
+        <p:cNvGrpSpPr/>
+        <p:nvPr/>
+      </p:nvGrpSpPr>
+      <p:grpSpPr>
+        <a:xfrm>
+          <a:off x="0" y="0"/>
+          <a:ext cx="0" cy="0"/>
+          <a:chOff x="0" y="0"/>
+          <a:chExt cx="0" cy="0"/>
+        </a:xfrm>
+      </p:grpSpPr>
+      <p:sp>
+        <p:nvSpPr>
+          <p:cNvPr id="19" name="Title 18">
+            <a:extLst>
+              <a:ext uri="{FF2B5EF4-FFF2-40B4-BE49-F238E27FC236}">
+                <a16:creationId xmlns:a16="http://schemas.microsoft.com/office/drawing/2014/main" id="{36B38081-0A20-1671-69BB-F04D160E86DA}"/>
+              </a:ext>
+            </a:extLst>
+          </p:cNvPr>
+          <p:cNvSpPr>
+            <a:spLocks noGrp="1"/>
+          </p:cNvSpPr>
+          <p:nvPr>
+            <p:ph type="ctrTitle"/>
+          </p:nvPr>
+        </p:nvSpPr>
+        <p:spPr/>
+        <p:txBody>
+          <a:bodyPr/>
+          <a:lstStyle/>
+          <a:p>
+            <a:r>
+              <a:rPr lang="en-US" dirty="0"/>
+              <a:t>Integration Tests</a:t>
+            </a:r>
+          </a:p>
+        </p:txBody>
+      </p:sp>
+      <p:sp>
+        <p:nvSpPr>
+          <p:cNvPr id="20" name="Subtitle 19">
+            <a:extLst>
+              <a:ext uri="{FF2B5EF4-FFF2-40B4-BE49-F238E27FC236}">
+                <a16:creationId xmlns:a16="http://schemas.microsoft.com/office/drawing/2014/main" id="{3BA15F1A-B579-CF67-3060-C51EA22FB5C8}"/>
+              </a:ext>
+            </a:extLst>
+          </p:cNvPr>
+          <p:cNvSpPr>
+            <a:spLocks noGrp="1"/>
+          </p:cNvSpPr>
+          <p:nvPr>
+            <p:ph type="subTitle" idx="1"/>
+          </p:nvPr>
+        </p:nvSpPr>
+        <p:spPr/>
+        <p:txBody>
+          <a:bodyPr/>
+          <a:lstStyle/>
+          <a:p>
+            <a:endParaRPr lang="en-US"/>
+          </a:p>
+        </p:txBody>
+      </p:sp>
+      <p:sp>
+        <p:nvSpPr>
+          <p:cNvPr id="4" name="Date Placeholder 3">
+            <a:extLst>
+              <a:ext uri="{FF2B5EF4-FFF2-40B4-BE49-F238E27FC236}">
+                <a16:creationId xmlns:a16="http://schemas.microsoft.com/office/drawing/2014/main" id="{5EC030FD-2B80-BD4D-BA09-0A7A49C2BA76}"/>
+              </a:ext>
+            </a:extLst>
+          </p:cNvPr>
+          <p:cNvSpPr>
+            <a:spLocks noGrp="1"/>
+          </p:cNvSpPr>
+          <p:nvPr>
+            <p:ph type="dt" idx="10"/>
+          </p:nvPr>
+        </p:nvSpPr>
+        <p:spPr/>
+        <p:txBody>
+          <a:bodyPr/>
+          <a:lstStyle/>
+          <a:p>
+            <a:fld id="{AD622D1A-DF83-41A8-85FF-04D90BF831D3}" type="datetime3">
+              <a:rPr lang="en-US" smtClean="0"/>
+              <a:t>15 June 2026</a:t>
+            </a:fld>
+            <a:endParaRPr lang="en-US"/>
+          </a:p>
+        </p:txBody>
+      </p:sp>
+      <p:sp>
+        <p:nvSpPr>
+          <p:cNvPr id="5" name="Slide Number Placeholder 4">
+            <a:extLst>
+              <a:ext uri="{FF2B5EF4-FFF2-40B4-BE49-F238E27FC236}">
+                <a16:creationId xmlns:a16="http://schemas.microsoft.com/office/drawing/2014/main" id="{031F3622-C14B-8E9D-151C-66C2F0F036A0}"/>
+              </a:ext>
+            </a:extLst>
+          </p:cNvPr>
+          <p:cNvSpPr>
+            <a:spLocks noGrp="1"/>
+          </p:cNvSpPr>
+          <p:nvPr>
+            <p:ph type="sldNum" idx="12"/>
+          </p:nvPr>
+        </p:nvSpPr>
+        <p:spPr/>
+        <p:txBody>
+          <a:bodyPr/>
+          <a:lstStyle/>
+          <a:p>
+            <a:fld id="{64E5BE4B-2FBF-4174-9E62-85FAD1CB43A6}" type="slidenum">
+              <a:rPr lang="en-US" smtClean="0"/>
+              <a:pPr/>
+              <a:t>17</a:t>
+            </a:fld>
+            <a:endParaRPr lang="en-US"/>
+          </a:p>
+        </p:txBody>
+      </p:sp>
+    </p:spTree>
+    <p:extLst>
+      <p:ext uri="{BB962C8B-B14F-4D97-AF65-F5344CB8AC3E}">
+        <p14:creationId xmlns:p14="http://schemas.microsoft.com/office/powerpoint/2010/main" val="1145013977"/>
+      </p:ext>
+    </p:extLst>
+  </p:cSld>
+  <p:clrMapOvr>
+    <a:masterClrMapping/>
+  </p:clrMapOvr>
+</p:sld>
+</file>
+
+<file path=ppt/slides/slide18.xml><?xml version="1.0" encoding="utf-8"?>
+<p:sld xmlns:a="http://schemas.openxmlformats.org/drawingml/2006/main" xmlns:r="http://schemas.openxmlformats.org/officeDocument/2006/relationships" xmlns:p="http://schemas.openxmlformats.org/presentationml/2006/main">
+  <p:cSld>
+    <p:spTree>
+      <p:nvGrpSpPr>
+        <p:cNvPr id="1" name=""/>
+        <p:cNvGrpSpPr/>
+        <p:nvPr/>
+      </p:nvGrpSpPr>
+      <p:grpSpPr>
+        <a:xfrm>
+          <a:off x="0" y="0"/>
+          <a:ext cx="0" cy="0"/>
+          <a:chOff x="0" y="0"/>
+          <a:chExt cx="0" cy="0"/>
+        </a:xfrm>
+      </p:grpSpPr>
+      <p:sp>
+        <p:nvSpPr>
+          <p:cNvPr id="7" name="Title 6">
+            <a:extLst>
+              <a:ext uri="{FF2B5EF4-FFF2-40B4-BE49-F238E27FC236}">
+                <a16:creationId xmlns:a16="http://schemas.microsoft.com/office/drawing/2014/main" id="{D14BFEEE-7A67-A4C6-34AC-EBA551105650}"/>
+              </a:ext>
+            </a:extLst>
+          </p:cNvPr>
+          <p:cNvSpPr>
+            <a:spLocks noGrp="1"/>
+          </p:cNvSpPr>
+          <p:nvPr>
+            <p:ph type="title"/>
+          </p:nvPr>
+        </p:nvSpPr>
+        <p:spPr/>
+        <p:txBody>
+          <a:bodyPr/>
+          <a:lstStyle/>
+          <a:p>
+            <a:endParaRPr lang="en-US"/>
+          </a:p>
+        </p:txBody>
+      </p:sp>
+      <p:sp>
+        <p:nvSpPr>
+          <p:cNvPr id="8" name="Content Placeholder 7">
+            <a:extLst>
+              <a:ext uri="{FF2B5EF4-FFF2-40B4-BE49-F238E27FC236}">
+                <a16:creationId xmlns:a16="http://schemas.microsoft.com/office/drawing/2014/main" id="{C56C219E-137A-78B0-B87B-03012C100723}"/>
+              </a:ext>
+            </a:extLst>
+          </p:cNvPr>
+          <p:cNvSpPr>
+            <a:spLocks noGrp="1"/>
+          </p:cNvSpPr>
+          <p:nvPr>
+            <p:ph idx="1"/>
+          </p:nvPr>
+        </p:nvSpPr>
+        <p:spPr/>
+        <p:txBody>
+          <a:bodyPr/>
+          <a:lstStyle/>
+          <a:p>
+            <a:r>
+              <a:rPr lang="en-US" dirty="0"/>
+              <a:t>Integration tests</a:t>
+            </a:r>
+          </a:p>
+        </p:txBody>
+      </p:sp>
+      <p:sp>
+        <p:nvSpPr>
+          <p:cNvPr id="4" name="Date Placeholder 3">
+            <a:extLst>
+              <a:ext uri="{FF2B5EF4-FFF2-40B4-BE49-F238E27FC236}">
+                <a16:creationId xmlns:a16="http://schemas.microsoft.com/office/drawing/2014/main" id="{422F2481-E1BF-0673-AADD-550026A89217}"/>
+              </a:ext>
+            </a:extLst>
+          </p:cNvPr>
+          <p:cNvSpPr>
+            <a:spLocks noGrp="1"/>
+          </p:cNvSpPr>
+          <p:nvPr>
+            <p:ph type="dt" sz="half" idx="10"/>
+          </p:nvPr>
+        </p:nvSpPr>
+        <p:spPr/>
+        <p:txBody>
+          <a:bodyPr/>
+          <a:lstStyle/>
+          <a:p>
+            <a:endParaRPr lang="en-US"/>
+          </a:p>
+        </p:txBody>
+      </p:sp>
+      <p:sp>
+        <p:nvSpPr>
+          <p:cNvPr id="6" name="Slide Number Placeholder 5">
+            <a:extLst>
+              <a:ext uri="{FF2B5EF4-FFF2-40B4-BE49-F238E27FC236}">
+                <a16:creationId xmlns:a16="http://schemas.microsoft.com/office/drawing/2014/main" id="{7C2A292B-1E3A-EB90-3705-C1841930EC51}"/>
+              </a:ext>
+            </a:extLst>
+          </p:cNvPr>
+          <p:cNvSpPr>
+            <a:spLocks noGrp="1"/>
+          </p:cNvSpPr>
+          <p:nvPr>
+            <p:ph type="sldNum" sz="quarter" idx="11"/>
+          </p:nvPr>
+        </p:nvSpPr>
+        <p:spPr/>
+        <p:txBody>
+          <a:bodyPr/>
+          <a:lstStyle/>
+          <a:p>
+            <a:pPr marL="0" lvl="0" indent="0" algn="r" rtl="0">
+              <a:spcBef>
+                <a:spcPts val="0"/>
+              </a:spcBef>
+              <a:spcAft>
+                <a:spcPts val="0"/>
+              </a:spcAft>
+              <a:buNone/>
+            </a:pPr>
+            <a:fld id="{00000000-1234-1234-1234-123412341234}" type="slidenum">
+              <a:rPr lang="en" smtClean="0"/>
+              <a:t>18</a:t>
+            </a:fld>
+            <a:endParaRPr lang="en"/>
+          </a:p>
+        </p:txBody>
+      </p:sp>
+    </p:spTree>
+    <p:extLst>
+      <p:ext uri="{BB962C8B-B14F-4D97-AF65-F5344CB8AC3E}">
+        <p14:creationId xmlns:p14="http://schemas.microsoft.com/office/powerpoint/2010/main" val="4085729229"/>
+      </p:ext>
+    </p:extLst>
+  </p:cSld>
+  <p:clrMapOvr>
+    <a:masterClrMapping/>
+  </p:clrMapOvr>
+</p:sld>
+</file>
+
+<file path=ppt/slides/slide19.xml><?xml version="1.0" encoding="utf-8"?>
+<p:sld xmlns:a="http://schemas.openxmlformats.org/drawingml/2006/main" xmlns:r="http://schemas.openxmlformats.org/officeDocument/2006/relationships" xmlns:p="http://schemas.openxmlformats.org/presentationml/2006/main">
+  <p:cSld>
+    <p:spTree>
+      <p:nvGrpSpPr>
+        <p:cNvPr id="1" name=""/>
+        <p:cNvGrpSpPr/>
+        <p:nvPr/>
+      </p:nvGrpSpPr>
+      <p:grpSpPr>
+        <a:xfrm>
+          <a:off x="0" y="0"/>
+          <a:ext cx="0" cy="0"/>
+          <a:chOff x="0" y="0"/>
+          <a:chExt cx="0" cy="0"/>
+        </a:xfrm>
+      </p:grpSpPr>
+      <p:sp>
+        <p:nvSpPr>
+          <p:cNvPr id="2" name="Title 1">
+            <a:extLst>
+              <a:ext uri="{FF2B5EF4-FFF2-40B4-BE49-F238E27FC236}">
+                <a16:creationId xmlns:a16="http://schemas.microsoft.com/office/drawing/2014/main" id="{9E04A9B4-610E-079B-1B4C-B2DA6358879D}"/>
+              </a:ext>
+            </a:extLst>
+          </p:cNvPr>
+          <p:cNvSpPr>
+            <a:spLocks noGrp="1"/>
+          </p:cNvSpPr>
+          <p:nvPr>
+            <p:ph type="title"/>
+          </p:nvPr>
+        </p:nvSpPr>
+        <p:spPr/>
+        <p:txBody>
+          <a:bodyPr/>
+          <a:lstStyle/>
+          <a:p>
+            <a:endParaRPr lang="en-US"/>
+          </a:p>
+        </p:txBody>
+      </p:sp>
+      <p:sp>
+        <p:nvSpPr>
+          <p:cNvPr id="3" name="Content Placeholder 2">
+            <a:extLst>
+              <a:ext uri="{FF2B5EF4-FFF2-40B4-BE49-F238E27FC236}">
+                <a16:creationId xmlns:a16="http://schemas.microsoft.com/office/drawing/2014/main" id="{13371C84-11DA-CC16-E166-D409DD2E7BF8}"/>
+              </a:ext>
+            </a:extLst>
+          </p:cNvPr>
+          <p:cNvSpPr>
+            <a:spLocks noGrp="1"/>
+          </p:cNvSpPr>
+          <p:nvPr>
+            <p:ph idx="1"/>
+          </p:nvPr>
+        </p:nvSpPr>
+        <p:spPr/>
+        <p:txBody>
+          <a:bodyPr/>
+          <a:lstStyle/>
+          <a:p>
+            <a:endParaRPr lang="en-US" dirty="0"/>
+          </a:p>
+        </p:txBody>
+      </p:sp>
+      <p:sp>
+        <p:nvSpPr>
+          <p:cNvPr id="4" name="Date Placeholder 3">
+            <a:extLst>
+              <a:ext uri="{FF2B5EF4-FFF2-40B4-BE49-F238E27FC236}">
+                <a16:creationId xmlns:a16="http://schemas.microsoft.com/office/drawing/2014/main" id="{F4715F3F-3A06-58A0-7854-7393E23446EF}"/>
+              </a:ext>
+            </a:extLst>
+          </p:cNvPr>
+          <p:cNvSpPr>
+            <a:spLocks noGrp="1"/>
+          </p:cNvSpPr>
+          <p:nvPr>
+            <p:ph type="dt" sz="half" idx="10"/>
+          </p:nvPr>
+        </p:nvSpPr>
+        <p:spPr/>
+        <p:txBody>
+          <a:bodyPr/>
+          <a:lstStyle/>
+          <a:p>
+            <a:fld id="{AD622D1A-DF83-41A8-85FF-04D90BF831D3}" type="datetime3">
+              <a:rPr lang="en-US" smtClean="0"/>
+              <a:t>15 June 2026</a:t>
+            </a:fld>
+            <a:endParaRPr lang="en-US"/>
+          </a:p>
+        </p:txBody>
+      </p:sp>
+      <p:sp>
+        <p:nvSpPr>
+          <p:cNvPr id="5" name="Slide Number Placeholder 4">
+            <a:extLst>
+              <a:ext uri="{FF2B5EF4-FFF2-40B4-BE49-F238E27FC236}">
+                <a16:creationId xmlns:a16="http://schemas.microsoft.com/office/drawing/2014/main" id="{A9906345-62A7-3075-1403-F85D44D6AF85}"/>
+              </a:ext>
+            </a:extLst>
+          </p:cNvPr>
+          <p:cNvSpPr>
+            <a:spLocks noGrp="1"/>
+          </p:cNvSpPr>
+          <p:nvPr>
+            <p:ph type="sldNum" sz="quarter" idx="11"/>
+          </p:nvPr>
+        </p:nvSpPr>
+        <p:spPr/>
+        <p:txBody>
+          <a:bodyPr/>
+          <a:lstStyle/>
+          <a:p>
+            <a:fld id="{64E5BE4B-2FBF-4174-9E62-85FAD1CB43A6}" type="slidenum">
+              <a:rPr lang="en-US" smtClean="0"/>
+              <a:pPr/>
+              <a:t>19</a:t>
+            </a:fld>
+            <a:endParaRPr lang="en-US"/>
+          </a:p>
+        </p:txBody>
+      </p:sp>
+    </p:spTree>
+    <p:extLst>
+      <p:ext uri="{BB962C8B-B14F-4D97-AF65-F5344CB8AC3E}">
+        <p14:creationId xmlns:p14="http://schemas.microsoft.com/office/powerpoint/2010/main" val="2599536583"/>
+      </p:ext>
+    </p:extLst>
+  </p:cSld>
+  <p:clrMapOvr>
+    <a:masterClrMapping/>
+  </p:clrMapOvr>
+</p:sld>
+</file>
+
 <file path=ppt/slides/slide2.xml><?xml version="1.0" encoding="utf-8"?>
 <p:sld xmlns:a="http://schemas.openxmlformats.org/drawingml/2006/main" xmlns:r="http://schemas.openxmlformats.org/officeDocument/2006/relationships" xmlns:p="http://schemas.openxmlformats.org/presentationml/2006/main">
   <p:cSld>
@@ -23262,26 +27216,27 @@
           <a:lstStyle/>
           <a:p>
             <a:r>
-              <a:rPr lang="en-US" dirty="0"/>
+              <a:rPr lang="en-US" sz="2000" dirty="0"/>
               <a:t>Discuss the importance of a complete test suite</a:t>
             </a:r>
           </a:p>
           <a:p>
             <a:r>
-              <a:rPr lang="en-US" dirty="0"/>
+              <a:rPr lang="en-US" sz="2000" dirty="0"/>
+              <a:t>Define the differences between unit, integration, and end-to-end testing</a:t>
+            </a:r>
+          </a:p>
+          <a:p>
+            <a:r>
+              <a:rPr lang="en-US" sz="2000" dirty="0"/>
               <a:t>Create unit tests to achieve a specified code coverage level</a:t>
             </a:r>
           </a:p>
           <a:p>
             <a:r>
-              <a:rPr lang="en-US" dirty="0"/>
-              <a:t>Define the differences between unit, integration, and </a:t>
-            </a:r>
-            <a:r>
-              <a:rPr lang="en-US"/>
-              <a:t>end-to-end testing</a:t>
-            </a:r>
-            <a:endParaRPr lang="en-US" dirty="0"/>
+              <a:rPr lang="en-US" sz="2000" dirty="0"/>
+              <a:t>Utilize fixtures and mocks to implement unit tests</a:t>
+            </a:r>
           </a:p>
         </p:txBody>
       </p:sp>
@@ -23308,7 +27263,7 @@
           <a:p>
             <a:fld id="{D41656AB-D2E1-472E-8B95-0DF5C6E1D623}" type="datetime3">
               <a:rPr lang="en-US" smtClean="0"/>
-              <a:t>10 June 2026</a:t>
+              <a:t>15 June 2026</a:t>
             </a:fld>
             <a:endParaRPr lang="en-US"/>
           </a:p>
@@ -23348,6 +27303,130 @@
     <p:extLst>
       <p:ext uri="{BB962C8B-B14F-4D97-AF65-F5344CB8AC3E}">
         <p14:creationId xmlns:p14="http://schemas.microsoft.com/office/powerpoint/2010/main" val="1122244302"/>
+      </p:ext>
+    </p:extLst>
+  </p:cSld>
+  <p:clrMapOvr>
+    <a:masterClrMapping/>
+  </p:clrMapOvr>
+</p:sld>
+</file>
+
+<file path=ppt/slides/slide20.xml><?xml version="1.0" encoding="utf-8"?>
+<p:sld xmlns:a="http://schemas.openxmlformats.org/drawingml/2006/main" xmlns:r="http://schemas.openxmlformats.org/officeDocument/2006/relationships" xmlns:p="http://schemas.openxmlformats.org/presentationml/2006/main">
+  <p:cSld>
+    <p:spTree>
+      <p:nvGrpSpPr>
+        <p:cNvPr id="1" name=""/>
+        <p:cNvGrpSpPr/>
+        <p:nvPr/>
+      </p:nvGrpSpPr>
+      <p:grpSpPr>
+        <a:xfrm>
+          <a:off x="0" y="0"/>
+          <a:ext cx="0" cy="0"/>
+          <a:chOff x="0" y="0"/>
+          <a:chExt cx="0" cy="0"/>
+        </a:xfrm>
+      </p:grpSpPr>
+      <p:sp>
+        <p:nvSpPr>
+          <p:cNvPr id="7" name="Subtitle 6">
+            <a:extLst>
+              <a:ext uri="{FF2B5EF4-FFF2-40B4-BE49-F238E27FC236}">
+                <a16:creationId xmlns:a16="http://schemas.microsoft.com/office/drawing/2014/main" id="{BB461378-5E4E-EAA7-2DA6-FF06B0491E78}"/>
+              </a:ext>
+            </a:extLst>
+          </p:cNvPr>
+          <p:cNvSpPr>
+            <a:spLocks noGrp="1"/>
+          </p:cNvSpPr>
+          <p:nvPr>
+            <p:ph type="subTitle" idx="1"/>
+          </p:nvPr>
+        </p:nvSpPr>
+        <p:spPr>
+          <a:xfrm>
+            <a:off x="1143000" y="2010153"/>
+            <a:ext cx="6858000" cy="1241822"/>
+          </a:xfrm>
+        </p:spPr>
+        <p:txBody>
+          <a:bodyPr>
+            <a:normAutofit/>
+          </a:bodyPr>
+          <a:lstStyle/>
+          <a:p>
+            <a:r>
+              <a:rPr lang="en-US" sz="4000" dirty="0"/>
+              <a:t>Questions</a:t>
+            </a:r>
+          </a:p>
+        </p:txBody>
+      </p:sp>
+      <p:sp>
+        <p:nvSpPr>
+          <p:cNvPr id="4" name="Date Placeholder 3">
+            <a:extLst>
+              <a:ext uri="{FF2B5EF4-FFF2-40B4-BE49-F238E27FC236}">
+                <a16:creationId xmlns:a16="http://schemas.microsoft.com/office/drawing/2014/main" id="{C7EF127C-DDD5-C7BF-D5E8-90D39B1EDE6E}"/>
+              </a:ext>
+            </a:extLst>
+          </p:cNvPr>
+          <p:cNvSpPr>
+            <a:spLocks noGrp="1"/>
+          </p:cNvSpPr>
+          <p:nvPr>
+            <p:ph type="dt" idx="10"/>
+          </p:nvPr>
+        </p:nvSpPr>
+        <p:spPr/>
+        <p:txBody>
+          <a:bodyPr/>
+          <a:lstStyle/>
+          <a:p>
+            <a:fld id="{AD622D1A-DF83-41A8-85FF-04D90BF831D3}" type="datetime3">
+              <a:rPr lang="en-US" smtClean="0"/>
+              <a:t>15 June 2026</a:t>
+            </a:fld>
+            <a:endParaRPr lang="en-US"/>
+          </a:p>
+        </p:txBody>
+      </p:sp>
+      <p:sp>
+        <p:nvSpPr>
+          <p:cNvPr id="5" name="Slide Number Placeholder 4">
+            <a:extLst>
+              <a:ext uri="{FF2B5EF4-FFF2-40B4-BE49-F238E27FC236}">
+                <a16:creationId xmlns:a16="http://schemas.microsoft.com/office/drawing/2014/main" id="{5482DB0D-94F5-49EC-EC7E-FF3574D6EE60}"/>
+              </a:ext>
+            </a:extLst>
+          </p:cNvPr>
+          <p:cNvSpPr>
+            <a:spLocks noGrp="1"/>
+          </p:cNvSpPr>
+          <p:nvPr>
+            <p:ph type="sldNum" idx="12"/>
+          </p:nvPr>
+        </p:nvSpPr>
+        <p:spPr/>
+        <p:txBody>
+          <a:bodyPr/>
+          <a:lstStyle/>
+          <a:p>
+            <a:fld id="{64E5BE4B-2FBF-4174-9E62-85FAD1CB43A6}" type="slidenum">
+              <a:rPr lang="en-US" smtClean="0"/>
+              <a:pPr/>
+              <a:t>20</a:t>
+            </a:fld>
+            <a:endParaRPr lang="en-US"/>
+          </a:p>
+        </p:txBody>
+      </p:sp>
+    </p:spTree>
+    <p:extLst>
+      <p:ext uri="{BB962C8B-B14F-4D97-AF65-F5344CB8AC3E}">
+        <p14:creationId xmlns:p14="http://schemas.microsoft.com/office/powerpoint/2010/main" val="3952093329"/>
       </p:ext>
     </p:extLst>
   </p:cSld>
@@ -23376,53 +27455,18 @@
       </p:grpSpPr>
       <p:sp>
         <p:nvSpPr>
-          <p:cNvPr id="7" name="Subtitle 6">
-            <a:extLst>
-              <a:ext uri="{FF2B5EF4-FFF2-40B4-BE49-F238E27FC236}">
-                <a16:creationId xmlns:a16="http://schemas.microsoft.com/office/drawing/2014/main" id="{BB461378-5E4E-EAA7-2DA6-FF06B0491E78}"/>
-              </a:ext>
-            </a:extLst>
-          </p:cNvPr>
-          <p:cNvSpPr>
-            <a:spLocks noGrp="1"/>
-          </p:cNvSpPr>
-          <p:nvPr>
-            <p:ph type="subTitle" idx="1"/>
-          </p:nvPr>
-        </p:nvSpPr>
-        <p:spPr>
-          <a:xfrm>
-            <a:off x="1143000" y="2010153"/>
-            <a:ext cx="6858000" cy="1241822"/>
-          </a:xfrm>
-        </p:spPr>
-        <p:txBody>
-          <a:bodyPr>
-            <a:normAutofit/>
-          </a:bodyPr>
-          <a:lstStyle/>
-          <a:p>
-            <a:r>
-              <a:rPr lang="en-US" sz="4000" dirty="0"/>
-              <a:t>Questions</a:t>
-            </a:r>
-          </a:p>
-        </p:txBody>
-      </p:sp>
-      <p:sp>
-        <p:nvSpPr>
-          <p:cNvPr id="4" name="Date Placeholder 3">
-            <a:extLst>
-              <a:ext uri="{FF2B5EF4-FFF2-40B4-BE49-F238E27FC236}">
-                <a16:creationId xmlns:a16="http://schemas.microsoft.com/office/drawing/2014/main" id="{C7EF127C-DDD5-C7BF-D5E8-90D39B1EDE6E}"/>
-              </a:ext>
-            </a:extLst>
-          </p:cNvPr>
-          <p:cNvSpPr>
-            <a:spLocks noGrp="1"/>
-          </p:cNvSpPr>
-          <p:nvPr>
-            <p:ph type="dt" idx="10"/>
+          <p:cNvPr id="2" name="Title 1">
+            <a:extLst>
+              <a:ext uri="{FF2B5EF4-FFF2-40B4-BE49-F238E27FC236}">
+                <a16:creationId xmlns:a16="http://schemas.microsoft.com/office/drawing/2014/main" id="{9127F92D-E4C3-FA11-7EC2-01846332C356}"/>
+              </a:ext>
+            </a:extLst>
+          </p:cNvPr>
+          <p:cNvSpPr>
+            <a:spLocks noGrp="1"/>
+          </p:cNvSpPr>
+          <p:nvPr>
+            <p:ph type="title"/>
           </p:nvPr>
         </p:nvSpPr>
         <p:spPr/>
@@ -23430,9 +27474,65 @@
           <a:bodyPr/>
           <a:lstStyle/>
           <a:p>
+            <a:r>
+              <a:rPr lang="en-US" dirty="0"/>
+              <a:t>Why Test?</a:t>
+            </a:r>
+          </a:p>
+        </p:txBody>
+      </p:sp>
+      <p:sp>
+        <p:nvSpPr>
+          <p:cNvPr id="3" name="Content Placeholder 2">
+            <a:extLst>
+              <a:ext uri="{FF2B5EF4-FFF2-40B4-BE49-F238E27FC236}">
+                <a16:creationId xmlns:a16="http://schemas.microsoft.com/office/drawing/2014/main" id="{041EB188-7270-1524-3E8B-318661C1BAD5}"/>
+              </a:ext>
+            </a:extLst>
+          </p:cNvPr>
+          <p:cNvSpPr>
+            <a:spLocks noGrp="1"/>
+          </p:cNvSpPr>
+          <p:nvPr>
+            <p:ph idx="1"/>
+          </p:nvPr>
+        </p:nvSpPr>
+        <p:spPr/>
+        <p:txBody>
+          <a:bodyPr/>
+          <a:lstStyle/>
+          <a:p>
+            <a:r>
+              <a:rPr lang="en-US" sz="2000" dirty="0"/>
+              <a:t>Why is testing important?</a:t>
+            </a:r>
+          </a:p>
+        </p:txBody>
+      </p:sp>
+      <p:sp>
+        <p:nvSpPr>
+          <p:cNvPr id="4" name="Date Placeholder 3">
+            <a:extLst>
+              <a:ext uri="{FF2B5EF4-FFF2-40B4-BE49-F238E27FC236}">
+                <a16:creationId xmlns:a16="http://schemas.microsoft.com/office/drawing/2014/main" id="{849DE6ED-64A6-5458-DB9D-0F6C8FF5FA75}"/>
+              </a:ext>
+            </a:extLst>
+          </p:cNvPr>
+          <p:cNvSpPr>
+            <a:spLocks noGrp="1"/>
+          </p:cNvSpPr>
+          <p:nvPr>
+            <p:ph type="dt" sz="half" idx="10"/>
+          </p:nvPr>
+        </p:nvSpPr>
+        <p:spPr/>
+        <p:txBody>
+          <a:bodyPr/>
+          <a:lstStyle/>
+          <a:p>
             <a:fld id="{AD622D1A-DF83-41A8-85FF-04D90BF831D3}" type="datetime3">
               <a:rPr lang="en-US" smtClean="0"/>
-              <a:t>10 June 2026</a:t>
+              <a:t>15 June 2026</a:t>
             </a:fld>
             <a:endParaRPr lang="en-US"/>
           </a:p>
@@ -23443,15 +27543,15 @@
           <p:cNvPr id="5" name="Slide Number Placeholder 4">
             <a:extLst>
               <a:ext uri="{FF2B5EF4-FFF2-40B4-BE49-F238E27FC236}">
-                <a16:creationId xmlns:a16="http://schemas.microsoft.com/office/drawing/2014/main" id="{5482DB0D-94F5-49EC-EC7E-FF3574D6EE60}"/>
-              </a:ext>
-            </a:extLst>
-          </p:cNvPr>
-          <p:cNvSpPr>
-            <a:spLocks noGrp="1"/>
-          </p:cNvSpPr>
-          <p:nvPr>
-            <p:ph type="sldNum" idx="12"/>
+                <a16:creationId xmlns:a16="http://schemas.microsoft.com/office/drawing/2014/main" id="{BCA1EC50-0401-63AD-7ED6-A349F8DC8BCB}"/>
+              </a:ext>
+            </a:extLst>
+          </p:cNvPr>
+          <p:cNvSpPr>
+            <a:spLocks noGrp="1"/>
+          </p:cNvSpPr>
+          <p:nvPr>
+            <p:ph type="sldNum" sz="quarter" idx="11"/>
           </p:nvPr>
         </p:nvSpPr>
         <p:spPr/>
@@ -23471,7 +27571,1362 @@
     </p:spTree>
     <p:extLst>
       <p:ext uri="{BB962C8B-B14F-4D97-AF65-F5344CB8AC3E}">
-        <p14:creationId xmlns:p14="http://schemas.microsoft.com/office/powerpoint/2010/main" val="3952093329"/>
+        <p14:creationId xmlns:p14="http://schemas.microsoft.com/office/powerpoint/2010/main" val="1046469132"/>
+      </p:ext>
+    </p:extLst>
+  </p:cSld>
+  <p:clrMapOvr>
+    <a:masterClrMapping/>
+  </p:clrMapOvr>
+</p:sld>
+</file>
+
+<file path=ppt/slides/slide4.xml><?xml version="1.0" encoding="utf-8"?>
+<p:sld xmlns:a="http://schemas.openxmlformats.org/drawingml/2006/main" xmlns:r="http://schemas.openxmlformats.org/officeDocument/2006/relationships" xmlns:p="http://schemas.openxmlformats.org/presentationml/2006/main">
+  <p:cSld>
+    <p:spTree>
+      <p:nvGrpSpPr>
+        <p:cNvPr id="1" name=""/>
+        <p:cNvGrpSpPr/>
+        <p:nvPr/>
+      </p:nvGrpSpPr>
+      <p:grpSpPr>
+        <a:xfrm>
+          <a:off x="0" y="0"/>
+          <a:ext cx="0" cy="0"/>
+          <a:chOff x="0" y="0"/>
+          <a:chExt cx="0" cy="0"/>
+        </a:xfrm>
+      </p:grpSpPr>
+      <p:sp>
+        <p:nvSpPr>
+          <p:cNvPr id="2" name="Title 1">
+            <a:extLst>
+              <a:ext uri="{FF2B5EF4-FFF2-40B4-BE49-F238E27FC236}">
+                <a16:creationId xmlns:a16="http://schemas.microsoft.com/office/drawing/2014/main" id="{2FF8F05B-CD75-98E1-A2FA-575C547E914E}"/>
+              </a:ext>
+            </a:extLst>
+          </p:cNvPr>
+          <p:cNvSpPr>
+            <a:spLocks noGrp="1"/>
+          </p:cNvSpPr>
+          <p:nvPr>
+            <p:ph type="title"/>
+          </p:nvPr>
+        </p:nvSpPr>
+        <p:spPr/>
+        <p:txBody>
+          <a:bodyPr/>
+          <a:lstStyle/>
+          <a:p>
+            <a:r>
+              <a:rPr lang="en-US" dirty="0"/>
+              <a:t>Test Driven Development</a:t>
+            </a:r>
+          </a:p>
+        </p:txBody>
+      </p:sp>
+      <p:sp>
+        <p:nvSpPr>
+          <p:cNvPr id="3" name="Content Placeholder 2">
+            <a:extLst>
+              <a:ext uri="{FF2B5EF4-FFF2-40B4-BE49-F238E27FC236}">
+                <a16:creationId xmlns:a16="http://schemas.microsoft.com/office/drawing/2014/main" id="{18911CD7-A0B0-4C95-2BF1-0C5D7C991F39}"/>
+              </a:ext>
+            </a:extLst>
+          </p:cNvPr>
+          <p:cNvSpPr>
+            <a:spLocks noGrp="1"/>
+          </p:cNvSpPr>
+          <p:nvPr>
+            <p:ph idx="1"/>
+          </p:nvPr>
+        </p:nvSpPr>
+        <p:spPr/>
+        <p:txBody>
+          <a:bodyPr/>
+          <a:lstStyle/>
+          <a:p>
+            <a:r>
+              <a:rPr lang="en-US" sz="2000" dirty="0"/>
+              <a:t>Different mindset of software development</a:t>
+            </a:r>
+          </a:p>
+          <a:p>
+            <a:r>
+              <a:rPr lang="en-US" sz="2000" dirty="0"/>
+              <a:t>Requirements </a:t>
+            </a:r>
+            <a:r>
+              <a:rPr lang="en-US" sz="2000" dirty="0">
+                <a:sym typeface="Wingdings" panose="05000000000000000000" pitchFamily="2" charset="2"/>
+              </a:rPr>
+              <a:t> tests  code</a:t>
+            </a:r>
+          </a:p>
+          <a:p>
+            <a:endParaRPr lang="en-US" sz="2000" dirty="0"/>
+          </a:p>
+          <a:p>
+            <a:r>
+              <a:rPr lang="en-US" sz="2000" dirty="0"/>
+              <a:t>Typically done in red-green-refactor phases</a:t>
+            </a:r>
+          </a:p>
+          <a:p>
+            <a:pPr lvl="1"/>
+            <a:r>
+              <a:rPr lang="en-US" sz="2000" dirty="0"/>
+              <a:t>Write a failing test</a:t>
+            </a:r>
+          </a:p>
+          <a:p>
+            <a:pPr lvl="1"/>
+            <a:r>
+              <a:rPr lang="en-US" sz="2000" dirty="0"/>
+              <a:t>Write code until the test passes</a:t>
+            </a:r>
+          </a:p>
+          <a:p>
+            <a:pPr lvl="1"/>
+            <a:r>
+              <a:rPr lang="en-US" sz="2000" dirty="0"/>
+              <a:t>Refactor the code to cleanup</a:t>
+            </a:r>
+          </a:p>
+        </p:txBody>
+      </p:sp>
+      <p:sp>
+        <p:nvSpPr>
+          <p:cNvPr id="4" name="Date Placeholder 3">
+            <a:extLst>
+              <a:ext uri="{FF2B5EF4-FFF2-40B4-BE49-F238E27FC236}">
+                <a16:creationId xmlns:a16="http://schemas.microsoft.com/office/drawing/2014/main" id="{945FCA61-666D-3AD7-C994-D81AABA40A89}"/>
+              </a:ext>
+            </a:extLst>
+          </p:cNvPr>
+          <p:cNvSpPr>
+            <a:spLocks noGrp="1"/>
+          </p:cNvSpPr>
+          <p:nvPr>
+            <p:ph type="dt" sz="half" idx="10"/>
+          </p:nvPr>
+        </p:nvSpPr>
+        <p:spPr/>
+        <p:txBody>
+          <a:bodyPr/>
+          <a:lstStyle/>
+          <a:p>
+            <a:fld id="{AD622D1A-DF83-41A8-85FF-04D90BF831D3}" type="datetime3">
+              <a:rPr lang="en-US" smtClean="0"/>
+              <a:t>15 June 2026</a:t>
+            </a:fld>
+            <a:endParaRPr lang="en-US"/>
+          </a:p>
+        </p:txBody>
+      </p:sp>
+      <p:sp>
+        <p:nvSpPr>
+          <p:cNvPr id="5" name="Slide Number Placeholder 4">
+            <a:extLst>
+              <a:ext uri="{FF2B5EF4-FFF2-40B4-BE49-F238E27FC236}">
+                <a16:creationId xmlns:a16="http://schemas.microsoft.com/office/drawing/2014/main" id="{1357AC2A-742E-2C9D-35B8-27BA587AD9E7}"/>
+              </a:ext>
+            </a:extLst>
+          </p:cNvPr>
+          <p:cNvSpPr>
+            <a:spLocks noGrp="1"/>
+          </p:cNvSpPr>
+          <p:nvPr>
+            <p:ph type="sldNum" sz="quarter" idx="11"/>
+          </p:nvPr>
+        </p:nvSpPr>
+        <p:spPr/>
+        <p:txBody>
+          <a:bodyPr/>
+          <a:lstStyle/>
+          <a:p>
+            <a:fld id="{64E5BE4B-2FBF-4174-9E62-85FAD1CB43A6}" type="slidenum">
+              <a:rPr lang="en-US" smtClean="0"/>
+              <a:pPr/>
+              <a:t>4</a:t>
+            </a:fld>
+            <a:endParaRPr lang="en-US"/>
+          </a:p>
+        </p:txBody>
+      </p:sp>
+      <p:pic>
+        <p:nvPicPr>
+          <p:cNvPr id="1026" name="Picture 2" descr="SAP ABAP Central: Embracing ABAP TDD as a standard development practice">
+            <a:extLst>
+              <a:ext uri="{FF2B5EF4-FFF2-40B4-BE49-F238E27FC236}">
+                <a16:creationId xmlns:a16="http://schemas.microsoft.com/office/drawing/2014/main" id="{2CACE41C-B794-80D5-6A13-59ECBB555E78}"/>
+              </a:ext>
+            </a:extLst>
+          </p:cNvPr>
+          <p:cNvPicPr>
+            <a:picLocks noChangeAspect="1" noChangeArrowheads="1"/>
+          </p:cNvPicPr>
+          <p:nvPr/>
+        </p:nvPicPr>
+        <p:blipFill>
+          <a:blip r:embed="rId2">
+            <a:extLst>
+              <a:ext uri="{28A0092B-C50C-407E-A947-70E740481C1C}">
+                <a14:useLocalDpi xmlns:a14="http://schemas.microsoft.com/office/drawing/2010/main" val="0"/>
+              </a:ext>
+            </a:extLst>
+          </a:blip>
+          <a:srcRect/>
+          <a:stretch>
+            <a:fillRect/>
+          </a:stretch>
+        </p:blipFill>
+        <p:spPr bwMode="auto">
+          <a:xfrm>
+            <a:off x="5570237" y="1106724"/>
+            <a:ext cx="3575033" cy="3190874"/>
+          </a:xfrm>
+          <a:prstGeom prst="rect">
+            <a:avLst/>
+          </a:prstGeom>
+          <a:noFill/>
+          <a:extLst>
+            <a:ext uri="{909E8E84-426E-40DD-AFC4-6F175D3DCCD1}">
+              <a14:hiddenFill xmlns:a14="http://schemas.microsoft.com/office/drawing/2010/main">
+                <a:solidFill>
+                  <a:srgbClr val="FFFFFF"/>
+                </a:solidFill>
+              </a14:hiddenFill>
+            </a:ext>
+          </a:extLst>
+        </p:spPr>
+      </p:pic>
+    </p:spTree>
+    <p:extLst>
+      <p:ext uri="{BB962C8B-B14F-4D97-AF65-F5344CB8AC3E}">
+        <p14:creationId xmlns:p14="http://schemas.microsoft.com/office/powerpoint/2010/main" val="1033125103"/>
+      </p:ext>
+    </p:extLst>
+  </p:cSld>
+  <p:clrMapOvr>
+    <a:masterClrMapping/>
+  </p:clrMapOvr>
+</p:sld>
+</file>
+
+<file path=ppt/slides/slide5.xml><?xml version="1.0" encoding="utf-8"?>
+<p:sld xmlns:a="http://schemas.openxmlformats.org/drawingml/2006/main" xmlns:r="http://schemas.openxmlformats.org/officeDocument/2006/relationships" xmlns:p="http://schemas.openxmlformats.org/presentationml/2006/main">
+  <p:cSld>
+    <p:spTree>
+      <p:nvGrpSpPr>
+        <p:cNvPr id="1" name=""/>
+        <p:cNvGrpSpPr/>
+        <p:nvPr/>
+      </p:nvGrpSpPr>
+      <p:grpSpPr>
+        <a:xfrm>
+          <a:off x="0" y="0"/>
+          <a:ext cx="0" cy="0"/>
+          <a:chOff x="0" y="0"/>
+          <a:chExt cx="0" cy="0"/>
+        </a:xfrm>
+      </p:grpSpPr>
+      <p:sp>
+        <p:nvSpPr>
+          <p:cNvPr id="13" name="Title 12">
+            <a:extLst>
+              <a:ext uri="{FF2B5EF4-FFF2-40B4-BE49-F238E27FC236}">
+                <a16:creationId xmlns:a16="http://schemas.microsoft.com/office/drawing/2014/main" id="{B33D3B0C-739C-850B-E8B0-88D0AE797BBB}"/>
+              </a:ext>
+            </a:extLst>
+          </p:cNvPr>
+          <p:cNvSpPr>
+            <a:spLocks noGrp="1"/>
+          </p:cNvSpPr>
+          <p:nvPr>
+            <p:ph type="title"/>
+          </p:nvPr>
+        </p:nvSpPr>
+        <p:spPr/>
+        <p:txBody>
+          <a:bodyPr/>
+          <a:lstStyle/>
+          <a:p>
+            <a:r>
+              <a:rPr lang="en-US" dirty="0"/>
+              <a:t>Testing Types</a:t>
+            </a:r>
+          </a:p>
+        </p:txBody>
+      </p:sp>
+      <p:sp>
+        <p:nvSpPr>
+          <p:cNvPr id="3" name="Content Placeholder 2">
+            <a:extLst>
+              <a:ext uri="{FF2B5EF4-FFF2-40B4-BE49-F238E27FC236}">
+                <a16:creationId xmlns:a16="http://schemas.microsoft.com/office/drawing/2014/main" id="{F97FAC32-266B-12C8-C1B8-88A1DCC5C7DA}"/>
+              </a:ext>
+            </a:extLst>
+          </p:cNvPr>
+          <p:cNvSpPr>
+            <a:spLocks noGrp="1"/>
+          </p:cNvSpPr>
+          <p:nvPr>
+            <p:ph sz="half" idx="1"/>
+          </p:nvPr>
+        </p:nvSpPr>
+        <p:spPr>
+          <a:xfrm>
+            <a:off x="411479" y="1200150"/>
+            <a:ext cx="4023360" cy="3429000"/>
+          </a:xfrm>
+        </p:spPr>
+        <p:txBody>
+          <a:bodyPr/>
+          <a:lstStyle/>
+          <a:p>
+            <a:r>
+              <a:rPr lang="en-US" sz="2000" dirty="0"/>
+              <a:t>Functional</a:t>
+            </a:r>
+          </a:p>
+          <a:p>
+            <a:pPr lvl="1"/>
+            <a:r>
+              <a:rPr lang="en-US" sz="2000" dirty="0"/>
+              <a:t>Unit tests</a:t>
+            </a:r>
+          </a:p>
+          <a:p>
+            <a:pPr lvl="1"/>
+            <a:r>
+              <a:rPr lang="en-US" sz="2000" dirty="0"/>
+              <a:t>Integration tests</a:t>
+            </a:r>
+          </a:p>
+          <a:p>
+            <a:pPr lvl="1"/>
+            <a:r>
+              <a:rPr lang="en-US" sz="2000" dirty="0"/>
+              <a:t>End-to-end tests</a:t>
+            </a:r>
+          </a:p>
+          <a:p>
+            <a:pPr lvl="1"/>
+            <a:r>
+              <a:rPr lang="en-US" sz="2000" dirty="0"/>
+              <a:t>Acceptance</a:t>
+            </a:r>
+          </a:p>
+          <a:p>
+            <a:endParaRPr lang="en-US" sz="2000" dirty="0"/>
+          </a:p>
+        </p:txBody>
+      </p:sp>
+      <p:sp>
+        <p:nvSpPr>
+          <p:cNvPr id="8" name="Content Placeholder 7">
+            <a:extLst>
+              <a:ext uri="{FF2B5EF4-FFF2-40B4-BE49-F238E27FC236}">
+                <a16:creationId xmlns:a16="http://schemas.microsoft.com/office/drawing/2014/main" id="{FC78E69E-B881-745F-F366-5FDC88F33EB6}"/>
+              </a:ext>
+            </a:extLst>
+          </p:cNvPr>
+          <p:cNvSpPr>
+            <a:spLocks noGrp="1"/>
+          </p:cNvSpPr>
+          <p:nvPr>
+            <p:ph sz="half" idx="2"/>
+          </p:nvPr>
+        </p:nvSpPr>
+        <p:spPr>
+          <a:xfrm>
+            <a:off x="4709159" y="1200150"/>
+            <a:ext cx="4023360" cy="3429000"/>
+          </a:xfrm>
+        </p:spPr>
+        <p:txBody>
+          <a:bodyPr/>
+          <a:lstStyle/>
+          <a:p>
+            <a:r>
+              <a:rPr lang="en-US" sz="2000" dirty="0"/>
+              <a:t>Non-functional</a:t>
+            </a:r>
+          </a:p>
+          <a:p>
+            <a:pPr lvl="1"/>
+            <a:r>
+              <a:rPr lang="en-US" sz="2000" dirty="0"/>
+              <a:t>Security</a:t>
+            </a:r>
+          </a:p>
+          <a:p>
+            <a:pPr lvl="1"/>
+            <a:r>
+              <a:rPr lang="en-US" sz="2000" dirty="0"/>
+              <a:t>Performance</a:t>
+            </a:r>
+          </a:p>
+          <a:p>
+            <a:pPr lvl="1"/>
+            <a:r>
+              <a:rPr lang="en-US" sz="2000" dirty="0"/>
+              <a:t>Usability</a:t>
+            </a:r>
+          </a:p>
+          <a:p>
+            <a:pPr lvl="1"/>
+            <a:r>
+              <a:rPr lang="en-US" sz="2000" dirty="0"/>
+              <a:t>Compatibility</a:t>
+            </a:r>
+          </a:p>
+        </p:txBody>
+      </p:sp>
+      <p:sp>
+        <p:nvSpPr>
+          <p:cNvPr id="4" name="Date Placeholder 3">
+            <a:extLst>
+              <a:ext uri="{FF2B5EF4-FFF2-40B4-BE49-F238E27FC236}">
+                <a16:creationId xmlns:a16="http://schemas.microsoft.com/office/drawing/2014/main" id="{AED8F94D-9A8F-273C-9ED2-DF7F0C2DC6AC}"/>
+              </a:ext>
+            </a:extLst>
+          </p:cNvPr>
+          <p:cNvSpPr>
+            <a:spLocks noGrp="1"/>
+          </p:cNvSpPr>
+          <p:nvPr>
+            <p:ph type="dt" sz="half" idx="10"/>
+          </p:nvPr>
+        </p:nvSpPr>
+        <p:spPr>
+          <a:xfrm>
+            <a:off x="410766" y="4972050"/>
+            <a:ext cx="617934" cy="171450"/>
+          </a:xfrm>
+        </p:spPr>
+        <p:txBody>
+          <a:bodyPr/>
+          <a:lstStyle/>
+          <a:p>
+            <a:fld id="{AD622D1A-DF83-41A8-85FF-04D90BF831D3}" type="datetime3">
+              <a:rPr lang="en-US" smtClean="0"/>
+              <a:pPr/>
+              <a:t>15 June 2026</a:t>
+            </a:fld>
+            <a:endParaRPr lang="en-US"/>
+          </a:p>
+        </p:txBody>
+      </p:sp>
+      <p:sp>
+        <p:nvSpPr>
+          <p:cNvPr id="5" name="Slide Number Placeholder 4">
+            <a:extLst>
+              <a:ext uri="{FF2B5EF4-FFF2-40B4-BE49-F238E27FC236}">
+                <a16:creationId xmlns:a16="http://schemas.microsoft.com/office/drawing/2014/main" id="{C85F0DA4-BCF7-EF1E-9AA7-BAE9CA7D8D9D}"/>
+              </a:ext>
+            </a:extLst>
+          </p:cNvPr>
+          <p:cNvSpPr>
+            <a:spLocks noGrp="1"/>
+          </p:cNvSpPr>
+          <p:nvPr>
+            <p:ph type="sldNum" sz="quarter" idx="11"/>
+          </p:nvPr>
+        </p:nvSpPr>
+        <p:spPr>
+          <a:xfrm>
+            <a:off x="8408037" y="4972050"/>
+            <a:ext cx="331501" cy="171450"/>
+          </a:xfrm>
+        </p:spPr>
+        <p:txBody>
+          <a:bodyPr/>
+          <a:lstStyle/>
+          <a:p>
+            <a:fld id="{64E5BE4B-2FBF-4174-9E62-85FAD1CB43A6}" type="slidenum">
+              <a:rPr lang="en-US" smtClean="0"/>
+              <a:pPr/>
+              <a:t>5</a:t>
+            </a:fld>
+            <a:endParaRPr lang="en-US"/>
+          </a:p>
+        </p:txBody>
+      </p:sp>
+      <p:sp>
+        <p:nvSpPr>
+          <p:cNvPr id="14" name="Rectangle 13">
+            <a:extLst>
+              <a:ext uri="{FF2B5EF4-FFF2-40B4-BE49-F238E27FC236}">
+                <a16:creationId xmlns:a16="http://schemas.microsoft.com/office/drawing/2014/main" id="{75124742-28FC-35BF-F5BC-7DFC4FDD4445}"/>
+              </a:ext>
+            </a:extLst>
+          </p:cNvPr>
+          <p:cNvSpPr/>
+          <p:nvPr/>
+        </p:nvSpPr>
+        <p:spPr>
+          <a:xfrm>
+            <a:off x="323193" y="1478943"/>
+            <a:ext cx="2727435" cy="759760"/>
+          </a:xfrm>
+          <a:prstGeom prst="rect">
+            <a:avLst/>
+          </a:prstGeom>
+          <a:noFill/>
+          <a:ln w="38100">
+            <a:solidFill>
+              <a:srgbClr val="FF0000"/>
+            </a:solidFill>
+            <a:miter/>
+          </a:ln>
+        </p:spPr>
+        <p:style>
+          <a:lnRef idx="0">
+            <a:schemeClr val="accent1"/>
+          </a:lnRef>
+          <a:fillRef idx="1">
+            <a:schemeClr val="accent1"/>
+          </a:fillRef>
+          <a:effectRef idx="0">
+            <a:srgbClr val="000000"/>
+          </a:effectRef>
+          <a:fontRef idx="minor">
+            <a:srgbClr val="FFFFFF"/>
+          </a:fontRef>
+        </p:style>
+        <p:txBody>
+          <a:bodyPr rtlCol="0" anchor="ctr"/>
+          <a:lstStyle/>
+          <a:p>
+            <a:pPr algn="ctr">
+              <a:lnSpc>
+                <a:spcPct val="95000"/>
+              </a:lnSpc>
+            </a:pPr>
+            <a:endParaRPr lang="en-US" sz="1700"/>
+          </a:p>
+        </p:txBody>
+      </p:sp>
+    </p:spTree>
+    <p:extLst>
+      <p:ext uri="{BB962C8B-B14F-4D97-AF65-F5344CB8AC3E}">
+        <p14:creationId xmlns:p14="http://schemas.microsoft.com/office/powerpoint/2010/main" val="3223158941"/>
+      </p:ext>
+    </p:extLst>
+  </p:cSld>
+  <p:clrMapOvr>
+    <a:masterClrMapping/>
+  </p:clrMapOvr>
+  <p:timing>
+    <p:tnLst>
+      <p:par>
+        <p:cTn id="1" dur="indefinite" restart="never" nodeType="tmRoot">
+          <p:childTnLst>
+            <p:seq concurrent="1" nextAc="seek">
+              <p:cTn id="2" dur="indefinite" nodeType="mainSeq">
+                <p:childTnLst>
+                  <p:par>
+                    <p:cTn id="3" fill="hold">
+                      <p:stCondLst>
+                        <p:cond delay="indefinite"/>
+                      </p:stCondLst>
+                      <p:childTnLst>
+                        <p:par>
+                          <p:cTn id="4" fill="hold">
+                            <p:stCondLst>
+                              <p:cond delay="0"/>
+                            </p:stCondLst>
+                            <p:childTnLst>
+                              <p:par>
+                                <p:cTn id="5" presetID="1" presetClass="entr" presetSubtype="0" fill="hold" grpId="0" nodeType="clickEffect">
+                                  <p:stCondLst>
+                                    <p:cond delay="0"/>
+                                  </p:stCondLst>
+                                  <p:childTnLst>
+                                    <p:set>
+                                      <p:cBhvr>
+                                        <p:cTn id="6" dur="1" fill="hold">
+                                          <p:stCondLst>
+                                            <p:cond delay="0"/>
+                                          </p:stCondLst>
+                                        </p:cTn>
+                                        <p:tgtEl>
+                                          <p:spTgt spid="14"/>
+                                        </p:tgtEl>
+                                        <p:attrNameLst>
+                                          <p:attrName>style.visibility</p:attrName>
+                                        </p:attrNameLst>
+                                      </p:cBhvr>
+                                      <p:to>
+                                        <p:strVal val="visible"/>
+                                      </p:to>
+                                    </p:set>
+                                  </p:childTnLst>
+                                </p:cTn>
+                              </p:par>
+                            </p:childTnLst>
+                          </p:cTn>
+                        </p:par>
+                      </p:childTnLst>
+                    </p:cTn>
+                  </p:par>
+                </p:childTnLst>
+              </p:cTn>
+              <p:prevCondLst>
+                <p:cond evt="onPrev" delay="0">
+                  <p:tgtEl>
+                    <p:sldTgt/>
+                  </p:tgtEl>
+                </p:cond>
+              </p:prevCondLst>
+              <p:nextCondLst>
+                <p:cond evt="onNext" delay="0">
+                  <p:tgtEl>
+                    <p:sldTgt/>
+                  </p:tgtEl>
+                </p:cond>
+              </p:nextCondLst>
+            </p:seq>
+          </p:childTnLst>
+        </p:cTn>
+      </p:par>
+    </p:tnLst>
+    <p:bldLst>
+      <p:bldP spid="14" grpId="0" animBg="1"/>
+    </p:bldLst>
+  </p:timing>
+</p:sld>
+</file>
+
+<file path=ppt/slides/slide6.xml><?xml version="1.0" encoding="utf-8"?>
+<p:sld xmlns:a="http://schemas.openxmlformats.org/drawingml/2006/main" xmlns:r="http://schemas.openxmlformats.org/officeDocument/2006/relationships" xmlns:p="http://schemas.openxmlformats.org/presentationml/2006/main">
+  <p:cSld>
+    <p:spTree>
+      <p:nvGrpSpPr>
+        <p:cNvPr id="1" name=""/>
+        <p:cNvGrpSpPr/>
+        <p:nvPr/>
+      </p:nvGrpSpPr>
+      <p:grpSpPr>
+        <a:xfrm>
+          <a:off x="0" y="0"/>
+          <a:ext cx="0" cy="0"/>
+          <a:chOff x="0" y="0"/>
+          <a:chExt cx="0" cy="0"/>
+        </a:xfrm>
+      </p:grpSpPr>
+      <p:sp>
+        <p:nvSpPr>
+          <p:cNvPr id="19" name="Title 18">
+            <a:extLst>
+              <a:ext uri="{FF2B5EF4-FFF2-40B4-BE49-F238E27FC236}">
+                <a16:creationId xmlns:a16="http://schemas.microsoft.com/office/drawing/2014/main" id="{3D95709F-23DC-CE6B-8806-0F735FC54F18}"/>
+              </a:ext>
+            </a:extLst>
+          </p:cNvPr>
+          <p:cNvSpPr>
+            <a:spLocks noGrp="1"/>
+          </p:cNvSpPr>
+          <p:nvPr>
+            <p:ph type="ctrTitle"/>
+          </p:nvPr>
+        </p:nvSpPr>
+        <p:spPr/>
+        <p:txBody>
+          <a:bodyPr/>
+          <a:lstStyle/>
+          <a:p>
+            <a:r>
+              <a:rPr lang="en-US" dirty="0"/>
+              <a:t>Unit Tests</a:t>
+            </a:r>
+          </a:p>
+        </p:txBody>
+      </p:sp>
+      <p:sp>
+        <p:nvSpPr>
+          <p:cNvPr id="20" name="Subtitle 19">
+            <a:extLst>
+              <a:ext uri="{FF2B5EF4-FFF2-40B4-BE49-F238E27FC236}">
+                <a16:creationId xmlns:a16="http://schemas.microsoft.com/office/drawing/2014/main" id="{F397191A-FBCA-40CC-963B-8A860C4B70B1}"/>
+              </a:ext>
+            </a:extLst>
+          </p:cNvPr>
+          <p:cNvSpPr>
+            <a:spLocks noGrp="1"/>
+          </p:cNvSpPr>
+          <p:nvPr>
+            <p:ph type="subTitle" idx="1"/>
+          </p:nvPr>
+        </p:nvSpPr>
+        <p:spPr/>
+        <p:txBody>
+          <a:bodyPr/>
+          <a:lstStyle/>
+          <a:p>
+            <a:endParaRPr lang="en-US"/>
+          </a:p>
+        </p:txBody>
+      </p:sp>
+      <p:sp>
+        <p:nvSpPr>
+          <p:cNvPr id="4" name="Date Placeholder 3">
+            <a:extLst>
+              <a:ext uri="{FF2B5EF4-FFF2-40B4-BE49-F238E27FC236}">
+                <a16:creationId xmlns:a16="http://schemas.microsoft.com/office/drawing/2014/main" id="{DEB8DB2F-43A0-D1EE-D9B5-CDDC2B97D831}"/>
+              </a:ext>
+            </a:extLst>
+          </p:cNvPr>
+          <p:cNvSpPr>
+            <a:spLocks noGrp="1"/>
+          </p:cNvSpPr>
+          <p:nvPr>
+            <p:ph type="dt" idx="10"/>
+          </p:nvPr>
+        </p:nvSpPr>
+        <p:spPr/>
+        <p:txBody>
+          <a:bodyPr/>
+          <a:lstStyle/>
+          <a:p>
+            <a:fld id="{AD622D1A-DF83-41A8-85FF-04D90BF831D3}" type="datetime3">
+              <a:rPr lang="en-US" smtClean="0"/>
+              <a:t>15 June 2026</a:t>
+            </a:fld>
+            <a:endParaRPr lang="en-US"/>
+          </a:p>
+        </p:txBody>
+      </p:sp>
+      <p:sp>
+        <p:nvSpPr>
+          <p:cNvPr id="5" name="Slide Number Placeholder 4">
+            <a:extLst>
+              <a:ext uri="{FF2B5EF4-FFF2-40B4-BE49-F238E27FC236}">
+                <a16:creationId xmlns:a16="http://schemas.microsoft.com/office/drawing/2014/main" id="{C5CDB3DA-67B5-771E-F568-EE6675ECE36E}"/>
+              </a:ext>
+            </a:extLst>
+          </p:cNvPr>
+          <p:cNvSpPr>
+            <a:spLocks noGrp="1"/>
+          </p:cNvSpPr>
+          <p:nvPr>
+            <p:ph type="sldNum" idx="12"/>
+          </p:nvPr>
+        </p:nvSpPr>
+        <p:spPr/>
+        <p:txBody>
+          <a:bodyPr/>
+          <a:lstStyle/>
+          <a:p>
+            <a:fld id="{64E5BE4B-2FBF-4174-9E62-85FAD1CB43A6}" type="slidenum">
+              <a:rPr lang="en-US" smtClean="0"/>
+              <a:pPr/>
+              <a:t>6</a:t>
+            </a:fld>
+            <a:endParaRPr lang="en-US"/>
+          </a:p>
+        </p:txBody>
+      </p:sp>
+    </p:spTree>
+    <p:extLst>
+      <p:ext uri="{BB962C8B-B14F-4D97-AF65-F5344CB8AC3E}">
+        <p14:creationId xmlns:p14="http://schemas.microsoft.com/office/powerpoint/2010/main" val="663285191"/>
+      </p:ext>
+    </p:extLst>
+  </p:cSld>
+  <p:clrMapOvr>
+    <a:masterClrMapping/>
+  </p:clrMapOvr>
+</p:sld>
+</file>
+
+<file path=ppt/slides/slide7.xml><?xml version="1.0" encoding="utf-8"?>
+<p:sld xmlns:a="http://schemas.openxmlformats.org/drawingml/2006/main" xmlns:r="http://schemas.openxmlformats.org/officeDocument/2006/relationships" xmlns:p="http://schemas.openxmlformats.org/presentationml/2006/main">
+  <p:cSld>
+    <p:spTree>
+      <p:nvGrpSpPr>
+        <p:cNvPr id="1" name=""/>
+        <p:cNvGrpSpPr/>
+        <p:nvPr/>
+      </p:nvGrpSpPr>
+      <p:grpSpPr>
+        <a:xfrm>
+          <a:off x="0" y="0"/>
+          <a:ext cx="0" cy="0"/>
+          <a:chOff x="0" y="0"/>
+          <a:chExt cx="0" cy="0"/>
+        </a:xfrm>
+      </p:grpSpPr>
+      <p:sp>
+        <p:nvSpPr>
+          <p:cNvPr id="2" name="Title 1">
+            <a:extLst>
+              <a:ext uri="{FF2B5EF4-FFF2-40B4-BE49-F238E27FC236}">
+                <a16:creationId xmlns:a16="http://schemas.microsoft.com/office/drawing/2014/main" id="{D75DA5C1-36C5-E915-CBC5-7D7CD1A719EA}"/>
+              </a:ext>
+            </a:extLst>
+          </p:cNvPr>
+          <p:cNvSpPr>
+            <a:spLocks noGrp="1"/>
+          </p:cNvSpPr>
+          <p:nvPr>
+            <p:ph type="title"/>
+          </p:nvPr>
+        </p:nvSpPr>
+        <p:spPr/>
+        <p:txBody>
+          <a:bodyPr/>
+          <a:lstStyle/>
+          <a:p>
+            <a:r>
+              <a:rPr lang="en-US" dirty="0"/>
+              <a:t>Unit Testing</a:t>
+            </a:r>
+          </a:p>
+        </p:txBody>
+      </p:sp>
+      <p:sp>
+        <p:nvSpPr>
+          <p:cNvPr id="3" name="Content Placeholder 2">
+            <a:extLst>
+              <a:ext uri="{FF2B5EF4-FFF2-40B4-BE49-F238E27FC236}">
+                <a16:creationId xmlns:a16="http://schemas.microsoft.com/office/drawing/2014/main" id="{3707C36C-120B-87F4-5D71-A794B5232BA2}"/>
+              </a:ext>
+            </a:extLst>
+          </p:cNvPr>
+          <p:cNvSpPr>
+            <a:spLocks noGrp="1"/>
+          </p:cNvSpPr>
+          <p:nvPr>
+            <p:ph idx="1"/>
+          </p:nvPr>
+        </p:nvSpPr>
+        <p:spPr/>
+        <p:txBody>
+          <a:bodyPr/>
+          <a:lstStyle/>
+          <a:p>
+            <a:r>
+              <a:rPr lang="en-US" dirty="0"/>
+              <a:t>Is your house stable if the lumber is rotted?</a:t>
+            </a:r>
+          </a:p>
+          <a:p>
+            <a:endParaRPr lang="en-US" dirty="0"/>
+          </a:p>
+          <a:p>
+            <a:r>
+              <a:rPr lang="en-US" dirty="0"/>
+              <a:t>Smallest piece of testable code : unit</a:t>
+            </a:r>
+          </a:p>
+          <a:p>
+            <a:endParaRPr lang="en-US" dirty="0"/>
+          </a:p>
+          <a:p>
+            <a:r>
+              <a:rPr lang="en-US" dirty="0"/>
+              <a:t>Benefits</a:t>
+            </a:r>
+          </a:p>
+          <a:p>
+            <a:pPr lvl="1"/>
+            <a:r>
+              <a:rPr lang="en-US" dirty="0"/>
+              <a:t>Helps ensure correctness</a:t>
+            </a:r>
+          </a:p>
+          <a:p>
+            <a:pPr lvl="1"/>
+            <a:r>
+              <a:rPr lang="en-US" dirty="0"/>
+              <a:t>Catch problems early</a:t>
+            </a:r>
+          </a:p>
+          <a:p>
+            <a:pPr lvl="1"/>
+            <a:r>
+              <a:rPr lang="en-US" dirty="0"/>
+              <a:t>Fast</a:t>
+            </a:r>
+          </a:p>
+        </p:txBody>
+      </p:sp>
+      <p:sp>
+        <p:nvSpPr>
+          <p:cNvPr id="4" name="Date Placeholder 3">
+            <a:extLst>
+              <a:ext uri="{FF2B5EF4-FFF2-40B4-BE49-F238E27FC236}">
+                <a16:creationId xmlns:a16="http://schemas.microsoft.com/office/drawing/2014/main" id="{B35BF75E-9FB6-943E-41DF-666C5C5917B7}"/>
+              </a:ext>
+            </a:extLst>
+          </p:cNvPr>
+          <p:cNvSpPr>
+            <a:spLocks noGrp="1"/>
+          </p:cNvSpPr>
+          <p:nvPr>
+            <p:ph type="dt" sz="half" idx="10"/>
+          </p:nvPr>
+        </p:nvSpPr>
+        <p:spPr/>
+        <p:txBody>
+          <a:bodyPr/>
+          <a:lstStyle/>
+          <a:p>
+            <a:fld id="{AD622D1A-DF83-41A8-85FF-04D90BF831D3}" type="datetime3">
+              <a:rPr lang="en-US" smtClean="0"/>
+              <a:t>15 June 2026</a:t>
+            </a:fld>
+            <a:endParaRPr lang="en-US"/>
+          </a:p>
+        </p:txBody>
+      </p:sp>
+      <p:sp>
+        <p:nvSpPr>
+          <p:cNvPr id="5" name="Slide Number Placeholder 4">
+            <a:extLst>
+              <a:ext uri="{FF2B5EF4-FFF2-40B4-BE49-F238E27FC236}">
+                <a16:creationId xmlns:a16="http://schemas.microsoft.com/office/drawing/2014/main" id="{4291C542-534E-2D44-400B-38F340C7F692}"/>
+              </a:ext>
+            </a:extLst>
+          </p:cNvPr>
+          <p:cNvSpPr>
+            <a:spLocks noGrp="1"/>
+          </p:cNvSpPr>
+          <p:nvPr>
+            <p:ph type="sldNum" sz="quarter" idx="11"/>
+          </p:nvPr>
+        </p:nvSpPr>
+        <p:spPr/>
+        <p:txBody>
+          <a:bodyPr/>
+          <a:lstStyle/>
+          <a:p>
+            <a:fld id="{64E5BE4B-2FBF-4174-9E62-85FAD1CB43A6}" type="slidenum">
+              <a:rPr lang="en-US" smtClean="0"/>
+              <a:pPr/>
+              <a:t>7</a:t>
+            </a:fld>
+            <a:endParaRPr lang="en-US"/>
+          </a:p>
+        </p:txBody>
+      </p:sp>
+      <p:pic>
+        <p:nvPicPr>
+          <p:cNvPr id="2050" name="Picture 2" descr="How Long Does It Take For Wood To Rot From Water? | Mr. Happy House">
+            <a:extLst>
+              <a:ext uri="{FF2B5EF4-FFF2-40B4-BE49-F238E27FC236}">
+                <a16:creationId xmlns:a16="http://schemas.microsoft.com/office/drawing/2014/main" id="{7466663E-251C-47AF-5AFF-DEF9015F6516}"/>
+              </a:ext>
+            </a:extLst>
+          </p:cNvPr>
+          <p:cNvPicPr>
+            <a:picLocks noChangeAspect="1" noChangeArrowheads="1"/>
+          </p:cNvPicPr>
+          <p:nvPr/>
+        </p:nvPicPr>
+        <p:blipFill rotWithShape="1">
+          <a:blip r:embed="rId2">
+            <a:extLst>
+              <a:ext uri="{28A0092B-C50C-407E-A947-70E740481C1C}">
+                <a14:useLocalDpi xmlns:a14="http://schemas.microsoft.com/office/drawing/2010/main" val="0"/>
+              </a:ext>
+            </a:extLst>
+          </a:blip>
+          <a:srcRect l="28996" r="8171"/>
+          <a:stretch>
+            <a:fillRect/>
+          </a:stretch>
+        </p:blipFill>
+        <p:spPr bwMode="auto">
+          <a:xfrm>
+            <a:off x="5066250" y="994411"/>
+            <a:ext cx="3777832" cy="3491121"/>
+          </a:xfrm>
+          <a:prstGeom prst="rect">
+            <a:avLst/>
+          </a:prstGeom>
+          <a:noFill/>
+          <a:extLst>
+            <a:ext uri="{909E8E84-426E-40DD-AFC4-6F175D3DCCD1}">
+              <a14:hiddenFill xmlns:a14="http://schemas.microsoft.com/office/drawing/2010/main">
+                <a:solidFill>
+                  <a:srgbClr val="FFFFFF"/>
+                </a:solidFill>
+              </a14:hiddenFill>
+            </a:ext>
+          </a:extLst>
+        </p:spPr>
+      </p:pic>
+    </p:spTree>
+    <p:extLst>
+      <p:ext uri="{BB962C8B-B14F-4D97-AF65-F5344CB8AC3E}">
+        <p14:creationId xmlns:p14="http://schemas.microsoft.com/office/powerpoint/2010/main" val="946952467"/>
+      </p:ext>
+    </p:extLst>
+  </p:cSld>
+  <p:clrMapOvr>
+    <a:masterClrMapping/>
+  </p:clrMapOvr>
+</p:sld>
+</file>
+
+<file path=ppt/slides/slide8.xml><?xml version="1.0" encoding="utf-8"?>
+<p:sld xmlns:a="http://schemas.openxmlformats.org/drawingml/2006/main" xmlns:r="http://schemas.openxmlformats.org/officeDocument/2006/relationships" xmlns:p="http://schemas.openxmlformats.org/presentationml/2006/main">
+  <p:cSld>
+    <p:spTree>
+      <p:nvGrpSpPr>
+        <p:cNvPr id="1" name=""/>
+        <p:cNvGrpSpPr/>
+        <p:nvPr/>
+      </p:nvGrpSpPr>
+      <p:grpSpPr>
+        <a:xfrm>
+          <a:off x="0" y="0"/>
+          <a:ext cx="0" cy="0"/>
+          <a:chOff x="0" y="0"/>
+          <a:chExt cx="0" cy="0"/>
+        </a:xfrm>
+      </p:grpSpPr>
+      <p:sp>
+        <p:nvSpPr>
+          <p:cNvPr id="2" name="Title 1">
+            <a:extLst>
+              <a:ext uri="{FF2B5EF4-FFF2-40B4-BE49-F238E27FC236}">
+                <a16:creationId xmlns:a16="http://schemas.microsoft.com/office/drawing/2014/main" id="{1CC6B0CD-E74D-BE1E-414C-3CD3EF0BD00C}"/>
+              </a:ext>
+            </a:extLst>
+          </p:cNvPr>
+          <p:cNvSpPr>
+            <a:spLocks noGrp="1"/>
+          </p:cNvSpPr>
+          <p:nvPr>
+            <p:ph type="title"/>
+          </p:nvPr>
+        </p:nvSpPr>
+        <p:spPr/>
+        <p:txBody>
+          <a:bodyPr/>
+          <a:lstStyle/>
+          <a:p>
+            <a:r>
+              <a:rPr lang="en-US" dirty="0"/>
+              <a:t>Unit Testing / </a:t>
+            </a:r>
+            <a:r>
+              <a:rPr lang="en-US" dirty="0" err="1"/>
+              <a:t>Reqts</a:t>
+            </a:r>
+            <a:r>
+              <a:rPr lang="en-US" dirty="0"/>
+              <a:t>. Framework</a:t>
+            </a:r>
+          </a:p>
+        </p:txBody>
+      </p:sp>
+      <p:sp>
+        <p:nvSpPr>
+          <p:cNvPr id="3" name="Content Placeholder 2">
+            <a:extLst>
+              <a:ext uri="{FF2B5EF4-FFF2-40B4-BE49-F238E27FC236}">
+                <a16:creationId xmlns:a16="http://schemas.microsoft.com/office/drawing/2014/main" id="{CEFDA605-4A2B-6CAF-CFDB-7A668CF8426C}"/>
+              </a:ext>
+            </a:extLst>
+          </p:cNvPr>
+          <p:cNvSpPr>
+            <a:spLocks noGrp="1"/>
+          </p:cNvSpPr>
+          <p:nvPr>
+            <p:ph idx="1"/>
+          </p:nvPr>
+        </p:nvSpPr>
+        <p:spPr/>
+        <p:txBody>
+          <a:bodyPr/>
+          <a:lstStyle/>
+          <a:p>
+            <a:r>
+              <a:rPr lang="en-US" dirty="0"/>
+              <a:t>Given – When – Then</a:t>
+            </a:r>
+          </a:p>
+          <a:p>
+            <a:pPr lvl="1"/>
+            <a:r>
+              <a:rPr lang="en-US" dirty="0"/>
+              <a:t>Given:  The initial conditions / prerequisites</a:t>
+            </a:r>
+          </a:p>
+          <a:p>
+            <a:pPr lvl="1"/>
+            <a:r>
+              <a:rPr lang="en-US" dirty="0"/>
+              <a:t>When:  The action or event to be verified</a:t>
+            </a:r>
+          </a:p>
+          <a:p>
+            <a:pPr lvl="1"/>
+            <a:r>
+              <a:rPr lang="en-US" dirty="0"/>
+              <a:t>Then:  The outcomes of the action or event</a:t>
+            </a:r>
+          </a:p>
+          <a:p>
+            <a:pPr lvl="1"/>
+            <a:endParaRPr lang="en-US" dirty="0"/>
+          </a:p>
+          <a:p>
+            <a:r>
+              <a:rPr lang="en-US" dirty="0"/>
+              <a:t>Useful for formulating unit tests based on requirements</a:t>
+            </a:r>
+          </a:p>
+          <a:p>
+            <a:r>
+              <a:rPr lang="en-US" dirty="0"/>
+              <a:t>Used to communicate with non-technical stakeholders</a:t>
+            </a:r>
+          </a:p>
+          <a:p>
+            <a:endParaRPr lang="en-US" dirty="0"/>
+          </a:p>
+          <a:p>
+            <a:r>
+              <a:rPr lang="en-US" dirty="0"/>
+              <a:t>Keep tests small!!</a:t>
+            </a:r>
+          </a:p>
+        </p:txBody>
+      </p:sp>
+      <p:sp>
+        <p:nvSpPr>
+          <p:cNvPr id="4" name="Date Placeholder 3">
+            <a:extLst>
+              <a:ext uri="{FF2B5EF4-FFF2-40B4-BE49-F238E27FC236}">
+                <a16:creationId xmlns:a16="http://schemas.microsoft.com/office/drawing/2014/main" id="{25A84E67-D772-02EE-2CB1-D80A2922B716}"/>
+              </a:ext>
+            </a:extLst>
+          </p:cNvPr>
+          <p:cNvSpPr>
+            <a:spLocks noGrp="1"/>
+          </p:cNvSpPr>
+          <p:nvPr>
+            <p:ph type="dt" sz="half" idx="10"/>
+          </p:nvPr>
+        </p:nvSpPr>
+        <p:spPr/>
+        <p:txBody>
+          <a:bodyPr/>
+          <a:lstStyle/>
+          <a:p>
+            <a:fld id="{AD622D1A-DF83-41A8-85FF-04D90BF831D3}" type="datetime3">
+              <a:rPr lang="en-US" smtClean="0"/>
+              <a:t>15 June 2026</a:t>
+            </a:fld>
+            <a:endParaRPr lang="en-US"/>
+          </a:p>
+        </p:txBody>
+      </p:sp>
+      <p:sp>
+        <p:nvSpPr>
+          <p:cNvPr id="5" name="Slide Number Placeholder 4">
+            <a:extLst>
+              <a:ext uri="{FF2B5EF4-FFF2-40B4-BE49-F238E27FC236}">
+                <a16:creationId xmlns:a16="http://schemas.microsoft.com/office/drawing/2014/main" id="{E76A20B5-183D-3DB8-5673-BF11A0ADE8EC}"/>
+              </a:ext>
+            </a:extLst>
+          </p:cNvPr>
+          <p:cNvSpPr>
+            <a:spLocks noGrp="1"/>
+          </p:cNvSpPr>
+          <p:nvPr>
+            <p:ph type="sldNum" sz="quarter" idx="11"/>
+          </p:nvPr>
+        </p:nvSpPr>
+        <p:spPr/>
+        <p:txBody>
+          <a:bodyPr/>
+          <a:lstStyle/>
+          <a:p>
+            <a:fld id="{64E5BE4B-2FBF-4174-9E62-85FAD1CB43A6}" type="slidenum">
+              <a:rPr lang="en-US" smtClean="0"/>
+              <a:pPr/>
+              <a:t>8</a:t>
+            </a:fld>
+            <a:endParaRPr lang="en-US"/>
+          </a:p>
+        </p:txBody>
+      </p:sp>
+    </p:spTree>
+    <p:extLst>
+      <p:ext uri="{BB962C8B-B14F-4D97-AF65-F5344CB8AC3E}">
+        <p14:creationId xmlns:p14="http://schemas.microsoft.com/office/powerpoint/2010/main" val="1048877669"/>
+      </p:ext>
+    </p:extLst>
+  </p:cSld>
+  <p:clrMapOvr>
+    <a:masterClrMapping/>
+  </p:clrMapOvr>
+</p:sld>
+</file>
+
+<file path=ppt/slides/slide9.xml><?xml version="1.0" encoding="utf-8"?>
+<p:sld xmlns:a="http://schemas.openxmlformats.org/drawingml/2006/main" xmlns:r="http://schemas.openxmlformats.org/officeDocument/2006/relationships" xmlns:p="http://schemas.openxmlformats.org/presentationml/2006/main">
+  <p:cSld>
+    <p:spTree>
+      <p:nvGrpSpPr>
+        <p:cNvPr id="1" name=""/>
+        <p:cNvGrpSpPr/>
+        <p:nvPr/>
+      </p:nvGrpSpPr>
+      <p:grpSpPr>
+        <a:xfrm>
+          <a:off x="0" y="0"/>
+          <a:ext cx="0" cy="0"/>
+          <a:chOff x="0" y="0"/>
+          <a:chExt cx="0" cy="0"/>
+        </a:xfrm>
+      </p:grpSpPr>
+      <p:sp>
+        <p:nvSpPr>
+          <p:cNvPr id="2" name="Title 1">
+            <a:extLst>
+              <a:ext uri="{FF2B5EF4-FFF2-40B4-BE49-F238E27FC236}">
+                <a16:creationId xmlns:a16="http://schemas.microsoft.com/office/drawing/2014/main" id="{D31B9D93-4180-EF54-50FF-00DB19422125}"/>
+              </a:ext>
+            </a:extLst>
+          </p:cNvPr>
+          <p:cNvSpPr>
+            <a:spLocks noGrp="1"/>
+          </p:cNvSpPr>
+          <p:nvPr>
+            <p:ph type="title"/>
+          </p:nvPr>
+        </p:nvSpPr>
+        <p:spPr/>
+        <p:txBody>
+          <a:bodyPr/>
+          <a:lstStyle/>
+          <a:p>
+            <a:endParaRPr lang="en-US"/>
+          </a:p>
+        </p:txBody>
+      </p:sp>
+      <p:sp>
+        <p:nvSpPr>
+          <p:cNvPr id="4" name="Date Placeholder 3">
+            <a:extLst>
+              <a:ext uri="{FF2B5EF4-FFF2-40B4-BE49-F238E27FC236}">
+                <a16:creationId xmlns:a16="http://schemas.microsoft.com/office/drawing/2014/main" id="{5BECD1D4-5C92-E15E-754F-BC4FD4C790F4}"/>
+              </a:ext>
+            </a:extLst>
+          </p:cNvPr>
+          <p:cNvSpPr>
+            <a:spLocks noGrp="1"/>
+          </p:cNvSpPr>
+          <p:nvPr>
+            <p:ph type="dt" sz="half" idx="10"/>
+          </p:nvPr>
+        </p:nvSpPr>
+        <p:spPr/>
+        <p:txBody>
+          <a:bodyPr/>
+          <a:lstStyle/>
+          <a:p>
+            <a:fld id="{AD622D1A-DF83-41A8-85FF-04D90BF831D3}" type="datetime3">
+              <a:rPr lang="en-US" smtClean="0"/>
+              <a:t>15 June 2026</a:t>
+            </a:fld>
+            <a:endParaRPr lang="en-US"/>
+          </a:p>
+        </p:txBody>
+      </p:sp>
+      <p:sp>
+        <p:nvSpPr>
+          <p:cNvPr id="5" name="Slide Number Placeholder 4">
+            <a:extLst>
+              <a:ext uri="{FF2B5EF4-FFF2-40B4-BE49-F238E27FC236}">
+                <a16:creationId xmlns:a16="http://schemas.microsoft.com/office/drawing/2014/main" id="{2A91E27D-B0B5-62F1-862A-867482461195}"/>
+              </a:ext>
+            </a:extLst>
+          </p:cNvPr>
+          <p:cNvSpPr>
+            <a:spLocks noGrp="1"/>
+          </p:cNvSpPr>
+          <p:nvPr>
+            <p:ph type="sldNum" sz="quarter" idx="11"/>
+          </p:nvPr>
+        </p:nvSpPr>
+        <p:spPr/>
+        <p:txBody>
+          <a:bodyPr/>
+          <a:lstStyle/>
+          <a:p>
+            <a:fld id="{64E5BE4B-2FBF-4174-9E62-85FAD1CB43A6}" type="slidenum">
+              <a:rPr lang="en-US" smtClean="0"/>
+              <a:pPr/>
+              <a:t>9</a:t>
+            </a:fld>
+            <a:endParaRPr lang="en-US"/>
+          </a:p>
+        </p:txBody>
+      </p:sp>
+      <p:pic>
+        <p:nvPicPr>
+          <p:cNvPr id="4098" name="Picture 2" descr="Agile Glossary: Agile acronyms and terms explained">
+            <a:extLst>
+              <a:ext uri="{FF2B5EF4-FFF2-40B4-BE49-F238E27FC236}">
+                <a16:creationId xmlns:a16="http://schemas.microsoft.com/office/drawing/2014/main" id="{98A883D0-A54F-C3ED-9369-C3576E68970C}"/>
+              </a:ext>
+            </a:extLst>
+          </p:cNvPr>
+          <p:cNvPicPr>
+            <a:picLocks noGrp="1" noChangeAspect="1" noChangeArrowheads="1"/>
+          </p:cNvPicPr>
+          <p:nvPr>
+            <p:ph idx="1"/>
+          </p:nvPr>
+        </p:nvPicPr>
+        <p:blipFill>
+          <a:blip r:embed="rId2">
+            <a:extLst>
+              <a:ext uri="{28A0092B-C50C-407E-A947-70E740481C1C}">
+                <a14:useLocalDpi xmlns:a14="http://schemas.microsoft.com/office/drawing/2010/main" val="0"/>
+              </a:ext>
+            </a:extLst>
+          </a:blip>
+          <a:srcRect/>
+          <a:stretch>
+            <a:fillRect/>
+          </a:stretch>
+        </p:blipFill>
+        <p:spPr bwMode="auto">
+          <a:xfrm>
+            <a:off x="410764" y="170512"/>
+            <a:ext cx="8321040" cy="4802475"/>
+          </a:xfrm>
+          <a:prstGeom prst="rect">
+            <a:avLst/>
+          </a:prstGeom>
+          <a:noFill/>
+          <a:extLst>
+            <a:ext uri="{909E8E84-426E-40DD-AFC4-6F175D3DCCD1}">
+              <a14:hiddenFill xmlns:a14="http://schemas.microsoft.com/office/drawing/2010/main">
+                <a:solidFill>
+                  <a:srgbClr val="FFFFFF"/>
+                </a:solidFill>
+              </a14:hiddenFill>
+            </a:ext>
+          </a:extLst>
+        </p:spPr>
+      </p:pic>
+    </p:spTree>
+    <p:extLst>
+      <p:ext uri="{BB962C8B-B14F-4D97-AF65-F5344CB8AC3E}">
+        <p14:creationId xmlns:p14="http://schemas.microsoft.com/office/powerpoint/2010/main" val="1109992248"/>
       </p:ext>
     </p:extLst>
   </p:cSld>
